--- a/preview_v7/cn/l-cn-bs-u2-5.pptx
+++ b/preview_v7/cn/l-cn-bs-u2-5.pptx
@@ -3140,31 +3140,47 @@
           </a:p>
         </p:txBody>
       </p:sp>
-      <p:pic>
-        <p:nvPicPr>
-          <p:cNvPr id="3" name="Picture 2" descr="mic.jpg"/>
-          <p:cNvPicPr>
-            <a:picLocks noChangeAspect="1"/>
-          </p:cNvPicPr>
-          <p:nvPr/>
-        </p:nvPicPr>
-        <p:blipFill>
-          <a:blip r:embed="rId2"/>
-          <a:srcRect t="7844" b="7844"/>
-          <a:stretch>
-            <a:fillRect/>
-          </a:stretch>
-        </p:blipFill>
-        <p:spPr>
-          <a:xfrm>
-            <a:off x="0" y="0"/>
-            <a:ext cx="12191695" cy="6858000"/>
-          </a:xfrm>
-          <a:prstGeom prst="rect">
-            <a:avLst/>
-          </a:prstGeom>
-        </p:spPr>
-      </p:pic>
+      <p:sp>
+        <p:nvSpPr>
+          <p:cNvPr id="3" name="TextBox 2"/>
+          <p:cNvSpPr txBox="1"/>
+          <p:nvPr/>
+        </p:nvSpPr>
+        <p:spPr>
+          <a:xfrm>
+            <a:off x="640080" y="640080"/>
+            <a:ext cx="10911535" cy="502920"/>
+          </a:xfrm>
+          <a:prstGeom prst="rect">
+            <a:avLst/>
+          </a:prstGeom>
+          <a:noFill/>
+        </p:spPr>
+        <p:txBody>
+          <a:bodyPr wrap="square" anchor="t" lIns="0" rIns="0" tIns="0" bIns="0">
+            <a:spAutoFit/>
+          </a:bodyPr>
+          <a:lstStyle/>
+          <a:p>
+            <a:pPr algn="l">
+              <a:spcAft>
+                <a:spcPts val="0"/>
+              </a:spcAft>
+            </a:pPr>
+            <a:r>
+              <a:rPr sz="1200" b="1">
+                <a:solidFill>
+                  <a:srgbClr val="B23A2A"/>
+                </a:solidFill>
+                <a:latin typeface="微软雅黑"/>
+                <a:ea typeface="微软雅黑"/>
+                <a:cs typeface="微软雅黑"/>
+              </a:rPr>
+              <a:t>语文 · 必修上册 · 第2单元 劳动光荣</a:t>
+            </a:r>
+          </a:p>
+        </p:txBody>
+      </p:sp>
       <p:sp>
         <p:nvSpPr>
           <p:cNvPr id="4" name="Rectangle 3"/>
@@ -3173,16 +3189,14 @@
         </p:nvSpPr>
         <p:spPr>
           <a:xfrm>
-            <a:off x="0" y="0"/>
-            <a:ext cx="12191695" cy="6858000"/>
+            <a:off x="640080" y="1207008"/>
+            <a:ext cx="822960" cy="30480"/>
           </a:xfrm>
           <a:prstGeom prst="rect">
             <a:avLst/>
           </a:prstGeom>
           <a:solidFill>
-            <a:srgbClr val="1C2A33">
-              <a:alpha val="50000"/>
-            </a:srgbClr>
+            <a:srgbClr val="B23A2A"/>
           </a:solidFill>
           <a:ln>
             <a:noFill/>
@@ -3213,14 +3227,92 @@
       </p:sp>
       <p:sp>
         <p:nvSpPr>
-          <p:cNvPr id="5" name="Rectangle 4"/>
+          <p:cNvPr id="5" name="TextBox 4"/>
+          <p:cNvSpPr txBox="1"/>
+          <p:nvPr/>
+        </p:nvSpPr>
+        <p:spPr>
+          <a:xfrm>
+            <a:off x="640080" y="1737360"/>
+            <a:ext cx="10911535" cy="2011680"/>
+          </a:xfrm>
+          <a:prstGeom prst="rect">
+            <a:avLst/>
+          </a:prstGeom>
+          <a:noFill/>
+        </p:spPr>
+        <p:txBody>
+          <a:bodyPr wrap="square" anchor="t" lIns="0" rIns="0" tIns="0" bIns="0">
+            <a:spAutoFit/>
+          </a:bodyPr>
+          <a:lstStyle/>
+          <a:p>
+            <a:pPr algn="l">
+              <a:lnSpc>
+                <a:spcPct val="115000"/>
+              </a:lnSpc>
+            </a:pPr>
+            <a:r>
+              <a:rPr sz="4000" b="1">
+                <a:solidFill>
+                  <a:srgbClr val="1C2A33"/>
+                </a:solidFill>
+                <a:latin typeface="楷体"/>
+                <a:ea typeface="楷体"/>
+                <a:cs typeface="楷体"/>
+              </a:rPr>
+              <a:t>口语交流——人物访谈与新闻播报训练</a:t>
+            </a:r>
+          </a:p>
+        </p:txBody>
+      </p:sp>
+      <p:sp>
+        <p:nvSpPr>
+          <p:cNvPr id="6" name="TextBox 5"/>
+          <p:cNvSpPr txBox="1"/>
+          <p:nvPr/>
+        </p:nvSpPr>
+        <p:spPr>
+          <a:xfrm>
+            <a:off x="640080" y="3840480"/>
+            <a:ext cx="10911535" cy="457200"/>
+          </a:xfrm>
+          <a:prstGeom prst="rect">
+            <a:avLst/>
+          </a:prstGeom>
+          <a:noFill/>
+        </p:spPr>
+        <p:txBody>
+          <a:bodyPr wrap="square" anchor="t" lIns="0" rIns="0" tIns="0" bIns="0">
+            <a:spAutoFit/>
+          </a:bodyPr>
+          <a:lstStyle/>
+          <a:p>
+            <a:pPr algn="l"/>
+            <a:r>
+              <a:rPr sz="1700" b="1">
+                <a:solidFill>
+                  <a:srgbClr val="B23A2A"/>
+                </a:solidFill>
+                <a:latin typeface="微软雅黑"/>
+                <a:ea typeface="微软雅黑"/>
+                <a:cs typeface="微软雅黑"/>
+              </a:rPr>
+              <a:t>口语交流  ·  第5课时  ·  45分钟</a:t>
+            </a:r>
+          </a:p>
+        </p:txBody>
+      </p:sp>
+      <p:sp>
+        <p:nvSpPr>
+          <p:cNvPr id="7" name="Rectangle 6"/>
           <p:cNvSpPr/>
           <p:nvPr/>
         </p:nvSpPr>
         <p:spPr>
           <a:xfrm>
-            <a:off x="640080" y="1005840"/>
-            <a:ext cx="822960" cy="38100"/>
+            <a:off x="640080" y="5394960"/>
+            <a:ext cx="2011680" cy="33020"/>
           </a:xfrm>
           <a:prstGeom prst="rect">
             <a:avLst/>
@@ -3257,14 +3349,14 @@
       </p:sp>
       <p:sp>
         <p:nvSpPr>
-          <p:cNvPr id="6" name="TextBox 5"/>
+          <p:cNvPr id="8" name="TextBox 7"/>
           <p:cNvSpPr txBox="1"/>
           <p:nvPr/>
         </p:nvSpPr>
         <p:spPr>
           <a:xfrm>
-            <a:off x="640080" y="1188720"/>
-            <a:ext cx="10058400" cy="457200"/>
+            <a:off x="640080" y="5623560"/>
+            <a:ext cx="10911535" cy="548640"/>
           </a:xfrm>
           <a:prstGeom prst="rect">
             <a:avLst/>
@@ -3279,89 +3371,15 @@
           <a:p>
             <a:pPr algn="l"/>
             <a:r>
-              <a:rPr sz="1500" b="1">
-                <a:solidFill>
-                  <a:srgbClr val="C8A86B"/>
+              <a:rPr sz="1400" b="0">
+                <a:solidFill>
+                  <a:srgbClr val="6B6258"/>
                 </a:solidFill>
                 <a:latin typeface="微软雅黑"/>
                 <a:ea typeface="微软雅黑"/>
                 <a:cs typeface="微软雅黑"/>
               </a:rPr>
-              <a:t>必修上 第二单元 · 劳动光荣 · 第五课时</a:t>
-            </a:r>
-          </a:p>
-        </p:txBody>
-      </p:sp>
-      <p:sp>
-        <p:nvSpPr>
-          <p:cNvPr id="7" name="TextBox 6"/>
-          <p:cNvSpPr txBox="1"/>
-          <p:nvPr/>
-        </p:nvSpPr>
-        <p:spPr>
-          <a:xfrm>
-            <a:off x="640080" y="1920240"/>
-            <a:ext cx="11247120" cy="2194560"/>
-          </a:xfrm>
-          <a:prstGeom prst="rect">
-            <a:avLst/>
-          </a:prstGeom>
-          <a:noFill/>
-        </p:spPr>
-        <p:txBody>
-          <a:bodyPr wrap="square" anchor="t" lIns="0" rIns="0" tIns="0" bIns="0">
-            <a:spAutoFit/>
-          </a:bodyPr>
-          <a:lstStyle/>
-          <a:p>
-            <a:pPr algn="l"/>
-            <a:r>
-              <a:rPr sz="5200" b="1">
-                <a:solidFill>
-                  <a:srgbClr val="FFFFFF"/>
-                </a:solidFill>
-                <a:latin typeface="楷体"/>
-                <a:ea typeface="楷体"/>
-                <a:cs typeface="楷体"/>
-              </a:rPr>
-              <a:t>口语交流</a:t>
-            </a:r>
-          </a:p>
-        </p:txBody>
-      </p:sp>
-      <p:sp>
-        <p:nvSpPr>
-          <p:cNvPr id="8" name="TextBox 7"/>
-          <p:cNvSpPr txBox="1"/>
-          <p:nvPr/>
-        </p:nvSpPr>
-        <p:spPr>
-          <a:xfrm>
-            <a:off x="640080" y="2971800"/>
-            <a:ext cx="11247120" cy="1097280"/>
-          </a:xfrm>
-          <a:prstGeom prst="rect">
-            <a:avLst/>
-          </a:prstGeom>
-          <a:noFill/>
-        </p:spPr>
-        <p:txBody>
-          <a:bodyPr wrap="square" anchor="t" lIns="0" rIns="0" tIns="0" bIns="0">
-            <a:spAutoFit/>
-          </a:bodyPr>
-          <a:lstStyle/>
-          <a:p>
-            <a:pPr algn="l"/>
-            <a:r>
-              <a:rPr sz="3400" b="1">
-                <a:solidFill>
-                  <a:srgbClr val="C8A86B"/>
-                </a:solidFill>
-                <a:latin typeface="楷体"/>
-                <a:ea typeface="楷体"/>
-                <a:cs typeface="楷体"/>
-              </a:rPr>
-              <a:t>人物访谈 与 新闻播报训练</a:t>
+              <a:t>学习任务群：实用性阅读与交流    |    年级：高一</a:t>
             </a:r>
           </a:p>
         </p:txBody>
@@ -3369,88 +3387,6 @@
       <p:sp>
         <p:nvSpPr>
           <p:cNvPr id="9" name="TextBox 8"/>
-          <p:cNvSpPr txBox="1"/>
-          <p:nvPr/>
-        </p:nvSpPr>
-        <p:spPr>
-          <a:xfrm>
-            <a:off x="640080" y="4297680"/>
-            <a:ext cx="10972800" cy="1005840"/>
-          </a:xfrm>
-          <a:prstGeom prst="rect">
-            <a:avLst/>
-          </a:prstGeom>
-          <a:noFill/>
-        </p:spPr>
-        <p:txBody>
-          <a:bodyPr wrap="square" anchor="t" lIns="0" rIns="0" tIns="0" bIns="0">
-            <a:spAutoFit/>
-          </a:bodyPr>
-          <a:lstStyle/>
-          <a:p>
-            <a:pPr algn="l">
-              <a:lnSpc>
-                <a:spcPct val="140000"/>
-              </a:lnSpc>
-            </a:pPr>
-            <a:r>
-              <a:rPr sz="1700" b="0">
-                <a:solidFill>
-                  <a:srgbClr val="E7DFD2"/>
-                </a:solidFill>
-                <a:latin typeface="楷体"/>
-                <a:ea typeface="楷体"/>
-                <a:cs typeface="楷体"/>
-              </a:rPr>
-              <a:t>把前四课读到的劳动人物，用口语"说出来"——</a:t>
-            </a:r>
-          </a:p>
-        </p:txBody>
-      </p:sp>
-      <p:sp>
-        <p:nvSpPr>
-          <p:cNvPr id="10" name="TextBox 9"/>
-          <p:cNvSpPr txBox="1"/>
-          <p:nvPr/>
-        </p:nvSpPr>
-        <p:spPr>
-          <a:xfrm>
-            <a:off x="640080" y="4892040"/>
-            <a:ext cx="10972800" cy="914400"/>
-          </a:xfrm>
-          <a:prstGeom prst="rect">
-            <a:avLst/>
-          </a:prstGeom>
-          <a:noFill/>
-        </p:spPr>
-        <p:txBody>
-          <a:bodyPr wrap="square" anchor="t" lIns="0" rIns="0" tIns="0" bIns="0">
-            <a:spAutoFit/>
-          </a:bodyPr>
-          <a:lstStyle/>
-          <a:p>
-            <a:pPr algn="l">
-              <a:lnSpc>
-                <a:spcPct val="140000"/>
-              </a:lnSpc>
-            </a:pPr>
-            <a:r>
-              <a:rPr sz="1700" b="0">
-                <a:solidFill>
-                  <a:srgbClr val="FFFFFF"/>
-                </a:solidFill>
-                <a:latin typeface="楷体"/>
-                <a:ea typeface="楷体"/>
-                <a:cs typeface="楷体"/>
-              </a:rPr>
-              <a:t>访谈练"问与答"，播报练"说与听"。</a:t>
-            </a:r>
-          </a:p>
-        </p:txBody>
-      </p:sp>
-      <p:sp>
-        <p:nvSpPr>
-          <p:cNvPr id="11" name="TextBox 10"/>
           <p:cNvSpPr txBox="1"/>
           <p:nvPr/>
         </p:nvSpPr>
@@ -3583,7 +3519,7 @@
                 <a:ea typeface="微软雅黑"/>
                 <a:cs typeface="微软雅黑"/>
               </a:rPr>
-              <a:t>本课目标</a:t>
+              <a:t>学习目标</a:t>
             </a:r>
           </a:p>
         </p:txBody>
@@ -3634,51 +3570,14 @@
       </p:sp>
       <p:sp>
         <p:nvSpPr>
-          <p:cNvPr id="5" name="TextBox 4"/>
-          <p:cNvSpPr txBox="1"/>
-          <p:nvPr/>
-        </p:nvSpPr>
-        <p:spPr>
-          <a:xfrm>
-            <a:off x="640080" y="1325880"/>
-            <a:ext cx="10058400" cy="640080"/>
-          </a:xfrm>
-          <a:prstGeom prst="rect">
-            <a:avLst/>
-          </a:prstGeom>
-          <a:noFill/>
-        </p:spPr>
-        <p:txBody>
-          <a:bodyPr wrap="square" anchor="t" lIns="0" rIns="0" tIns="0" bIns="0">
-            <a:spAutoFit/>
-          </a:bodyPr>
-          <a:lstStyle/>
-          <a:p>
-            <a:pPr algn="l"/>
-            <a:r>
-              <a:rPr sz="3200" b="1">
-                <a:solidFill>
-                  <a:srgbClr val="1C2A33"/>
-                </a:solidFill>
-                <a:latin typeface="楷体"/>
-                <a:ea typeface="楷体"/>
-                <a:cs typeface="楷体"/>
-              </a:rPr>
-              <a:t>四向学习目标</a:t>
-            </a:r>
-          </a:p>
-        </p:txBody>
-      </p:sp>
-      <p:sp>
-        <p:nvSpPr>
-          <p:cNvPr id="6" name="Rounded Rectangle 5"/>
+          <p:cNvPr id="5" name="Rounded Rectangle 4"/>
           <p:cNvSpPr/>
           <p:nvPr/>
         </p:nvSpPr>
         <p:spPr>
           <a:xfrm>
-            <a:off x="640080" y="2377440"/>
-            <a:ext cx="2453563" cy="3291840"/>
+            <a:off x="640080" y="1417320"/>
+            <a:ext cx="5349240" cy="2057400"/>
           </a:xfrm>
           <a:prstGeom prst="roundRect">
             <a:avLst/>
@@ -3686,7 +3585,7 @@
           <a:solidFill>
             <a:srgbClr val="FFFFFF"/>
           </a:solidFill>
-          <a:ln w="20320">
+          <a:ln w="22860">
             <a:solidFill>
               <a:srgbClr val="B23A2A"/>
             </a:solidFill>
@@ -3717,14 +3616,14 @@
       </p:sp>
       <p:sp>
         <p:nvSpPr>
-          <p:cNvPr id="7" name="Oval 6"/>
+          <p:cNvPr id="6" name="Oval 5"/>
           <p:cNvSpPr/>
           <p:nvPr/>
         </p:nvSpPr>
         <p:spPr>
           <a:xfrm>
-            <a:off x="1455381" y="2697480"/>
-            <a:ext cx="822960" cy="822960"/>
+            <a:off x="804672" y="1581912"/>
+            <a:ext cx="457200" cy="457200"/>
           </a:xfrm>
           <a:prstGeom prst="ellipse">
             <a:avLst/>
@@ -3761,14 +3660,14 @@
       </p:sp>
       <p:sp>
         <p:nvSpPr>
-          <p:cNvPr id="8" name="TextBox 7"/>
+          <p:cNvPr id="7" name="TextBox 6"/>
           <p:cNvSpPr txBox="1"/>
           <p:nvPr/>
         </p:nvSpPr>
         <p:spPr>
           <a:xfrm>
-            <a:off x="1455381" y="2880360"/>
-            <a:ext cx="822960" cy="457200"/>
+            <a:off x="804672" y="1636776"/>
+            <a:ext cx="457200" cy="384048"/>
           </a:xfrm>
           <a:prstGeom prst="rect">
             <a:avLst/>
@@ -3783,107 +3682,111 @@
           <a:p>
             <a:pPr algn="ctr"/>
             <a:r>
-              <a:rPr sz="2400" b="1">
+              <a:rPr sz="1600" b="1">
                 <a:solidFill>
                   <a:srgbClr val="FFFFFF"/>
+                </a:solidFill>
+                <a:latin typeface="微软雅黑"/>
+                <a:ea typeface="微软雅黑"/>
+                <a:cs typeface="微软雅黑"/>
+              </a:rPr>
+              <a:t>1</a:t>
+            </a:r>
+          </a:p>
+        </p:txBody>
+      </p:sp>
+      <p:sp>
+        <p:nvSpPr>
+          <p:cNvPr id="8" name="TextBox 7"/>
+          <p:cNvSpPr txBox="1"/>
+          <p:nvPr/>
+        </p:nvSpPr>
+        <p:spPr>
+          <a:xfrm>
+            <a:off x="1371600" y="1527048"/>
+            <a:ext cx="4434840" cy="457200"/>
+          </a:xfrm>
+          <a:prstGeom prst="rect">
+            <a:avLst/>
+          </a:prstGeom>
+          <a:noFill/>
+        </p:spPr>
+        <p:txBody>
+          <a:bodyPr wrap="square" anchor="t" lIns="0" rIns="0" tIns="0" bIns="0">
+            <a:spAutoFit/>
+          </a:bodyPr>
+          <a:lstStyle/>
+          <a:p>
+            <a:pPr algn="l">
+              <a:lnSpc>
+                <a:spcPct val="110000"/>
+              </a:lnSpc>
+            </a:pPr>
+            <a:r>
+              <a:rPr sz="1600" b="1">
+                <a:solidFill>
+                  <a:srgbClr val="1C2A33"/>
+                </a:solidFill>
+                <a:latin typeface="微软雅黑"/>
+                <a:ea typeface="微软雅黑"/>
+                <a:cs typeface="微软雅黑"/>
+              </a:rPr>
+              <a:t>目标</a:t>
+            </a:r>
+          </a:p>
+        </p:txBody>
+      </p:sp>
+      <p:sp>
+        <p:nvSpPr>
+          <p:cNvPr id="9" name="TextBox 8"/>
+          <p:cNvSpPr txBox="1"/>
+          <p:nvPr/>
+        </p:nvSpPr>
+        <p:spPr>
+          <a:xfrm>
+            <a:off x="1371600" y="1965960"/>
+            <a:ext cx="4434840" cy="1417320"/>
+          </a:xfrm>
+          <a:prstGeom prst="rect">
+            <a:avLst/>
+          </a:prstGeom>
+          <a:noFill/>
+        </p:spPr>
+        <p:txBody>
+          <a:bodyPr wrap="square" anchor="t" lIns="0" rIns="0" tIns="0" bIns="0">
+            <a:spAutoFit/>
+          </a:bodyPr>
+          <a:lstStyle/>
+          <a:p>
+            <a:pPr algn="l">
+              <a:lnSpc>
+                <a:spcPct val="128000"/>
+              </a:lnSpc>
+            </a:pPr>
+            <a:r>
+              <a:rPr sz="1200" b="0">
+                <a:solidFill>
+                  <a:srgbClr val="1C2A33"/>
                 </a:solidFill>
                 <a:latin typeface="楷体"/>
                 <a:ea typeface="楷体"/>
                 <a:cs typeface="楷体"/>
               </a:rPr>
-              <a:t>1</a:t>
-            </a:r>
-          </a:p>
-        </p:txBody>
-      </p:sp>
-      <p:sp>
-        <p:nvSpPr>
-          <p:cNvPr id="9" name="TextBox 8"/>
-          <p:cNvSpPr txBox="1"/>
-          <p:nvPr/>
-        </p:nvSpPr>
-        <p:spPr>
-          <a:xfrm>
-            <a:off x="822960" y="3749040"/>
-            <a:ext cx="2087803" cy="548640"/>
-          </a:xfrm>
-          <a:prstGeom prst="rect">
-            <a:avLst/>
-          </a:prstGeom>
-          <a:noFill/>
-        </p:spPr>
-        <p:txBody>
-          <a:bodyPr wrap="square" anchor="t" lIns="0" rIns="0" tIns="0" bIns="0">
-            <a:spAutoFit/>
-          </a:bodyPr>
-          <a:lstStyle/>
-          <a:p>
-            <a:pPr algn="ctr"/>
-            <a:r>
-              <a:rPr sz="1800" b="1">
-                <a:solidFill>
-                  <a:srgbClr val="B23A2A"/>
-                </a:solidFill>
-                <a:latin typeface="微软雅黑"/>
-                <a:ea typeface="微软雅黑"/>
-                <a:cs typeface="微软雅黑"/>
-              </a:rPr>
-              <a:t>语言能力</a:t>
-            </a:r>
-          </a:p>
-        </p:txBody>
-      </p:sp>
-      <p:sp>
-        <p:nvSpPr>
-          <p:cNvPr id="10" name="TextBox 9"/>
-          <p:cNvSpPr txBox="1"/>
-          <p:nvPr/>
-        </p:nvSpPr>
-        <p:spPr>
-          <a:xfrm>
-            <a:off x="841248" y="4343400"/>
-            <a:ext cx="2051227" cy="1188720"/>
-          </a:xfrm>
-          <a:prstGeom prst="rect">
-            <a:avLst/>
-          </a:prstGeom>
-          <a:noFill/>
-        </p:spPr>
-        <p:txBody>
-          <a:bodyPr wrap="square" anchor="t" lIns="0" rIns="0" tIns="0" bIns="0">
-            <a:spAutoFit/>
-          </a:bodyPr>
-          <a:lstStyle/>
-          <a:p>
-            <a:pPr algn="ctr">
-              <a:lnSpc>
-                <a:spcPct val="145000"/>
-              </a:lnSpc>
-            </a:pPr>
-            <a:r>
-              <a:rPr sz="1300" b="0">
-                <a:solidFill>
-                  <a:srgbClr val="1C2A33"/>
-                </a:solidFill>
-                <a:latin typeface="楷体"/>
-                <a:ea typeface="楷体"/>
-                <a:cs typeface="楷体"/>
-              </a:rPr>
-              <a:t>设计 3–5 个有层次的访谈问题；用新闻播报语态播报一段劳动人物事迹（约1分钟）。</a:t>
-            </a:r>
-          </a:p>
-        </p:txBody>
-      </p:sp>
-      <p:sp>
-        <p:nvSpPr>
-          <p:cNvPr id="11" name="Rounded Rectangle 10"/>
+              <a:t>语言能力：能设计3-5个有层次的访谈问题，用新闻播报语态播报一段劳动人物事迹（1分钟）。</a:t>
+            </a:r>
+          </a:p>
+        </p:txBody>
+      </p:sp>
+      <p:sp>
+        <p:nvSpPr>
+          <p:cNvPr id="10" name="Rounded Rectangle 9"/>
           <p:cNvSpPr/>
           <p:nvPr/>
         </p:nvSpPr>
         <p:spPr>
           <a:xfrm>
-            <a:off x="3459403" y="2377440"/>
-            <a:ext cx="2453563" cy="3291840"/>
+            <a:off x="6263640" y="1417320"/>
+            <a:ext cx="5349240" cy="2057400"/>
           </a:xfrm>
           <a:prstGeom prst="roundRect">
             <a:avLst/>
@@ -3891,9 +3794,9 @@
           <a:solidFill>
             <a:srgbClr val="FFFFFF"/>
           </a:solidFill>
-          <a:ln w="20320">
+          <a:ln w="22860">
             <a:solidFill>
-              <a:srgbClr val="2E7D6B"/>
+              <a:srgbClr val="B23A2A"/>
             </a:solidFill>
           </a:ln>
           <a:effectLst/>
@@ -3922,20 +3825,20 @@
       </p:sp>
       <p:sp>
         <p:nvSpPr>
-          <p:cNvPr id="12" name="Oval 11"/>
+          <p:cNvPr id="11" name="Oval 10"/>
           <p:cNvSpPr/>
           <p:nvPr/>
         </p:nvSpPr>
         <p:spPr>
           <a:xfrm>
-            <a:off x="4274705" y="2697480"/>
-            <a:ext cx="822960" cy="822960"/>
+            <a:off x="6428232" y="1581912"/>
+            <a:ext cx="457200" cy="457200"/>
           </a:xfrm>
           <a:prstGeom prst="ellipse">
             <a:avLst/>
           </a:prstGeom>
           <a:solidFill>
-            <a:srgbClr val="2E7D6B"/>
+            <a:srgbClr val="B23A2A"/>
           </a:solidFill>
           <a:ln>
             <a:noFill/>
@@ -3966,14 +3869,14 @@
       </p:sp>
       <p:sp>
         <p:nvSpPr>
-          <p:cNvPr id="13" name="TextBox 12"/>
+          <p:cNvPr id="12" name="TextBox 11"/>
           <p:cNvSpPr txBox="1"/>
           <p:nvPr/>
         </p:nvSpPr>
         <p:spPr>
           <a:xfrm>
-            <a:off x="4274705" y="2880360"/>
-            <a:ext cx="822960" cy="457200"/>
+            <a:off x="6428232" y="1636776"/>
+            <a:ext cx="457200" cy="384048"/>
           </a:xfrm>
           <a:prstGeom prst="rect">
             <a:avLst/>
@@ -3988,107 +3891,111 @@
           <a:p>
             <a:pPr algn="ctr"/>
             <a:r>
-              <a:rPr sz="2400" b="1">
+              <a:rPr sz="1600" b="1">
                 <a:solidFill>
                   <a:srgbClr val="FFFFFF"/>
+                </a:solidFill>
+                <a:latin typeface="微软雅黑"/>
+                <a:ea typeface="微软雅黑"/>
+                <a:cs typeface="微软雅黑"/>
+              </a:rPr>
+              <a:t>2</a:t>
+            </a:r>
+          </a:p>
+        </p:txBody>
+      </p:sp>
+      <p:sp>
+        <p:nvSpPr>
+          <p:cNvPr id="13" name="TextBox 12"/>
+          <p:cNvSpPr txBox="1"/>
+          <p:nvPr/>
+        </p:nvSpPr>
+        <p:spPr>
+          <a:xfrm>
+            <a:off x="6995160" y="1527048"/>
+            <a:ext cx="4434840" cy="457200"/>
+          </a:xfrm>
+          <a:prstGeom prst="rect">
+            <a:avLst/>
+          </a:prstGeom>
+          <a:noFill/>
+        </p:spPr>
+        <p:txBody>
+          <a:bodyPr wrap="square" anchor="t" lIns="0" rIns="0" tIns="0" bIns="0">
+            <a:spAutoFit/>
+          </a:bodyPr>
+          <a:lstStyle/>
+          <a:p>
+            <a:pPr algn="l">
+              <a:lnSpc>
+                <a:spcPct val="110000"/>
+              </a:lnSpc>
+            </a:pPr>
+            <a:r>
+              <a:rPr sz="1600" b="1">
+                <a:solidFill>
+                  <a:srgbClr val="1C2A33"/>
+                </a:solidFill>
+                <a:latin typeface="微软雅黑"/>
+                <a:ea typeface="微软雅黑"/>
+                <a:cs typeface="微软雅黑"/>
+              </a:rPr>
+              <a:t>目标</a:t>
+            </a:r>
+          </a:p>
+        </p:txBody>
+      </p:sp>
+      <p:sp>
+        <p:nvSpPr>
+          <p:cNvPr id="14" name="TextBox 13"/>
+          <p:cNvSpPr txBox="1"/>
+          <p:nvPr/>
+        </p:nvSpPr>
+        <p:spPr>
+          <a:xfrm>
+            <a:off x="6995160" y="1965960"/>
+            <a:ext cx="4434840" cy="1417320"/>
+          </a:xfrm>
+          <a:prstGeom prst="rect">
+            <a:avLst/>
+          </a:prstGeom>
+          <a:noFill/>
+        </p:spPr>
+        <p:txBody>
+          <a:bodyPr wrap="square" anchor="t" lIns="0" rIns="0" tIns="0" bIns="0">
+            <a:spAutoFit/>
+          </a:bodyPr>
+          <a:lstStyle/>
+          <a:p>
+            <a:pPr algn="l">
+              <a:lnSpc>
+                <a:spcPct val="128000"/>
+              </a:lnSpc>
+            </a:pPr>
+            <a:r>
+              <a:rPr sz="1400" b="0">
+                <a:solidFill>
+                  <a:srgbClr val="1C2A33"/>
                 </a:solidFill>
                 <a:latin typeface="楷体"/>
                 <a:ea typeface="楷体"/>
                 <a:cs typeface="楷体"/>
               </a:rPr>
-              <a:t>2</a:t>
-            </a:r>
-          </a:p>
-        </p:txBody>
-      </p:sp>
-      <p:sp>
-        <p:nvSpPr>
-          <p:cNvPr id="14" name="TextBox 13"/>
-          <p:cNvSpPr txBox="1"/>
-          <p:nvPr/>
-        </p:nvSpPr>
-        <p:spPr>
-          <a:xfrm>
-            <a:off x="3642283" y="3749040"/>
-            <a:ext cx="2087803" cy="548640"/>
-          </a:xfrm>
-          <a:prstGeom prst="rect">
-            <a:avLst/>
-          </a:prstGeom>
-          <a:noFill/>
-        </p:spPr>
-        <p:txBody>
-          <a:bodyPr wrap="square" anchor="t" lIns="0" rIns="0" tIns="0" bIns="0">
-            <a:spAutoFit/>
-          </a:bodyPr>
-          <a:lstStyle/>
-          <a:p>
-            <a:pPr algn="ctr"/>
-            <a:r>
-              <a:rPr sz="1800" b="1">
-                <a:solidFill>
-                  <a:srgbClr val="2E7D6B"/>
-                </a:solidFill>
-                <a:latin typeface="微软雅黑"/>
-                <a:ea typeface="微软雅黑"/>
-                <a:cs typeface="微软雅黑"/>
-              </a:rPr>
-              <a:t>文化意识</a:t>
-            </a:r>
-          </a:p>
-        </p:txBody>
-      </p:sp>
-      <p:sp>
-        <p:nvSpPr>
-          <p:cNvPr id="15" name="TextBox 14"/>
-          <p:cNvSpPr txBox="1"/>
-          <p:nvPr/>
-        </p:nvSpPr>
-        <p:spPr>
-          <a:xfrm>
-            <a:off x="3660571" y="4343400"/>
-            <a:ext cx="2051227" cy="1188720"/>
-          </a:xfrm>
-          <a:prstGeom prst="rect">
-            <a:avLst/>
-          </a:prstGeom>
-          <a:noFill/>
-        </p:spPr>
-        <p:txBody>
-          <a:bodyPr wrap="square" anchor="t" lIns="0" rIns="0" tIns="0" bIns="0">
-            <a:spAutoFit/>
-          </a:bodyPr>
-          <a:lstStyle/>
-          <a:p>
-            <a:pPr algn="ctr">
-              <a:lnSpc>
-                <a:spcPct val="145000"/>
-              </a:lnSpc>
-            </a:pPr>
-            <a:r>
-              <a:rPr sz="1300" b="0">
-                <a:solidFill>
-                  <a:srgbClr val="1C2A33"/>
-                </a:solidFill>
-                <a:latin typeface="楷体"/>
-                <a:ea typeface="楷体"/>
-                <a:cs typeface="楷体"/>
-              </a:rPr>
-              <a:t>在访谈与播报中深化对劳动精神的理解，感受口语传播劳动故事的文化价值。</a:t>
-            </a:r>
-          </a:p>
-        </p:txBody>
-      </p:sp>
-      <p:sp>
-        <p:nvSpPr>
-          <p:cNvPr id="16" name="Rounded Rectangle 15"/>
+              <a:t>文化意识：在访谈与播报中深化对劳动精神的理解，感受口语传播劳动故事的文化价值。</a:t>
+            </a:r>
+          </a:p>
+        </p:txBody>
+      </p:sp>
+      <p:sp>
+        <p:nvSpPr>
+          <p:cNvPr id="15" name="Rounded Rectangle 14"/>
           <p:cNvSpPr/>
           <p:nvPr/>
         </p:nvSpPr>
         <p:spPr>
           <a:xfrm>
-            <a:off x="6278727" y="2377440"/>
-            <a:ext cx="2453563" cy="3291840"/>
+            <a:off x="640080" y="3703320"/>
+            <a:ext cx="5349240" cy="2057400"/>
           </a:xfrm>
           <a:prstGeom prst="roundRect">
             <a:avLst/>
@@ -4096,9 +4003,9 @@
           <a:solidFill>
             <a:srgbClr val="FFFFFF"/>
           </a:solidFill>
-          <a:ln w="20320">
+          <a:ln w="22860">
             <a:solidFill>
-              <a:srgbClr val="C8A86B"/>
+              <a:srgbClr val="B23A2A"/>
             </a:solidFill>
           </a:ln>
           <a:effectLst/>
@@ -4127,20 +4034,20 @@
       </p:sp>
       <p:sp>
         <p:nvSpPr>
-          <p:cNvPr id="17" name="Oval 16"/>
+          <p:cNvPr id="16" name="Oval 15"/>
           <p:cNvSpPr/>
           <p:nvPr/>
         </p:nvSpPr>
         <p:spPr>
           <a:xfrm>
-            <a:off x="7094029" y="2697480"/>
-            <a:ext cx="822960" cy="822960"/>
+            <a:off x="804672" y="3867912"/>
+            <a:ext cx="457200" cy="457200"/>
           </a:xfrm>
           <a:prstGeom prst="ellipse">
             <a:avLst/>
           </a:prstGeom>
           <a:solidFill>
-            <a:srgbClr val="C8A86B"/>
+            <a:srgbClr val="B23A2A"/>
           </a:solidFill>
           <a:ln>
             <a:noFill/>
@@ -4171,14 +4078,14 @@
       </p:sp>
       <p:sp>
         <p:nvSpPr>
-          <p:cNvPr id="18" name="TextBox 17"/>
+          <p:cNvPr id="17" name="TextBox 16"/>
           <p:cNvSpPr txBox="1"/>
           <p:nvPr/>
         </p:nvSpPr>
         <p:spPr>
           <a:xfrm>
-            <a:off x="7094029" y="2880360"/>
-            <a:ext cx="822960" cy="457200"/>
+            <a:off x="804672" y="3922776"/>
+            <a:ext cx="457200" cy="384048"/>
           </a:xfrm>
           <a:prstGeom prst="rect">
             <a:avLst/>
@@ -4193,107 +4100,111 @@
           <a:p>
             <a:pPr algn="ctr"/>
             <a:r>
-              <a:rPr sz="2400" b="1">
+              <a:rPr sz="1600" b="1">
                 <a:solidFill>
                   <a:srgbClr val="FFFFFF"/>
+                </a:solidFill>
+                <a:latin typeface="微软雅黑"/>
+                <a:ea typeface="微软雅黑"/>
+                <a:cs typeface="微软雅黑"/>
+              </a:rPr>
+              <a:t>3</a:t>
+            </a:r>
+          </a:p>
+        </p:txBody>
+      </p:sp>
+      <p:sp>
+        <p:nvSpPr>
+          <p:cNvPr id="18" name="TextBox 17"/>
+          <p:cNvSpPr txBox="1"/>
+          <p:nvPr/>
+        </p:nvSpPr>
+        <p:spPr>
+          <a:xfrm>
+            <a:off x="1371600" y="3813048"/>
+            <a:ext cx="4434840" cy="457200"/>
+          </a:xfrm>
+          <a:prstGeom prst="rect">
+            <a:avLst/>
+          </a:prstGeom>
+          <a:noFill/>
+        </p:spPr>
+        <p:txBody>
+          <a:bodyPr wrap="square" anchor="t" lIns="0" rIns="0" tIns="0" bIns="0">
+            <a:spAutoFit/>
+          </a:bodyPr>
+          <a:lstStyle/>
+          <a:p>
+            <a:pPr algn="l">
+              <a:lnSpc>
+                <a:spcPct val="110000"/>
+              </a:lnSpc>
+            </a:pPr>
+            <a:r>
+              <a:rPr sz="1600" b="1">
+                <a:solidFill>
+                  <a:srgbClr val="1C2A33"/>
+                </a:solidFill>
+                <a:latin typeface="微软雅黑"/>
+                <a:ea typeface="微软雅黑"/>
+                <a:cs typeface="微软雅黑"/>
+              </a:rPr>
+              <a:t>目标</a:t>
+            </a:r>
+          </a:p>
+        </p:txBody>
+      </p:sp>
+      <p:sp>
+        <p:nvSpPr>
+          <p:cNvPr id="19" name="TextBox 18"/>
+          <p:cNvSpPr txBox="1"/>
+          <p:nvPr/>
+        </p:nvSpPr>
+        <p:spPr>
+          <a:xfrm>
+            <a:off x="1371600" y="4251960"/>
+            <a:ext cx="4434840" cy="1417320"/>
+          </a:xfrm>
+          <a:prstGeom prst="rect">
+            <a:avLst/>
+          </a:prstGeom>
+          <a:noFill/>
+        </p:spPr>
+        <p:txBody>
+          <a:bodyPr wrap="square" anchor="t" lIns="0" rIns="0" tIns="0" bIns="0">
+            <a:spAutoFit/>
+          </a:bodyPr>
+          <a:lstStyle/>
+          <a:p>
+            <a:pPr algn="l">
+              <a:lnSpc>
+                <a:spcPct val="128000"/>
+              </a:lnSpc>
+            </a:pPr>
+            <a:r>
+              <a:rPr sz="1400" b="0">
+                <a:solidFill>
+                  <a:srgbClr val="1C2A33"/>
                 </a:solidFill>
                 <a:latin typeface="楷体"/>
                 <a:ea typeface="楷体"/>
                 <a:cs typeface="楷体"/>
               </a:rPr>
-              <a:t>3</a:t>
-            </a:r>
-          </a:p>
-        </p:txBody>
-      </p:sp>
-      <p:sp>
-        <p:nvSpPr>
-          <p:cNvPr id="19" name="TextBox 18"/>
-          <p:cNvSpPr txBox="1"/>
-          <p:nvPr/>
-        </p:nvSpPr>
-        <p:spPr>
-          <a:xfrm>
-            <a:off x="6461607" y="3749040"/>
-            <a:ext cx="2087803" cy="548640"/>
-          </a:xfrm>
-          <a:prstGeom prst="rect">
-            <a:avLst/>
-          </a:prstGeom>
-          <a:noFill/>
-        </p:spPr>
-        <p:txBody>
-          <a:bodyPr wrap="square" anchor="t" lIns="0" rIns="0" tIns="0" bIns="0">
-            <a:spAutoFit/>
-          </a:bodyPr>
-          <a:lstStyle/>
-          <a:p>
-            <a:pPr algn="ctr"/>
-            <a:r>
-              <a:rPr sz="1800" b="1">
-                <a:solidFill>
-                  <a:srgbClr val="C8A86B"/>
-                </a:solidFill>
-                <a:latin typeface="微软雅黑"/>
-                <a:ea typeface="微软雅黑"/>
-                <a:cs typeface="微软雅黑"/>
-              </a:rPr>
-              <a:t>思维品质</a:t>
-            </a:r>
-          </a:p>
-        </p:txBody>
-      </p:sp>
-      <p:sp>
-        <p:nvSpPr>
-          <p:cNvPr id="20" name="TextBox 19"/>
-          <p:cNvSpPr txBox="1"/>
-          <p:nvPr/>
-        </p:nvSpPr>
-        <p:spPr>
-          <a:xfrm>
-            <a:off x="6479895" y="4343400"/>
-            <a:ext cx="2051227" cy="1188720"/>
-          </a:xfrm>
-          <a:prstGeom prst="rect">
-            <a:avLst/>
-          </a:prstGeom>
-          <a:noFill/>
-        </p:spPr>
-        <p:txBody>
-          <a:bodyPr wrap="square" anchor="t" lIns="0" rIns="0" tIns="0" bIns="0">
-            <a:spAutoFit/>
-          </a:bodyPr>
-          <a:lstStyle/>
-          <a:p>
-            <a:pPr algn="ctr">
-              <a:lnSpc>
-                <a:spcPct val="145000"/>
-              </a:lnSpc>
-            </a:pPr>
-            <a:r>
-              <a:rPr sz="1300" b="0">
-                <a:solidFill>
-                  <a:srgbClr val="1C2A33"/>
-                </a:solidFill>
-                <a:latin typeface="楷体"/>
-                <a:ea typeface="楷体"/>
-                <a:cs typeface="楷体"/>
-              </a:rPr>
-              <a:t>借"由浅入深·由事及理"的提问层次，培养提问的逻辑性与层次感。</a:t>
-            </a:r>
-          </a:p>
-        </p:txBody>
-      </p:sp>
-      <p:sp>
-        <p:nvSpPr>
-          <p:cNvPr id="21" name="Rounded Rectangle 20"/>
+              <a:t>思维品质：通过设计访谈问题（由浅入深·由事及理），培养提问的逻辑性与层次感。</a:t>
+            </a:r>
+          </a:p>
+        </p:txBody>
+      </p:sp>
+      <p:sp>
+        <p:nvSpPr>
+          <p:cNvPr id="20" name="Rounded Rectangle 19"/>
           <p:cNvSpPr/>
           <p:nvPr/>
         </p:nvSpPr>
         <p:spPr>
           <a:xfrm>
-            <a:off x="9098051" y="2377440"/>
-            <a:ext cx="2453563" cy="3291840"/>
+            <a:off x="6263640" y="3703320"/>
+            <a:ext cx="5349240" cy="2057400"/>
           </a:xfrm>
           <a:prstGeom prst="roundRect">
             <a:avLst/>
@@ -4301,9 +4212,9 @@
           <a:solidFill>
             <a:srgbClr val="FFFFFF"/>
           </a:solidFill>
-          <a:ln w="20320">
+          <a:ln w="22860">
             <a:solidFill>
-              <a:srgbClr val="6B6258"/>
+              <a:srgbClr val="B23A2A"/>
             </a:solidFill>
           </a:ln>
           <a:effectLst/>
@@ -4332,20 +4243,20 @@
       </p:sp>
       <p:sp>
         <p:nvSpPr>
-          <p:cNvPr id="22" name="Oval 21"/>
+          <p:cNvPr id="21" name="Oval 20"/>
           <p:cNvSpPr/>
           <p:nvPr/>
         </p:nvSpPr>
         <p:spPr>
           <a:xfrm>
-            <a:off x="9913353" y="2697480"/>
-            <a:ext cx="822960" cy="822960"/>
+            <a:off x="6428232" y="3867912"/>
+            <a:ext cx="457200" cy="457200"/>
           </a:xfrm>
           <a:prstGeom prst="ellipse">
             <a:avLst/>
           </a:prstGeom>
           <a:solidFill>
-            <a:srgbClr val="6B6258"/>
+            <a:srgbClr val="B23A2A"/>
           </a:solidFill>
           <a:ln>
             <a:noFill/>
@@ -4376,14 +4287,14 @@
       </p:sp>
       <p:sp>
         <p:nvSpPr>
-          <p:cNvPr id="23" name="TextBox 22"/>
+          <p:cNvPr id="22" name="TextBox 21"/>
           <p:cNvSpPr txBox="1"/>
           <p:nvPr/>
         </p:nvSpPr>
         <p:spPr>
           <a:xfrm>
-            <a:off x="9913353" y="2880360"/>
-            <a:ext cx="822960" cy="457200"/>
+            <a:off x="6428232" y="3922776"/>
+            <a:ext cx="457200" cy="384048"/>
           </a:xfrm>
           <a:prstGeom prst="rect">
             <a:avLst/>
@@ -4398,52 +4309,97 @@
           <a:p>
             <a:pPr algn="ctr"/>
             <a:r>
-              <a:rPr sz="2400" b="1">
+              <a:rPr sz="1600" b="1">
                 <a:solidFill>
                   <a:srgbClr val="FFFFFF"/>
+                </a:solidFill>
+                <a:latin typeface="微软雅黑"/>
+                <a:ea typeface="微软雅黑"/>
+                <a:cs typeface="微软雅黑"/>
+              </a:rPr>
+              <a:t>4</a:t>
+            </a:r>
+          </a:p>
+        </p:txBody>
+      </p:sp>
+      <p:sp>
+        <p:nvSpPr>
+          <p:cNvPr id="23" name="TextBox 22"/>
+          <p:cNvSpPr txBox="1"/>
+          <p:nvPr/>
+        </p:nvSpPr>
+        <p:spPr>
+          <a:xfrm>
+            <a:off x="6995160" y="3813048"/>
+            <a:ext cx="4434840" cy="457200"/>
+          </a:xfrm>
+          <a:prstGeom prst="rect">
+            <a:avLst/>
+          </a:prstGeom>
+          <a:noFill/>
+        </p:spPr>
+        <p:txBody>
+          <a:bodyPr wrap="square" anchor="t" lIns="0" rIns="0" tIns="0" bIns="0">
+            <a:spAutoFit/>
+          </a:bodyPr>
+          <a:lstStyle/>
+          <a:p>
+            <a:pPr algn="l">
+              <a:lnSpc>
+                <a:spcPct val="110000"/>
+              </a:lnSpc>
+            </a:pPr>
+            <a:r>
+              <a:rPr sz="1600" b="1">
+                <a:solidFill>
+                  <a:srgbClr val="1C2A33"/>
+                </a:solidFill>
+                <a:latin typeface="微软雅黑"/>
+                <a:ea typeface="微软雅黑"/>
+                <a:cs typeface="微软雅黑"/>
+              </a:rPr>
+              <a:t>目标</a:t>
+            </a:r>
+          </a:p>
+        </p:txBody>
+      </p:sp>
+      <p:sp>
+        <p:nvSpPr>
+          <p:cNvPr id="24" name="TextBox 23"/>
+          <p:cNvSpPr txBox="1"/>
+          <p:nvPr/>
+        </p:nvSpPr>
+        <p:spPr>
+          <a:xfrm>
+            <a:off x="6995160" y="4251960"/>
+            <a:ext cx="4434840" cy="1417320"/>
+          </a:xfrm>
+          <a:prstGeom prst="rect">
+            <a:avLst/>
+          </a:prstGeom>
+          <a:noFill/>
+        </p:spPr>
+        <p:txBody>
+          <a:bodyPr wrap="square" anchor="t" lIns="0" rIns="0" tIns="0" bIns="0">
+            <a:spAutoFit/>
+          </a:bodyPr>
+          <a:lstStyle/>
+          <a:p>
+            <a:pPr algn="l">
+              <a:lnSpc>
+                <a:spcPct val="128000"/>
+              </a:lnSpc>
+            </a:pPr>
+            <a:r>
+              <a:rPr sz="1200" b="0">
+                <a:solidFill>
+                  <a:srgbClr val="1C2A33"/>
                 </a:solidFill>
                 <a:latin typeface="楷体"/>
                 <a:ea typeface="楷体"/>
                 <a:cs typeface="楷体"/>
               </a:rPr>
-              <a:t>4</a:t>
-            </a:r>
-          </a:p>
-        </p:txBody>
-      </p:sp>
-      <p:sp>
-        <p:nvSpPr>
-          <p:cNvPr id="24" name="TextBox 23"/>
-          <p:cNvSpPr txBox="1"/>
-          <p:nvPr/>
-        </p:nvSpPr>
-        <p:spPr>
-          <a:xfrm>
-            <a:off x="9280931" y="3749040"/>
-            <a:ext cx="2087803" cy="548640"/>
-          </a:xfrm>
-          <a:prstGeom prst="rect">
-            <a:avLst/>
-          </a:prstGeom>
-          <a:noFill/>
-        </p:spPr>
-        <p:txBody>
-          <a:bodyPr wrap="square" anchor="t" lIns="0" rIns="0" tIns="0" bIns="0">
-            <a:spAutoFit/>
-          </a:bodyPr>
-          <a:lstStyle/>
-          <a:p>
-            <a:pPr algn="ctr"/>
-            <a:r>
-              <a:rPr sz="1800" b="1">
-                <a:solidFill>
-                  <a:srgbClr val="6B6258"/>
-                </a:solidFill>
-                <a:latin typeface="微软雅黑"/>
-                <a:ea typeface="微软雅黑"/>
-                <a:cs typeface="微软雅黑"/>
-              </a:rPr>
-              <a:t>学习能力</a:t>
+              <a:t>学习能力：掌握「设计问题→模拟访谈→整理记录」的访谈三步法和「选材→组稿→播报」的播报三步法。</a:t>
             </a:r>
           </a:p>
         </p:txBody>
@@ -4451,47 +4407,6 @@
       <p:sp>
         <p:nvSpPr>
           <p:cNvPr id="25" name="TextBox 24"/>
-          <p:cNvSpPr txBox="1"/>
-          <p:nvPr/>
-        </p:nvSpPr>
-        <p:spPr>
-          <a:xfrm>
-            <a:off x="9299219" y="4343400"/>
-            <a:ext cx="2051227" cy="1188720"/>
-          </a:xfrm>
-          <a:prstGeom prst="rect">
-            <a:avLst/>
-          </a:prstGeom>
-          <a:noFill/>
-        </p:spPr>
-        <p:txBody>
-          <a:bodyPr wrap="square" anchor="t" lIns="0" rIns="0" tIns="0" bIns="0">
-            <a:spAutoFit/>
-          </a:bodyPr>
-          <a:lstStyle/>
-          <a:p>
-            <a:pPr algn="ctr">
-              <a:lnSpc>
-                <a:spcPct val="145000"/>
-              </a:lnSpc>
-            </a:pPr>
-            <a:r>
-              <a:rPr sz="1300" b="0">
-                <a:solidFill>
-                  <a:srgbClr val="1C2A33"/>
-                </a:solidFill>
-                <a:latin typeface="楷体"/>
-                <a:ea typeface="楷体"/>
-                <a:cs typeface="楷体"/>
-              </a:rPr>
-              <a:t>掌握"设计问题→模拟访谈→整理记录"访谈三步法与"选材→组稿→播报"播报三步法。</a:t>
-            </a:r>
-          </a:p>
-        </p:txBody>
-      </p:sp>
-      <p:sp>
-        <p:nvSpPr>
-          <p:cNvPr id="26" name="TextBox 25"/>
           <p:cNvSpPr txBox="1"/>
           <p:nvPr/>
         </p:nvSpPr>
@@ -4618,13 +4533,13 @@
             <a:r>
               <a:rPr sz="1300" b="1">
                 <a:solidFill>
-                  <a:srgbClr val="B23A2A"/>
+                  <a:srgbClr val="2E7D6B"/>
                 </a:solidFill>
                 <a:latin typeface="微软雅黑"/>
                 <a:ea typeface="微软雅黑"/>
                 <a:cs typeface="微软雅黑"/>
               </a:rPr>
-              <a:t>知人论世 · 从读到说</a:t>
+              <a:t>课文背景</a:t>
             </a:r>
           </a:p>
         </p:txBody>
@@ -4644,7 +4559,7 @@
             <a:avLst/>
           </a:prstGeom>
           <a:solidFill>
-            <a:srgbClr val="B23A2A"/>
+            <a:srgbClr val="2E7D6B"/>
           </a:solidFill>
           <a:ln>
             <a:noFill/>
@@ -4681,8 +4596,8 @@
         </p:nvSpPr>
         <p:spPr>
           <a:xfrm>
-            <a:off x="640080" y="1783080"/>
-            <a:ext cx="5227167" cy="548640"/>
+            <a:off x="640080" y="1508760"/>
+            <a:ext cx="6766560" cy="4572000"/>
           </a:xfrm>
           <a:prstGeom prst="rect">
             <a:avLst/>
@@ -4694,89 +4609,6 @@
             <a:spAutoFit/>
           </a:bodyPr>
           <a:lstStyle/>
-          <a:p>
-            <a:pPr algn="l">
-              <a:spcAft>
-                <a:spcPts val="600"/>
-              </a:spcAft>
-            </a:pPr>
-            <a:r>
-              <a:rPr sz="2000" b="1">
-                <a:solidFill>
-                  <a:srgbClr val="B23A2A"/>
-                </a:solidFill>
-                <a:latin typeface="楷体"/>
-                <a:ea typeface="楷体"/>
-                <a:cs typeface="楷体"/>
-              </a:rPr>
-              <a:t>为什么练"口语交流"</a:t>
-            </a:r>
-          </a:p>
-        </p:txBody>
-      </p:sp>
-      <p:sp>
-        <p:nvSpPr>
-          <p:cNvPr id="6" name="TextBox 5"/>
-          <p:cNvSpPr txBox="1"/>
-          <p:nvPr/>
-        </p:nvSpPr>
-        <p:spPr>
-          <a:xfrm>
-            <a:off x="640080" y="2423160"/>
-            <a:ext cx="5227167" cy="4206240"/>
-          </a:xfrm>
-          <a:prstGeom prst="rect">
-            <a:avLst/>
-          </a:prstGeom>
-          <a:noFill/>
-        </p:spPr>
-        <p:txBody>
-          <a:bodyPr wrap="square" anchor="t" lIns="0" rIns="0" tIns="0" bIns="0">
-            <a:spAutoFit/>
-          </a:bodyPr>
-          <a:lstStyle/>
-          <a:p>
-            <a:pPr algn="l">
-              <a:lnSpc>
-                <a:spcPct val="150000"/>
-              </a:lnSpc>
-              <a:spcAft>
-                <a:spcPts val="800"/>
-              </a:spcAft>
-            </a:pPr>
-            <a:r>
-              <a:rPr sz="1450" b="0">
-                <a:solidFill>
-                  <a:srgbClr val="1C2A33"/>
-                </a:solidFill>
-                <a:latin typeface="楷体"/>
-                <a:ea typeface="楷体"/>
-                <a:cs typeface="楷体"/>
-              </a:rPr>
-              <a:t>本单元前四课，我们读了袁隆平、张秉贵、钟扬的劳动故事——</a:t>
-            </a:r>
-          </a:p>
-          <a:p>
-            <a:pPr algn="l">
-              <a:lnSpc>
-                <a:spcPct val="150000"/>
-              </a:lnSpc>
-              <a:spcAft>
-                <a:spcPts val="800"/>
-              </a:spcAft>
-            </a:pPr>
-            <a:r>
-              <a:rPr sz="1500" b="1">
-                <a:solidFill>
-                  <a:srgbClr val="B23A2A"/>
-                </a:solidFill>
-                <a:latin typeface="楷体"/>
-                <a:ea typeface="楷体"/>
-                <a:cs typeface="楷体"/>
-              </a:rPr>
-              <a:t>"读到了"不等于"说得出"。</a:t>
-            </a:r>
-          </a:p>
           <a:p>
             <a:pPr algn="l">
               <a:lnSpc>
@@ -4787,7 +4619,7 @@
               </a:spcAft>
             </a:pPr>
             <a:r>
-              <a:rPr sz="1450" b="0">
+              <a:rPr sz="1600" b="0">
                 <a:solidFill>
                   <a:srgbClr val="1C2A33"/>
                 </a:solidFill>
@@ -4795,74 +4627,14 @@
                 <a:ea typeface="楷体"/>
                 <a:cs typeface="楷体"/>
               </a:rPr>
-              <a:t>本课两种口语能力互为补充：</a:t>
-            </a:r>
-          </a:p>
-          <a:p>
-            <a:pPr algn="l">
-              <a:lnSpc>
-                <a:spcPct val="145000"/>
-              </a:lnSpc>
-              <a:spcAft>
-                <a:spcPts val="400"/>
-              </a:spcAft>
-            </a:pPr>
-            <a:r>
-              <a:rPr sz="1450" b="0">
-                <a:solidFill>
-                  <a:srgbClr val="1C2A33"/>
-                </a:solidFill>
-                <a:latin typeface="楷体"/>
-                <a:ea typeface="楷体"/>
-                <a:cs typeface="楷体"/>
-              </a:rPr>
-              <a:t>· 访谈——"问与答"的互动交流</a:t>
-            </a:r>
-          </a:p>
-          <a:p>
-            <a:pPr algn="l">
-              <a:lnSpc>
-                <a:spcPct val="145000"/>
-              </a:lnSpc>
-              <a:spcAft>
-                <a:spcPts val="1000"/>
-              </a:spcAft>
-            </a:pPr>
-            <a:r>
-              <a:rPr sz="1450" b="0">
-                <a:solidFill>
-                  <a:srgbClr val="1C2A33"/>
-                </a:solidFill>
-                <a:latin typeface="楷体"/>
-                <a:ea typeface="楷体"/>
-                <a:cs typeface="楷体"/>
-              </a:rPr>
-              <a:t>· 播报——"说与听"的单向传递</a:t>
-            </a:r>
-          </a:p>
-          <a:p>
-            <a:pPr algn="l">
-              <a:lnSpc>
-                <a:spcPct val="150000"/>
-              </a:lnSpc>
-            </a:pPr>
-            <a:r>
-              <a:rPr sz="1350" b="0">
-                <a:solidFill>
-                  <a:srgbClr val="6B6258"/>
-                </a:solidFill>
-                <a:latin typeface="楷体"/>
-                <a:ea typeface="楷体"/>
-                <a:cs typeface="楷体"/>
-              </a:rPr>
-              <a:t>依据《普通高中语文课程标准》"实用性阅读与交流"任务群：口语交际须"清楚·连贯·得体"。</a:t>
+              <a:t>本课为第二单元第五课时，从阅读理解转向口语表达，属学习任务群「实用性阅读与交流」中的「交流」环节。教材单元学习任务要求学生进行「人物访谈」和「新闻播报」实践。本课以本单元阅读过的劳动人物（袁隆平·张秉贵·钟扬）为素材，训练两种口语能力：①人物访谈——设计问题、模拟采访、整理记录；②新闻播报——用新闻语言播报劳动人物事迹。两种训练互为补充，访谈侧重「问与答」的互动交流，播报侧重「说与听」的单向传递，共同提升实用性口语表达能力。</a:t>
             </a:r>
           </a:p>
         </p:txBody>
       </p:sp>
       <p:pic>
         <p:nvPicPr>
-          <p:cNvPr id="7" name="Picture 6" descr="vintagemic.jpg"/>
+          <p:cNvPr id="6" name="Picture 5" descr="typewriter.jpg"/>
           <p:cNvPicPr>
             <a:picLocks noChangeAspect="1"/>
           </p:cNvPicPr>
@@ -4870,15 +4642,15 @@
         </p:nvPicPr>
         <p:blipFill>
           <a:blip r:embed="rId2"/>
-          <a:srcRect t="13668" b="13668"/>
+          <a:srcRect l="5860" r="5860"/>
           <a:stretch>
             <a:fillRect/>
           </a:stretch>
         </p:blipFill>
         <p:spPr>
           <a:xfrm>
-            <a:off x="6324447" y="1783080"/>
-            <a:ext cx="5227167" cy="2468880"/>
+            <a:off x="8046720" y="1508760"/>
+            <a:ext cx="4114800" cy="3108960"/>
           </a:xfrm>
           <a:prstGeom prst="rect">
             <a:avLst/>
@@ -4887,14 +4659,14 @@
       </p:pic>
       <p:sp>
         <p:nvSpPr>
-          <p:cNvPr id="8" name="TextBox 7"/>
+          <p:cNvPr id="7" name="TextBox 6"/>
           <p:cNvSpPr txBox="1"/>
           <p:nvPr/>
         </p:nvSpPr>
         <p:spPr>
           <a:xfrm>
-            <a:off x="6324447" y="4343400"/>
-            <a:ext cx="5227167" cy="365760"/>
+            <a:off x="8046720" y="4663440"/>
+            <a:ext cx="4114800" cy="365760"/>
           </a:xfrm>
           <a:prstGeom prst="rect">
             <a:avLst/>
@@ -4917,156 +4689,14 @@
                 <a:ea typeface="微软雅黑"/>
                 <a:cs typeface="微软雅黑"/>
               </a:rPr>
-              <a:t>早期广播话筒（Public domain）· 播报传统的实物见证</a:t>
-            </a:r>
-          </a:p>
-        </p:txBody>
-      </p:sp>
-      <p:sp>
-        <p:nvSpPr>
-          <p:cNvPr id="9" name="Rounded Rectangle 8"/>
-          <p:cNvSpPr/>
-          <p:nvPr/>
-        </p:nvSpPr>
-        <p:spPr>
-          <a:xfrm>
-            <a:off x="6324447" y="4754880"/>
-            <a:ext cx="5227167" cy="1828800"/>
-          </a:xfrm>
-          <a:prstGeom prst="roundRect">
-            <a:avLst/>
-          </a:prstGeom>
-          <a:solidFill>
-            <a:srgbClr val="1C2A33"/>
-          </a:solidFill>
-          <a:effectLst/>
-        </p:spPr>
-        <p:style>
-          <a:lnRef idx="1">
-            <a:schemeClr val="accent1"/>
-          </a:lnRef>
-          <a:fillRef idx="3">
-            <a:schemeClr val="accent1"/>
-          </a:fillRef>
-          <a:effectRef idx="2">
-            <a:schemeClr val="accent1"/>
-          </a:effectRef>
-          <a:fontRef idx="minor">
-            <a:schemeClr val="lt1"/>
-          </a:fontRef>
-        </p:style>
-        <p:txBody>
-          <a:bodyPr rtlCol="0" anchor="ctr"/>
-          <a:lstStyle/>
-          <a:p>
-            <a:pPr algn="ctr"/>
-          </a:p>
-        </p:txBody>
-      </p:sp>
-      <p:sp>
-        <p:nvSpPr>
-          <p:cNvPr id="10" name="TextBox 9"/>
-          <p:cNvSpPr txBox="1"/>
-          <p:nvPr/>
-        </p:nvSpPr>
-        <p:spPr>
-          <a:xfrm>
-            <a:off x="6598767" y="4892040"/>
-            <a:ext cx="4678527" cy="1645920"/>
-          </a:xfrm>
-          <a:prstGeom prst="rect">
-            <a:avLst/>
-          </a:prstGeom>
-          <a:noFill/>
-        </p:spPr>
-        <p:txBody>
-          <a:bodyPr wrap="square" anchor="t" lIns="0" rIns="0" tIns="0" bIns="0">
-            <a:spAutoFit/>
-          </a:bodyPr>
-          <a:lstStyle/>
-          <a:p>
-            <a:pPr algn="l">
-              <a:spcAft>
-                <a:spcPts val="600"/>
-              </a:spcAft>
-            </a:pPr>
-            <a:r>
-              <a:rPr sz="1600" b="1">
-                <a:solidFill>
-                  <a:srgbClr val="C8A86B"/>
-                </a:solidFill>
-                <a:latin typeface="楷体"/>
-                <a:ea typeface="楷体"/>
-                <a:cs typeface="楷体"/>
-              </a:rPr>
-              <a:t>口语三原则（本课总纲）</a:t>
-            </a:r>
-          </a:p>
-          <a:p>
-            <a:pPr algn="l">
-              <a:lnSpc>
-                <a:spcPct val="140000"/>
-              </a:lnSpc>
-              <a:spcAft>
-                <a:spcPts val="400"/>
-              </a:spcAft>
-            </a:pPr>
-            <a:r>
-              <a:rPr sz="1350" b="0">
-                <a:solidFill>
-                  <a:srgbClr val="FFFFFF"/>
-                </a:solidFill>
-                <a:latin typeface="楷体"/>
-                <a:ea typeface="楷体"/>
-                <a:cs typeface="楷体"/>
-              </a:rPr>
-              <a:t>目的性 —— 为什么说（传递信息）</a:t>
-            </a:r>
-          </a:p>
-          <a:p>
-            <a:pPr algn="l">
-              <a:lnSpc>
-                <a:spcPct val="140000"/>
-              </a:lnSpc>
-              <a:spcAft>
-                <a:spcPts val="400"/>
-              </a:spcAft>
-            </a:pPr>
-            <a:r>
-              <a:rPr sz="1350" b="0">
-                <a:solidFill>
-                  <a:srgbClr val="FFFFFF"/>
-                </a:solidFill>
-                <a:latin typeface="楷体"/>
-                <a:ea typeface="楷体"/>
-                <a:cs typeface="楷体"/>
-              </a:rPr>
-              <a:t>条理性 —— 怎么说清楚（有框架）</a:t>
-            </a:r>
-          </a:p>
-          <a:p>
-            <a:pPr algn="l">
-              <a:lnSpc>
-                <a:spcPct val="140000"/>
-              </a:lnSpc>
-            </a:pPr>
-            <a:r>
-              <a:rPr sz="1350" b="0">
-                <a:solidFill>
-                  <a:srgbClr val="FFFFFF"/>
-                </a:solidFill>
-                <a:latin typeface="楷体"/>
-                <a:ea typeface="楷体"/>
-                <a:cs typeface="楷体"/>
-              </a:rPr>
-              <a:t>得体性 —— 对谁说（看对象）</a:t>
-            </a:r>
-          </a:p>
-        </p:txBody>
-      </p:sp>
-      <p:sp>
-        <p:nvSpPr>
-          <p:cNvPr id="11" name="TextBox 10"/>
+              <a:t>资料图（自由授权，复用 typewriter.jpg）</a:t>
+            </a:r>
+          </a:p>
+        </p:txBody>
+      </p:sp>
+      <p:sp>
+        <p:nvSpPr>
+          <p:cNvPr id="8" name="TextBox 7"/>
           <p:cNvSpPr txBox="1"/>
           <p:nvPr/>
         </p:nvSpPr>
@@ -5199,7 +4829,7 @@
                 <a:ea typeface="微软雅黑"/>
                 <a:cs typeface="微软雅黑"/>
               </a:rPr>
-              <a:t>重点 · 访谈问题三层次</a:t>
+              <a:t>学习重点</a:t>
             </a:r>
           </a:p>
         </p:txBody>
@@ -5250,51 +4880,14 @@
       </p:sp>
       <p:sp>
         <p:nvSpPr>
-          <p:cNvPr id="5" name="TextBox 4"/>
-          <p:cNvSpPr txBox="1"/>
-          <p:nvPr/>
-        </p:nvSpPr>
-        <p:spPr>
-          <a:xfrm>
-            <a:off x="640080" y="1737360"/>
-            <a:ext cx="5227167" cy="457200"/>
-          </a:xfrm>
-          <a:prstGeom prst="rect">
-            <a:avLst/>
-          </a:prstGeom>
-          <a:noFill/>
-        </p:spPr>
-        <p:txBody>
-          <a:bodyPr wrap="square" anchor="t" lIns="0" rIns="0" tIns="0" bIns="0">
-            <a:spAutoFit/>
-          </a:bodyPr>
-          <a:lstStyle/>
-          <a:p>
-            <a:pPr algn="l"/>
-            <a:r>
-              <a:rPr sz="1800" b="1">
-                <a:solidFill>
-                  <a:srgbClr val="B23A2A"/>
-                </a:solidFill>
-                <a:latin typeface="楷体"/>
-                <a:ea typeface="楷体"/>
-                <a:cs typeface="楷体"/>
-              </a:rPr>
-              <a:t>访谈问题三层次（金字塔）</a:t>
-            </a:r>
-          </a:p>
-        </p:txBody>
-      </p:sp>
-      <p:sp>
-        <p:nvSpPr>
-          <p:cNvPr id="6" name="Rounded Rectangle 5"/>
+          <p:cNvPr id="5" name="Rounded Rectangle 4"/>
           <p:cNvSpPr/>
           <p:nvPr/>
         </p:nvSpPr>
         <p:spPr>
           <a:xfrm>
-            <a:off x="1737785" y="2286000"/>
-            <a:ext cx="3031757" cy="1078992"/>
+            <a:off x="640080" y="1371600"/>
+            <a:ext cx="10911535" cy="1597152"/>
           </a:xfrm>
           <a:prstGeom prst="roundRect">
             <a:avLst/>
@@ -5333,14 +4926,14 @@
       </p:sp>
       <p:sp>
         <p:nvSpPr>
-          <p:cNvPr id="7" name="TextBox 6"/>
+          <p:cNvPr id="6" name="TextBox 5"/>
           <p:cNvSpPr txBox="1"/>
           <p:nvPr/>
         </p:nvSpPr>
         <p:spPr>
           <a:xfrm>
-            <a:off x="1737785" y="2395728"/>
-            <a:ext cx="3031757" cy="411480"/>
+            <a:off x="1371600" y="1481328"/>
+            <a:ext cx="9997135" cy="457200"/>
           </a:xfrm>
           <a:prstGeom prst="rect">
             <a:avLst/>
@@ -5353,105 +4946,76 @@
           </a:bodyPr>
           <a:lstStyle/>
           <a:p>
-            <a:pPr algn="ctr"/>
-            <a:r>
-              <a:rPr sz="1700" b="1">
-                <a:solidFill>
-                  <a:srgbClr val="C8A86B"/>
+            <a:pPr algn="l">
+              <a:lnSpc>
+                <a:spcPct val="110000"/>
+              </a:lnSpc>
+            </a:pPr>
+            <a:r>
+              <a:rPr sz="1600" b="1">
+                <a:solidFill>
+                  <a:srgbClr val="1C2A33"/>
+                </a:solidFill>
+                <a:latin typeface="微软雅黑"/>
+                <a:ea typeface="微软雅黑"/>
+                <a:cs typeface="微软雅黑"/>
+              </a:rPr>
+              <a:t/>
+            </a:r>
+          </a:p>
+        </p:txBody>
+      </p:sp>
+      <p:sp>
+        <p:nvSpPr>
+          <p:cNvPr id="7" name="TextBox 6"/>
+          <p:cNvSpPr txBox="1"/>
+          <p:nvPr/>
+        </p:nvSpPr>
+        <p:spPr>
+          <a:xfrm>
+            <a:off x="1371600" y="1920240"/>
+            <a:ext cx="9997135" cy="957072"/>
+          </a:xfrm>
+          <a:prstGeom prst="rect">
+            <a:avLst/>
+          </a:prstGeom>
+          <a:noFill/>
+        </p:spPr>
+        <p:txBody>
+          <a:bodyPr wrap="square" anchor="t" lIns="0" rIns="0" tIns="0" bIns="0">
+            <a:spAutoFit/>
+          </a:bodyPr>
+          <a:lstStyle/>
+          <a:p>
+            <a:pPr algn="l">
+              <a:lnSpc>
+                <a:spcPct val="128000"/>
+              </a:lnSpc>
+            </a:pPr>
+            <a:r>
+              <a:rPr sz="1200" b="0">
+                <a:solidFill>
+                  <a:srgbClr val="1C2A33"/>
                 </a:solidFill>
                 <a:latin typeface="楷体"/>
                 <a:ea typeface="楷体"/>
                 <a:cs typeface="楷体"/>
               </a:rPr>
-              <a:t>价值层</a:t>
-            </a:r>
-          </a:p>
-        </p:txBody>
-      </p:sp>
-      <p:sp>
-        <p:nvSpPr>
-          <p:cNvPr id="8" name="TextBox 7"/>
-          <p:cNvSpPr txBox="1"/>
-          <p:nvPr/>
-        </p:nvSpPr>
-        <p:spPr>
-          <a:xfrm>
-            <a:off x="1737785" y="2788920"/>
-            <a:ext cx="3031757" cy="347472"/>
-          </a:xfrm>
-          <a:prstGeom prst="rect">
-            <a:avLst/>
-          </a:prstGeom>
-          <a:noFill/>
-        </p:spPr>
-        <p:txBody>
-          <a:bodyPr wrap="square" anchor="t" lIns="0" rIns="0" tIns="0" bIns="0">
-            <a:spAutoFit/>
-          </a:bodyPr>
-          <a:lstStyle/>
-          <a:p>
-            <a:pPr algn="ctr"/>
-            <a:r>
-              <a:rPr sz="1400" b="1">
-                <a:solidFill>
-                  <a:srgbClr val="1C2A33"/>
-                </a:solidFill>
-                <a:latin typeface="微软雅黑"/>
-                <a:ea typeface="微软雅黑"/>
-                <a:cs typeface="微软雅黑"/>
-              </a:rPr>
-              <a:t>为什么重要？</a:t>
-            </a:r>
-          </a:p>
-        </p:txBody>
-      </p:sp>
-      <p:sp>
-        <p:nvSpPr>
-          <p:cNvPr id="9" name="TextBox 8"/>
-          <p:cNvSpPr txBox="1"/>
-          <p:nvPr/>
-        </p:nvSpPr>
-        <p:spPr>
-          <a:xfrm>
-            <a:off x="1874945" y="3108960"/>
-            <a:ext cx="2757437" cy="274320"/>
-          </a:xfrm>
-          <a:prstGeom prst="rect">
-            <a:avLst/>
-          </a:prstGeom>
-          <a:noFill/>
-        </p:spPr>
-        <p:txBody>
-          <a:bodyPr wrap="square" anchor="t" lIns="0" rIns="0" tIns="0" bIns="0">
-            <a:spAutoFit/>
-          </a:bodyPr>
-          <a:lstStyle/>
-          <a:p>
-            <a:pPr algn="ctr"/>
-            <a:r>
-              <a:rPr sz="1150" b="0">
-                <a:solidFill>
-                  <a:srgbClr val="6B6258"/>
-                </a:solidFill>
-                <a:latin typeface="楷体"/>
-                <a:ea typeface="楷体"/>
-                <a:cs typeface="楷体"/>
-              </a:rPr>
-              <a:t>例：他的种子对未来有何意义？</a:t>
-            </a:r>
-          </a:p>
-        </p:txBody>
-      </p:sp>
-      <p:sp>
-        <p:nvSpPr>
-          <p:cNvPr id="10" name="Rounded Rectangle 9"/>
+              <a:t>① 访谈问题设计三层次：事实层（做了什么）→感受层（怎么想的）→价值层（为什么重要）。</a:t>
+            </a:r>
+          </a:p>
+        </p:txBody>
+      </p:sp>
+      <p:sp>
+        <p:nvSpPr>
+          <p:cNvPr id="8" name="Rounded Rectangle 7"/>
           <p:cNvSpPr/>
           <p:nvPr/>
         </p:nvSpPr>
         <p:spPr>
           <a:xfrm>
-            <a:off x="1215068" y="3474720"/>
-            <a:ext cx="4077190" cy="1078992"/>
+            <a:off x="640080" y="3078480"/>
+            <a:ext cx="10911535" cy="1597152"/>
           </a:xfrm>
           <a:prstGeom prst="roundRect">
             <a:avLst/>
@@ -5461,7 +5025,7 @@
           </a:solidFill>
           <a:ln w="22860">
             <a:solidFill>
-              <a:srgbClr val="2E7D6B"/>
+              <a:srgbClr val="C8A86B"/>
             </a:solidFill>
           </a:ln>
           <a:effectLst/>
@@ -5490,14 +5054,14 @@
       </p:sp>
       <p:sp>
         <p:nvSpPr>
-          <p:cNvPr id="11" name="TextBox 10"/>
+          <p:cNvPr id="9" name="TextBox 8"/>
           <p:cNvSpPr txBox="1"/>
           <p:nvPr/>
         </p:nvSpPr>
         <p:spPr>
           <a:xfrm>
-            <a:off x="1215068" y="3584448"/>
-            <a:ext cx="4077190" cy="411480"/>
+            <a:off x="1371600" y="3188208"/>
+            <a:ext cx="9997135" cy="457200"/>
           </a:xfrm>
           <a:prstGeom prst="rect">
             <a:avLst/>
@@ -5510,105 +5074,76 @@
           </a:bodyPr>
           <a:lstStyle/>
           <a:p>
-            <a:pPr algn="ctr"/>
-            <a:r>
-              <a:rPr sz="1700" b="1">
-                <a:solidFill>
-                  <a:srgbClr val="2E7D6B"/>
+            <a:pPr algn="l">
+              <a:lnSpc>
+                <a:spcPct val="110000"/>
+              </a:lnSpc>
+            </a:pPr>
+            <a:r>
+              <a:rPr sz="1600" b="1">
+                <a:solidFill>
+                  <a:srgbClr val="1C2A33"/>
+                </a:solidFill>
+                <a:latin typeface="微软雅黑"/>
+                <a:ea typeface="微软雅黑"/>
+                <a:cs typeface="微软雅黑"/>
+              </a:rPr>
+              <a:t/>
+            </a:r>
+          </a:p>
+        </p:txBody>
+      </p:sp>
+      <p:sp>
+        <p:nvSpPr>
+          <p:cNvPr id="10" name="TextBox 9"/>
+          <p:cNvSpPr txBox="1"/>
+          <p:nvPr/>
+        </p:nvSpPr>
+        <p:spPr>
+          <a:xfrm>
+            <a:off x="1371600" y="3627120"/>
+            <a:ext cx="9997135" cy="957072"/>
+          </a:xfrm>
+          <a:prstGeom prst="rect">
+            <a:avLst/>
+          </a:prstGeom>
+          <a:noFill/>
+        </p:spPr>
+        <p:txBody>
+          <a:bodyPr wrap="square" anchor="t" lIns="0" rIns="0" tIns="0" bIns="0">
+            <a:spAutoFit/>
+          </a:bodyPr>
+          <a:lstStyle/>
+          <a:p>
+            <a:pPr algn="l">
+              <a:lnSpc>
+                <a:spcPct val="128000"/>
+              </a:lnSpc>
+            </a:pPr>
+            <a:r>
+              <a:rPr sz="1300" b="0">
+                <a:solidFill>
+                  <a:srgbClr val="1C2A33"/>
                 </a:solidFill>
                 <a:latin typeface="楷体"/>
                 <a:ea typeface="楷体"/>
                 <a:cs typeface="楷体"/>
               </a:rPr>
-              <a:t>感受层</a:t>
-            </a:r>
-          </a:p>
-        </p:txBody>
-      </p:sp>
-      <p:sp>
-        <p:nvSpPr>
-          <p:cNvPr id="12" name="TextBox 11"/>
-          <p:cNvSpPr txBox="1"/>
-          <p:nvPr/>
-        </p:nvSpPr>
-        <p:spPr>
-          <a:xfrm>
-            <a:off x="1215068" y="3977640"/>
-            <a:ext cx="4077190" cy="347472"/>
-          </a:xfrm>
-          <a:prstGeom prst="rect">
-            <a:avLst/>
-          </a:prstGeom>
-          <a:noFill/>
-        </p:spPr>
-        <p:txBody>
-          <a:bodyPr wrap="square" anchor="t" lIns="0" rIns="0" tIns="0" bIns="0">
-            <a:spAutoFit/>
-          </a:bodyPr>
-          <a:lstStyle/>
-          <a:p>
-            <a:pPr algn="ctr"/>
-            <a:r>
-              <a:rPr sz="1400" b="1">
-                <a:solidFill>
-                  <a:srgbClr val="1C2A33"/>
-                </a:solidFill>
-                <a:latin typeface="微软雅黑"/>
-                <a:ea typeface="微软雅黑"/>
-                <a:cs typeface="微软雅黑"/>
-              </a:rPr>
-              <a:t>怎么想的？</a:t>
-            </a:r>
-          </a:p>
-        </p:txBody>
-      </p:sp>
-      <p:sp>
-        <p:nvSpPr>
-          <p:cNvPr id="13" name="TextBox 12"/>
-          <p:cNvSpPr txBox="1"/>
-          <p:nvPr/>
-        </p:nvSpPr>
-        <p:spPr>
-          <a:xfrm>
-            <a:off x="1352228" y="4297680"/>
-            <a:ext cx="3802870" cy="274320"/>
-          </a:xfrm>
-          <a:prstGeom prst="rect">
-            <a:avLst/>
-          </a:prstGeom>
-          <a:noFill/>
-        </p:spPr>
-        <p:txBody>
-          <a:bodyPr wrap="square" anchor="t" lIns="0" rIns="0" tIns="0" bIns="0">
-            <a:spAutoFit/>
-          </a:bodyPr>
-          <a:lstStyle/>
-          <a:p>
-            <a:pPr algn="ctr"/>
-            <a:r>
-              <a:rPr sz="1150" b="0">
-                <a:solidFill>
-                  <a:srgbClr val="6B6258"/>
-                </a:solidFill>
-                <a:latin typeface="楷体"/>
-                <a:ea typeface="楷体"/>
-                <a:cs typeface="楷体"/>
-              </a:rPr>
-              <a:t>例：他想过放弃吗？</a:t>
-            </a:r>
-          </a:p>
-        </p:txBody>
-      </p:sp>
-      <p:sp>
-        <p:nvSpPr>
-          <p:cNvPr id="14" name="Rounded Rectangle 13"/>
+              <a:t>② 新闻播报语态：客观·简洁·有节奏，不同于日常说话和朗诵。</a:t>
+            </a:r>
+          </a:p>
+        </p:txBody>
+      </p:sp>
+      <p:sp>
+        <p:nvSpPr>
+          <p:cNvPr id="11" name="Rounded Rectangle 10"/>
           <p:cNvSpPr/>
           <p:nvPr/>
         </p:nvSpPr>
         <p:spPr>
           <a:xfrm>
-            <a:off x="744623" y="4663440"/>
-            <a:ext cx="5018080" cy="1078992"/>
+            <a:off x="640080" y="4785360"/>
+            <a:ext cx="10911535" cy="1597152"/>
           </a:xfrm>
           <a:prstGeom prst="roundRect">
             <a:avLst/>
@@ -5618,7 +5153,7 @@
           </a:solidFill>
           <a:ln w="22860">
             <a:solidFill>
-              <a:srgbClr val="B23A2A"/>
+              <a:srgbClr val="C8A86B"/>
             </a:solidFill>
           </a:ln>
           <a:effectLst/>
@@ -5647,14 +5182,14 @@
       </p:sp>
       <p:sp>
         <p:nvSpPr>
-          <p:cNvPr id="15" name="TextBox 14"/>
+          <p:cNvPr id="12" name="TextBox 11"/>
           <p:cNvSpPr txBox="1"/>
           <p:nvPr/>
         </p:nvSpPr>
         <p:spPr>
           <a:xfrm>
-            <a:off x="744623" y="4773168"/>
-            <a:ext cx="5018080" cy="411480"/>
+            <a:off x="1371600" y="4895088"/>
+            <a:ext cx="9997135" cy="457200"/>
           </a:xfrm>
           <a:prstGeom prst="rect">
             <a:avLst/>
@@ -5667,544 +5202,69 @@
           </a:bodyPr>
           <a:lstStyle/>
           <a:p>
-            <a:pPr algn="ctr"/>
-            <a:r>
-              <a:rPr sz="1700" b="1">
-                <a:solidFill>
-                  <a:srgbClr val="B23A2A"/>
+            <a:pPr algn="l">
+              <a:lnSpc>
+                <a:spcPct val="110000"/>
+              </a:lnSpc>
+            </a:pPr>
+            <a:r>
+              <a:rPr sz="1600" b="1">
+                <a:solidFill>
+                  <a:srgbClr val="1C2A33"/>
+                </a:solidFill>
+                <a:latin typeface="微软雅黑"/>
+                <a:ea typeface="微软雅黑"/>
+                <a:cs typeface="微软雅黑"/>
+              </a:rPr>
+              <a:t/>
+            </a:r>
+          </a:p>
+        </p:txBody>
+      </p:sp>
+      <p:sp>
+        <p:nvSpPr>
+          <p:cNvPr id="13" name="TextBox 12"/>
+          <p:cNvSpPr txBox="1"/>
+          <p:nvPr/>
+        </p:nvSpPr>
+        <p:spPr>
+          <a:xfrm>
+            <a:off x="1371600" y="5334000"/>
+            <a:ext cx="9997135" cy="957072"/>
+          </a:xfrm>
+          <a:prstGeom prst="rect">
+            <a:avLst/>
+          </a:prstGeom>
+          <a:noFill/>
+        </p:spPr>
+        <p:txBody>
+          <a:bodyPr wrap="square" anchor="t" lIns="0" rIns="0" tIns="0" bIns="0">
+            <a:spAutoFit/>
+          </a:bodyPr>
+          <a:lstStyle/>
+          <a:p>
+            <a:pPr algn="l">
+              <a:lnSpc>
+                <a:spcPct val="128000"/>
+              </a:lnSpc>
+            </a:pPr>
+            <a:r>
+              <a:rPr sz="1300" b="0">
+                <a:solidFill>
+                  <a:srgbClr val="1C2A33"/>
                 </a:solidFill>
                 <a:latin typeface="楷体"/>
                 <a:ea typeface="楷体"/>
                 <a:cs typeface="楷体"/>
               </a:rPr>
-              <a:t>事实层</a:t>
-            </a:r>
-          </a:p>
-        </p:txBody>
-      </p:sp>
-      <p:sp>
-        <p:nvSpPr>
-          <p:cNvPr id="16" name="TextBox 15"/>
-          <p:cNvSpPr txBox="1"/>
-          <p:nvPr/>
-        </p:nvSpPr>
-        <p:spPr>
-          <a:xfrm>
-            <a:off x="744623" y="5166360"/>
-            <a:ext cx="5018080" cy="347472"/>
-          </a:xfrm>
-          <a:prstGeom prst="rect">
-            <a:avLst/>
-          </a:prstGeom>
-          <a:noFill/>
-        </p:spPr>
-        <p:txBody>
-          <a:bodyPr wrap="square" anchor="t" lIns="0" rIns="0" tIns="0" bIns="0">
-            <a:spAutoFit/>
-          </a:bodyPr>
-          <a:lstStyle/>
-          <a:p>
-            <a:pPr algn="ctr"/>
-            <a:r>
-              <a:rPr sz="1400" b="1">
-                <a:solidFill>
-                  <a:srgbClr val="1C2A33"/>
-                </a:solidFill>
-                <a:latin typeface="微软雅黑"/>
-                <a:ea typeface="微软雅黑"/>
-                <a:cs typeface="微软雅黑"/>
-              </a:rPr>
-              <a:t>做了什么？</a:t>
-            </a:r>
-          </a:p>
-        </p:txBody>
-      </p:sp>
-      <p:sp>
-        <p:nvSpPr>
-          <p:cNvPr id="17" name="TextBox 16"/>
-          <p:cNvSpPr txBox="1"/>
-          <p:nvPr/>
-        </p:nvSpPr>
-        <p:spPr>
-          <a:xfrm>
-            <a:off x="881783" y="5486400"/>
-            <a:ext cx="4743760" cy="274320"/>
-          </a:xfrm>
-          <a:prstGeom prst="rect">
-            <a:avLst/>
-          </a:prstGeom>
-          <a:noFill/>
-        </p:spPr>
-        <p:txBody>
-          <a:bodyPr wrap="square" anchor="t" lIns="0" rIns="0" tIns="0" bIns="0">
-            <a:spAutoFit/>
-          </a:bodyPr>
-          <a:lstStyle/>
-          <a:p>
-            <a:pPr algn="ctr"/>
-            <a:r>
-              <a:rPr sz="1150" b="0">
-                <a:solidFill>
-                  <a:srgbClr val="6B6258"/>
-                </a:solidFill>
-                <a:latin typeface="楷体"/>
-                <a:ea typeface="楷体"/>
-                <a:cs typeface="楷体"/>
-              </a:rPr>
-              <a:t>例：在西藏每天怎么采种？</a:t>
-            </a:r>
-          </a:p>
-        </p:txBody>
-      </p:sp>
-      <p:sp>
-        <p:nvSpPr>
-          <p:cNvPr id="18" name="TextBox 17"/>
-          <p:cNvSpPr txBox="1"/>
-          <p:nvPr/>
-        </p:nvSpPr>
-        <p:spPr>
-          <a:xfrm>
-            <a:off x="640080" y="5897880"/>
-            <a:ext cx="5227167" cy="365760"/>
-          </a:xfrm>
-          <a:prstGeom prst="rect">
-            <a:avLst/>
-          </a:prstGeom>
-          <a:noFill/>
-        </p:spPr>
-        <p:txBody>
-          <a:bodyPr wrap="square" anchor="t" lIns="0" rIns="0" tIns="0" bIns="0">
-            <a:spAutoFit/>
-          </a:bodyPr>
-          <a:lstStyle/>
-          <a:p>
-            <a:pPr algn="ctr"/>
-            <a:r>
-              <a:rPr sz="1250" b="0">
-                <a:solidFill>
-                  <a:srgbClr val="6B6258"/>
-                </a:solidFill>
-                <a:latin typeface="微软雅黑"/>
-                <a:ea typeface="微软雅黑"/>
-                <a:cs typeface="微软雅黑"/>
-              </a:rPr>
-              <a:t>▲ 由浅入深·由事及理：先问"做了什么"，再追问"为何重要"</a:t>
-            </a:r>
-          </a:p>
-        </p:txBody>
-      </p:sp>
-      <p:sp>
-        <p:nvSpPr>
-          <p:cNvPr id="19" name="TextBox 18"/>
-          <p:cNvSpPr txBox="1"/>
-          <p:nvPr/>
-        </p:nvSpPr>
-        <p:spPr>
-          <a:xfrm>
-            <a:off x="6324447" y="1737360"/>
-            <a:ext cx="5227167" cy="457200"/>
-          </a:xfrm>
-          <a:prstGeom prst="rect">
-            <a:avLst/>
-          </a:prstGeom>
-          <a:noFill/>
-        </p:spPr>
-        <p:txBody>
-          <a:bodyPr wrap="square" anchor="t" lIns="0" rIns="0" tIns="0" bIns="0">
-            <a:spAutoFit/>
-          </a:bodyPr>
-          <a:lstStyle/>
-          <a:p>
-            <a:pPr algn="l"/>
-            <a:r>
-              <a:rPr sz="1800" b="1">
-                <a:solidFill>
-                  <a:srgbClr val="2E7D6B"/>
-                </a:solidFill>
-                <a:latin typeface="楷体"/>
-                <a:ea typeface="楷体"/>
-                <a:cs typeface="楷体"/>
-              </a:rPr>
-              <a:t>口语三原则</a:t>
-            </a:r>
-          </a:p>
-        </p:txBody>
-      </p:sp>
-      <p:sp>
-        <p:nvSpPr>
-          <p:cNvPr id="20" name="Rounded Rectangle 19"/>
-          <p:cNvSpPr/>
-          <p:nvPr/>
-        </p:nvSpPr>
-        <p:spPr>
-          <a:xfrm>
-            <a:off x="6324447" y="2286000"/>
-            <a:ext cx="5227167" cy="1371600"/>
-          </a:xfrm>
-          <a:prstGeom prst="roundRect">
-            <a:avLst/>
-          </a:prstGeom>
-          <a:solidFill>
-            <a:srgbClr val="FFFFFF"/>
-          </a:solidFill>
-          <a:ln w="17780">
-            <a:solidFill>
-              <a:srgbClr val="B23A2A"/>
-            </a:solidFill>
-          </a:ln>
-          <a:effectLst/>
-        </p:spPr>
-        <p:style>
-          <a:lnRef idx="1">
-            <a:schemeClr val="accent1"/>
-          </a:lnRef>
-          <a:fillRef idx="3">
-            <a:schemeClr val="accent1"/>
-          </a:fillRef>
-          <a:effectRef idx="2">
-            <a:schemeClr val="accent1"/>
-          </a:effectRef>
-          <a:fontRef idx="minor">
-            <a:schemeClr val="lt1"/>
-          </a:fontRef>
-        </p:style>
-        <p:txBody>
-          <a:bodyPr rtlCol="0" anchor="ctr"/>
-          <a:lstStyle/>
-          <a:p>
-            <a:pPr algn="ctr"/>
-          </a:p>
-        </p:txBody>
-      </p:sp>
-      <p:sp>
-        <p:nvSpPr>
-          <p:cNvPr id="21" name="TextBox 20"/>
-          <p:cNvSpPr txBox="1"/>
-          <p:nvPr/>
-        </p:nvSpPr>
-        <p:spPr>
-          <a:xfrm>
-            <a:off x="6553047" y="2450592"/>
-            <a:ext cx="1463040" cy="457200"/>
-          </a:xfrm>
-          <a:prstGeom prst="rect">
-            <a:avLst/>
-          </a:prstGeom>
-          <a:noFill/>
-        </p:spPr>
-        <p:txBody>
-          <a:bodyPr wrap="square" anchor="t" lIns="0" rIns="0" tIns="0" bIns="0">
-            <a:spAutoFit/>
-          </a:bodyPr>
-          <a:lstStyle/>
-          <a:p>
-            <a:pPr algn="l"/>
-            <a:r>
-              <a:rPr sz="1700" b="1">
-                <a:solidFill>
-                  <a:srgbClr val="B23A2A"/>
-                </a:solidFill>
-                <a:latin typeface="楷体"/>
-                <a:ea typeface="楷体"/>
-                <a:cs typeface="楷体"/>
-              </a:rPr>
-              <a:t>目的性</a:t>
-            </a:r>
-          </a:p>
-        </p:txBody>
-      </p:sp>
-      <p:sp>
-        <p:nvSpPr>
-          <p:cNvPr id="22" name="TextBox 21"/>
-          <p:cNvSpPr txBox="1"/>
-          <p:nvPr/>
-        </p:nvSpPr>
-        <p:spPr>
-          <a:xfrm>
-            <a:off x="8061807" y="2468880"/>
-            <a:ext cx="3306927" cy="1005840"/>
-          </a:xfrm>
-          <a:prstGeom prst="rect">
-            <a:avLst/>
-          </a:prstGeom>
-          <a:noFill/>
-        </p:spPr>
-        <p:txBody>
-          <a:bodyPr wrap="square" anchor="t" lIns="0" rIns="0" tIns="0" bIns="0">
-            <a:spAutoFit/>
-          </a:bodyPr>
-          <a:lstStyle/>
-          <a:p>
-            <a:pPr algn="l">
-              <a:lnSpc>
-                <a:spcPct val="140000"/>
-              </a:lnSpc>
-            </a:pPr>
-            <a:r>
-              <a:rPr sz="1350" b="0">
-                <a:solidFill>
-                  <a:srgbClr val="1C2A33"/>
-                </a:solidFill>
-                <a:latin typeface="楷体"/>
-                <a:ea typeface="楷体"/>
-                <a:cs typeface="楷体"/>
-              </a:rPr>
-              <a:t>先想"为什么开口"——传递信息，不是随便闲聊。</a:t>
-            </a:r>
-          </a:p>
-        </p:txBody>
-      </p:sp>
-      <p:sp>
-        <p:nvSpPr>
-          <p:cNvPr id="23" name="Rounded Rectangle 22"/>
-          <p:cNvSpPr/>
-          <p:nvPr/>
-        </p:nvSpPr>
-        <p:spPr>
-          <a:xfrm>
-            <a:off x="6324447" y="3767328"/>
-            <a:ext cx="5227167" cy="1371600"/>
-          </a:xfrm>
-          <a:prstGeom prst="roundRect">
-            <a:avLst/>
-          </a:prstGeom>
-          <a:solidFill>
-            <a:srgbClr val="E7DFD2"/>
-          </a:solidFill>
-          <a:ln w="17780">
-            <a:solidFill>
-              <a:srgbClr val="2E7D6B"/>
-            </a:solidFill>
-          </a:ln>
-          <a:effectLst/>
-        </p:spPr>
-        <p:style>
-          <a:lnRef idx="1">
-            <a:schemeClr val="accent1"/>
-          </a:lnRef>
-          <a:fillRef idx="3">
-            <a:schemeClr val="accent1"/>
-          </a:fillRef>
-          <a:effectRef idx="2">
-            <a:schemeClr val="accent1"/>
-          </a:effectRef>
-          <a:fontRef idx="minor">
-            <a:schemeClr val="lt1"/>
-          </a:fontRef>
-        </p:style>
-        <p:txBody>
-          <a:bodyPr rtlCol="0" anchor="ctr"/>
-          <a:lstStyle/>
-          <a:p>
-            <a:pPr algn="ctr"/>
-          </a:p>
-        </p:txBody>
-      </p:sp>
-      <p:sp>
-        <p:nvSpPr>
-          <p:cNvPr id="24" name="TextBox 23"/>
-          <p:cNvSpPr txBox="1"/>
-          <p:nvPr/>
-        </p:nvSpPr>
-        <p:spPr>
-          <a:xfrm>
-            <a:off x="6553047" y="3931920"/>
-            <a:ext cx="1463040" cy="457200"/>
-          </a:xfrm>
-          <a:prstGeom prst="rect">
-            <a:avLst/>
-          </a:prstGeom>
-          <a:noFill/>
-        </p:spPr>
-        <p:txBody>
-          <a:bodyPr wrap="square" anchor="t" lIns="0" rIns="0" tIns="0" bIns="0">
-            <a:spAutoFit/>
-          </a:bodyPr>
-          <a:lstStyle/>
-          <a:p>
-            <a:pPr algn="l"/>
-            <a:r>
-              <a:rPr sz="1700" b="1">
-                <a:solidFill>
-                  <a:srgbClr val="2E7D6B"/>
-                </a:solidFill>
-                <a:latin typeface="楷体"/>
-                <a:ea typeface="楷体"/>
-                <a:cs typeface="楷体"/>
-              </a:rPr>
-              <a:t>条理性</a:t>
-            </a:r>
-          </a:p>
-        </p:txBody>
-      </p:sp>
-      <p:sp>
-        <p:nvSpPr>
-          <p:cNvPr id="25" name="TextBox 24"/>
-          <p:cNvSpPr txBox="1"/>
-          <p:nvPr/>
-        </p:nvSpPr>
-        <p:spPr>
-          <a:xfrm>
-            <a:off x="8061807" y="3950208"/>
-            <a:ext cx="3306927" cy="1005840"/>
-          </a:xfrm>
-          <a:prstGeom prst="rect">
-            <a:avLst/>
-          </a:prstGeom>
-          <a:noFill/>
-        </p:spPr>
-        <p:txBody>
-          <a:bodyPr wrap="square" anchor="t" lIns="0" rIns="0" tIns="0" bIns="0">
-            <a:spAutoFit/>
-          </a:bodyPr>
-          <a:lstStyle/>
-          <a:p>
-            <a:pPr algn="l">
-              <a:lnSpc>
-                <a:spcPct val="140000"/>
-              </a:lnSpc>
-            </a:pPr>
-            <a:r>
-              <a:rPr sz="1350" b="0">
-                <a:solidFill>
-                  <a:srgbClr val="1C2A33"/>
-                </a:solidFill>
-                <a:latin typeface="楷体"/>
-                <a:ea typeface="楷体"/>
-                <a:cs typeface="楷体"/>
-              </a:rPr>
-              <a:t>按框架说：访谈有层次，播报有结构，不东拉西扯。</a:t>
-            </a:r>
-          </a:p>
-        </p:txBody>
-      </p:sp>
-      <p:sp>
-        <p:nvSpPr>
-          <p:cNvPr id="26" name="Rounded Rectangle 25"/>
-          <p:cNvSpPr/>
-          <p:nvPr/>
-        </p:nvSpPr>
-        <p:spPr>
-          <a:xfrm>
-            <a:off x="6324447" y="5248656"/>
-            <a:ext cx="5227167" cy="1371600"/>
-          </a:xfrm>
-          <a:prstGeom prst="roundRect">
-            <a:avLst/>
-          </a:prstGeom>
-          <a:solidFill>
-            <a:srgbClr val="FFFFFF"/>
-          </a:solidFill>
-          <a:ln w="17780">
-            <a:solidFill>
-              <a:srgbClr val="C8A86B"/>
-            </a:solidFill>
-          </a:ln>
-          <a:effectLst/>
-        </p:spPr>
-        <p:style>
-          <a:lnRef idx="1">
-            <a:schemeClr val="accent1"/>
-          </a:lnRef>
-          <a:fillRef idx="3">
-            <a:schemeClr val="accent1"/>
-          </a:fillRef>
-          <a:effectRef idx="2">
-            <a:schemeClr val="accent1"/>
-          </a:effectRef>
-          <a:fontRef idx="minor">
-            <a:schemeClr val="lt1"/>
-          </a:fontRef>
-        </p:style>
-        <p:txBody>
-          <a:bodyPr rtlCol="0" anchor="ctr"/>
-          <a:lstStyle/>
-          <a:p>
-            <a:pPr algn="ctr"/>
-          </a:p>
-        </p:txBody>
-      </p:sp>
-      <p:sp>
-        <p:nvSpPr>
-          <p:cNvPr id="27" name="TextBox 26"/>
-          <p:cNvSpPr txBox="1"/>
-          <p:nvPr/>
-        </p:nvSpPr>
-        <p:spPr>
-          <a:xfrm>
-            <a:off x="6553047" y="5413248"/>
-            <a:ext cx="1463040" cy="457200"/>
-          </a:xfrm>
-          <a:prstGeom prst="rect">
-            <a:avLst/>
-          </a:prstGeom>
-          <a:noFill/>
-        </p:spPr>
-        <p:txBody>
-          <a:bodyPr wrap="square" anchor="t" lIns="0" rIns="0" tIns="0" bIns="0">
-            <a:spAutoFit/>
-          </a:bodyPr>
-          <a:lstStyle/>
-          <a:p>
-            <a:pPr algn="l"/>
-            <a:r>
-              <a:rPr sz="1700" b="1">
-                <a:solidFill>
-                  <a:srgbClr val="C8A86B"/>
-                </a:solidFill>
-                <a:latin typeface="楷体"/>
-                <a:ea typeface="楷体"/>
-                <a:cs typeface="楷体"/>
-              </a:rPr>
-              <a:t>得体性</a:t>
-            </a:r>
-          </a:p>
-        </p:txBody>
-      </p:sp>
-      <p:sp>
-        <p:nvSpPr>
-          <p:cNvPr id="28" name="TextBox 27"/>
-          <p:cNvSpPr txBox="1"/>
-          <p:nvPr/>
-        </p:nvSpPr>
-        <p:spPr>
-          <a:xfrm>
-            <a:off x="8061807" y="5431536"/>
-            <a:ext cx="3306927" cy="1005840"/>
-          </a:xfrm>
-          <a:prstGeom prst="rect">
-            <a:avLst/>
-          </a:prstGeom>
-          <a:noFill/>
-        </p:spPr>
-        <p:txBody>
-          <a:bodyPr wrap="square" anchor="t" lIns="0" rIns="0" tIns="0" bIns="0">
-            <a:spAutoFit/>
-          </a:bodyPr>
-          <a:lstStyle/>
-          <a:p>
-            <a:pPr algn="l">
-              <a:lnSpc>
-                <a:spcPct val="140000"/>
-              </a:lnSpc>
-            </a:pPr>
-            <a:r>
-              <a:rPr sz="1350" b="0">
-                <a:solidFill>
-                  <a:srgbClr val="1C2A33"/>
-                </a:solidFill>
-                <a:latin typeface="楷体"/>
-                <a:ea typeface="楷体"/>
-                <a:cs typeface="楷体"/>
-              </a:rPr>
-              <a:t>看对象调整：对同学、对长辈、对镜头，语气不一样。</a:t>
-            </a:r>
-          </a:p>
-        </p:txBody>
-      </p:sp>
-      <p:sp>
-        <p:nvSpPr>
-          <p:cNvPr id="29" name="TextBox 28"/>
+              <a:t>③ 口语交流三原则：目的性（为什么说）·条理性（怎么说清楚）·得体性（对谁说）。</a:t>
+            </a:r>
+          </a:p>
+        </p:txBody>
+      </p:sp>
+      <p:sp>
+        <p:nvSpPr>
+          <p:cNvPr id="14" name="TextBox 13"/>
           <p:cNvSpPr txBox="1"/>
           <p:nvPr/>
         </p:nvSpPr>
@@ -6331,13 +5391,13 @@
             <a:r>
               <a:rPr sz="1300" b="1">
                 <a:solidFill>
-                  <a:srgbClr val="B23A2A"/>
+                  <a:srgbClr val="2E7D6B"/>
                 </a:solidFill>
                 <a:latin typeface="微软雅黑"/>
                 <a:ea typeface="微软雅黑"/>
                 <a:cs typeface="微软雅黑"/>
               </a:rPr>
-              <a:t>难点 · 怎么破</a:t>
+              <a:t>学习路径</a:t>
             </a:r>
           </a:p>
         </p:txBody>
@@ -6354,342 +5414,6 @@
             <a:ext cx="822960" cy="30480"/>
           </a:xfrm>
           <a:prstGeom prst="rect">
-            <a:avLst/>
-          </a:prstGeom>
-          <a:solidFill>
-            <a:srgbClr val="B23A2A"/>
-          </a:solidFill>
-          <a:ln>
-            <a:noFill/>
-          </a:ln>
-          <a:effectLst/>
-        </p:spPr>
-        <p:style>
-          <a:lnRef idx="1">
-            <a:schemeClr val="accent1"/>
-          </a:lnRef>
-          <a:fillRef idx="3">
-            <a:schemeClr val="accent1"/>
-          </a:fillRef>
-          <a:effectRef idx="2">
-            <a:schemeClr val="accent1"/>
-          </a:effectRef>
-          <a:fontRef idx="minor">
-            <a:schemeClr val="lt1"/>
-          </a:fontRef>
-        </p:style>
-        <p:txBody>
-          <a:bodyPr rtlCol="0" anchor="ctr"/>
-          <a:lstStyle/>
-          <a:p>
-            <a:pPr algn="ctr"/>
-          </a:p>
-        </p:txBody>
-      </p:sp>
-      <p:sp>
-        <p:nvSpPr>
-          <p:cNvPr id="5" name="TextBox 4"/>
-          <p:cNvSpPr txBox="1"/>
-          <p:nvPr/>
-        </p:nvSpPr>
-        <p:spPr>
-          <a:xfrm>
-            <a:off x="640080" y="1325880"/>
-            <a:ext cx="10058400" cy="548640"/>
-          </a:xfrm>
-          <a:prstGeom prst="rect">
-            <a:avLst/>
-          </a:prstGeom>
-          <a:noFill/>
-        </p:spPr>
-        <p:txBody>
-          <a:bodyPr wrap="square" anchor="t" lIns="0" rIns="0" tIns="0" bIns="0">
-            <a:spAutoFit/>
-          </a:bodyPr>
-          <a:lstStyle/>
-          <a:p>
-            <a:pPr algn="l"/>
-            <a:r>
-              <a:rPr sz="2600" b="1">
-                <a:solidFill>
-                  <a:srgbClr val="1C2A33"/>
-                </a:solidFill>
-                <a:latin typeface="楷体"/>
-                <a:ea typeface="楷体"/>
-                <a:cs typeface="楷体"/>
-              </a:rPr>
-              <a:t>三个易卡住的地方</a:t>
-            </a:r>
-          </a:p>
-        </p:txBody>
-      </p:sp>
-      <p:sp>
-        <p:nvSpPr>
-          <p:cNvPr id="6" name="Rounded Rectangle 5"/>
-          <p:cNvSpPr/>
-          <p:nvPr/>
-        </p:nvSpPr>
-        <p:spPr>
-          <a:xfrm>
-            <a:off x="640080" y="2194560"/>
-            <a:ext cx="3393338" cy="3840480"/>
-          </a:xfrm>
-          <a:prstGeom prst="roundRect">
-            <a:avLst/>
-          </a:prstGeom>
-          <a:solidFill>
-            <a:srgbClr val="FFFFFF"/>
-          </a:solidFill>
-          <a:ln w="20320">
-            <a:solidFill>
-              <a:srgbClr val="B23A2A"/>
-            </a:solidFill>
-          </a:ln>
-          <a:effectLst/>
-        </p:spPr>
-        <p:style>
-          <a:lnRef idx="1">
-            <a:schemeClr val="accent1"/>
-          </a:lnRef>
-          <a:fillRef idx="3">
-            <a:schemeClr val="accent1"/>
-          </a:fillRef>
-          <a:effectRef idx="2">
-            <a:schemeClr val="accent1"/>
-          </a:effectRef>
-          <a:fontRef idx="minor">
-            <a:schemeClr val="lt1"/>
-          </a:fontRef>
-        </p:style>
-        <p:txBody>
-          <a:bodyPr rtlCol="0" anchor="ctr"/>
-          <a:lstStyle/>
-          <a:p>
-            <a:pPr algn="ctr"/>
-          </a:p>
-        </p:txBody>
-      </p:sp>
-      <p:sp>
-        <p:nvSpPr>
-          <p:cNvPr id="7" name="Oval 6"/>
-          <p:cNvSpPr/>
-          <p:nvPr/>
-        </p:nvSpPr>
-        <p:spPr>
-          <a:xfrm>
-            <a:off x="868680" y="2423160"/>
-            <a:ext cx="548640" cy="548640"/>
-          </a:xfrm>
-          <a:prstGeom prst="ellipse">
-            <a:avLst/>
-          </a:prstGeom>
-          <a:solidFill>
-            <a:srgbClr val="B23A2A"/>
-          </a:solidFill>
-          <a:ln>
-            <a:noFill/>
-          </a:ln>
-          <a:effectLst/>
-        </p:spPr>
-        <p:style>
-          <a:lnRef idx="1">
-            <a:schemeClr val="accent1"/>
-          </a:lnRef>
-          <a:fillRef idx="3">
-            <a:schemeClr val="accent1"/>
-          </a:fillRef>
-          <a:effectRef idx="2">
-            <a:schemeClr val="accent1"/>
-          </a:effectRef>
-          <a:fontRef idx="minor">
-            <a:schemeClr val="lt1"/>
-          </a:fontRef>
-        </p:style>
-        <p:txBody>
-          <a:bodyPr rtlCol="0" anchor="ctr"/>
-          <a:lstStyle/>
-          <a:p>
-            <a:pPr algn="ctr"/>
-          </a:p>
-        </p:txBody>
-      </p:sp>
-      <p:sp>
-        <p:nvSpPr>
-          <p:cNvPr id="8" name="TextBox 7"/>
-          <p:cNvSpPr txBox="1"/>
-          <p:nvPr/>
-        </p:nvSpPr>
-        <p:spPr>
-          <a:xfrm>
-            <a:off x="868680" y="2496312"/>
-            <a:ext cx="548640" cy="411480"/>
-          </a:xfrm>
-          <a:prstGeom prst="rect">
-            <a:avLst/>
-          </a:prstGeom>
-          <a:noFill/>
-        </p:spPr>
-        <p:txBody>
-          <a:bodyPr wrap="square" anchor="t" lIns="0" rIns="0" tIns="0" bIns="0">
-            <a:spAutoFit/>
-          </a:bodyPr>
-          <a:lstStyle/>
-          <a:p>
-            <a:pPr algn="ctr"/>
-            <a:r>
-              <a:rPr sz="2000" b="1">
-                <a:solidFill>
-                  <a:srgbClr val="FFFFFF"/>
-                </a:solidFill>
-                <a:latin typeface="微软雅黑"/>
-                <a:ea typeface="微软雅黑"/>
-                <a:cs typeface="微软雅黑"/>
-              </a:rPr>
-              <a:t>1</a:t>
-            </a:r>
-          </a:p>
-        </p:txBody>
-      </p:sp>
-      <p:sp>
-        <p:nvSpPr>
-          <p:cNvPr id="9" name="TextBox 8"/>
-          <p:cNvSpPr txBox="1"/>
-          <p:nvPr/>
-        </p:nvSpPr>
-        <p:spPr>
-          <a:xfrm>
-            <a:off x="1554480" y="2450592"/>
-            <a:ext cx="2296058" cy="731520"/>
-          </a:xfrm>
-          <a:prstGeom prst="rect">
-            <a:avLst/>
-          </a:prstGeom>
-          <a:noFill/>
-        </p:spPr>
-        <p:txBody>
-          <a:bodyPr wrap="square" anchor="t" lIns="0" rIns="0" tIns="0" bIns="0">
-            <a:spAutoFit/>
-          </a:bodyPr>
-          <a:lstStyle/>
-          <a:p>
-            <a:pPr algn="l">
-              <a:lnSpc>
-                <a:spcPct val="130000"/>
-              </a:lnSpc>
-            </a:pPr>
-            <a:r>
-              <a:rPr sz="1650" b="1">
-                <a:solidFill>
-                  <a:srgbClr val="1C2A33"/>
-                </a:solidFill>
-                <a:latin typeface="楷体"/>
-                <a:ea typeface="楷体"/>
-                <a:cs typeface="楷体"/>
-              </a:rPr>
-              <a:t>问题缺层次</a:t>
-            </a:r>
-          </a:p>
-        </p:txBody>
-      </p:sp>
-      <p:sp>
-        <p:nvSpPr>
-          <p:cNvPr id="10" name="TextBox 9"/>
-          <p:cNvSpPr txBox="1"/>
-          <p:nvPr/>
-        </p:nvSpPr>
-        <p:spPr>
-          <a:xfrm>
-            <a:off x="914400" y="3246120"/>
-            <a:ext cx="2844698" cy="2651760"/>
-          </a:xfrm>
-          <a:prstGeom prst="rect">
-            <a:avLst/>
-          </a:prstGeom>
-          <a:noFill/>
-        </p:spPr>
-        <p:txBody>
-          <a:bodyPr wrap="square" anchor="t" lIns="0" rIns="0" tIns="0" bIns="0">
-            <a:spAutoFit/>
-          </a:bodyPr>
-          <a:lstStyle/>
-          <a:p>
-            <a:pPr algn="l">
-              <a:lnSpc>
-                <a:spcPct val="150000"/>
-              </a:lnSpc>
-            </a:pPr>
-            <a:r>
-              <a:rPr sz="1400" b="0">
-                <a:solidFill>
-                  <a:srgbClr val="1C2A33"/>
-                </a:solidFill>
-                <a:latin typeface="楷体"/>
-                <a:ea typeface="楷体"/>
-                <a:cs typeface="楷体"/>
-              </a:rPr>
-              <a:t>只会问"你觉得怎么样"这种空问题。→ 用三层次框架填空：事实→感受→价值，每个问题都要"具体可答"。</a:t>
-            </a:r>
-          </a:p>
-        </p:txBody>
-      </p:sp>
-      <p:sp>
-        <p:nvSpPr>
-          <p:cNvPr id="11" name="Rounded Rectangle 10"/>
-          <p:cNvSpPr/>
-          <p:nvPr/>
-        </p:nvSpPr>
-        <p:spPr>
-          <a:xfrm>
-            <a:off x="4399178" y="2194560"/>
-            <a:ext cx="3393338" cy="3840480"/>
-          </a:xfrm>
-          <a:prstGeom prst="roundRect">
-            <a:avLst/>
-          </a:prstGeom>
-          <a:solidFill>
-            <a:srgbClr val="FFFFFF"/>
-          </a:solidFill>
-          <a:ln w="20320">
-            <a:solidFill>
-              <a:srgbClr val="2E7D6B"/>
-            </a:solidFill>
-          </a:ln>
-          <a:effectLst/>
-        </p:spPr>
-        <p:style>
-          <a:lnRef idx="1">
-            <a:schemeClr val="accent1"/>
-          </a:lnRef>
-          <a:fillRef idx="3">
-            <a:schemeClr val="accent1"/>
-          </a:fillRef>
-          <a:effectRef idx="2">
-            <a:schemeClr val="accent1"/>
-          </a:effectRef>
-          <a:fontRef idx="minor">
-            <a:schemeClr val="lt1"/>
-          </a:fontRef>
-        </p:style>
-        <p:txBody>
-          <a:bodyPr rtlCol="0" anchor="ctr"/>
-          <a:lstStyle/>
-          <a:p>
-            <a:pPr algn="ctr"/>
-          </a:p>
-        </p:txBody>
-      </p:sp>
-      <p:sp>
-        <p:nvSpPr>
-          <p:cNvPr id="12" name="Oval 11"/>
-          <p:cNvSpPr/>
-          <p:nvPr/>
-        </p:nvSpPr>
-        <p:spPr>
-          <a:xfrm>
-            <a:off x="4627778" y="2423160"/>
-            <a:ext cx="548640" cy="548640"/>
-          </a:xfrm>
-          <a:prstGeom prst="ellipse">
             <a:avLst/>
           </a:prstGeom>
           <a:solidFill>
@@ -6724,14 +5448,104 @@
       </p:sp>
       <p:sp>
         <p:nvSpPr>
-          <p:cNvPr id="13" name="TextBox 12"/>
+          <p:cNvPr id="5" name="Rounded Rectangle 4"/>
+          <p:cNvSpPr/>
+          <p:nvPr/>
+        </p:nvSpPr>
+        <p:spPr>
+          <a:xfrm>
+            <a:off x="640080" y="1371600"/>
+            <a:ext cx="10911535" cy="685800"/>
+          </a:xfrm>
+          <a:prstGeom prst="roundRect">
+            <a:avLst/>
+          </a:prstGeom>
+          <a:solidFill>
+            <a:srgbClr val="FFFFFF"/>
+          </a:solidFill>
+          <a:ln w="22860">
+            <a:solidFill>
+              <a:srgbClr val="2E7D6B"/>
+            </a:solidFill>
+          </a:ln>
+          <a:effectLst/>
+        </p:spPr>
+        <p:style>
+          <a:lnRef idx="1">
+            <a:schemeClr val="accent1"/>
+          </a:lnRef>
+          <a:fillRef idx="3">
+            <a:schemeClr val="accent1"/>
+          </a:fillRef>
+          <a:effectRef idx="2">
+            <a:schemeClr val="accent1"/>
+          </a:effectRef>
+          <a:fontRef idx="minor">
+            <a:schemeClr val="lt1"/>
+          </a:fontRef>
+        </p:style>
+        <p:txBody>
+          <a:bodyPr rtlCol="0" anchor="ctr"/>
+          <a:lstStyle/>
+          <a:p>
+            <a:pPr algn="ctr"/>
+          </a:p>
+        </p:txBody>
+      </p:sp>
+      <p:sp>
+        <p:nvSpPr>
+          <p:cNvPr id="6" name="Oval 5"/>
+          <p:cNvSpPr/>
+          <p:nvPr/>
+        </p:nvSpPr>
+        <p:spPr>
+          <a:xfrm>
+            <a:off x="804672" y="1536192"/>
+            <a:ext cx="457200" cy="457200"/>
+          </a:xfrm>
+          <a:prstGeom prst="ellipse">
+            <a:avLst/>
+          </a:prstGeom>
+          <a:solidFill>
+            <a:srgbClr val="2E7D6B"/>
+          </a:solidFill>
+          <a:ln>
+            <a:noFill/>
+          </a:ln>
+          <a:effectLst/>
+        </p:spPr>
+        <p:style>
+          <a:lnRef idx="1">
+            <a:schemeClr val="accent1"/>
+          </a:lnRef>
+          <a:fillRef idx="3">
+            <a:schemeClr val="accent1"/>
+          </a:fillRef>
+          <a:effectRef idx="2">
+            <a:schemeClr val="accent1"/>
+          </a:effectRef>
+          <a:fontRef idx="minor">
+            <a:schemeClr val="lt1"/>
+          </a:fontRef>
+        </p:style>
+        <p:txBody>
+          <a:bodyPr rtlCol="0" anchor="ctr"/>
+          <a:lstStyle/>
+          <a:p>
+            <a:pPr algn="ctr"/>
+          </a:p>
+        </p:txBody>
+      </p:sp>
+      <p:sp>
+        <p:nvSpPr>
+          <p:cNvPr id="7" name="TextBox 6"/>
           <p:cNvSpPr txBox="1"/>
           <p:nvPr/>
         </p:nvSpPr>
         <p:spPr>
           <a:xfrm>
-            <a:off x="4627778" y="2496312"/>
-            <a:ext cx="548640" cy="411480"/>
+            <a:off x="804672" y="1591056"/>
+            <a:ext cx="457200" cy="384048"/>
           </a:xfrm>
           <a:prstGeom prst="rect">
             <a:avLst/>
@@ -6746,7 +5560,175 @@
           <a:p>
             <a:pPr algn="ctr"/>
             <a:r>
-              <a:rPr sz="2000" b="1">
+              <a:rPr sz="1600" b="1">
+                <a:solidFill>
+                  <a:srgbClr val="FFFFFF"/>
+                </a:solidFill>
+                <a:latin typeface="微软雅黑"/>
+                <a:ea typeface="微软雅黑"/>
+                <a:cs typeface="微软雅黑"/>
+              </a:rPr>
+              <a:t>1</a:t>
+            </a:r>
+          </a:p>
+        </p:txBody>
+      </p:sp>
+      <p:sp>
+        <p:nvSpPr>
+          <p:cNvPr id="8" name="TextBox 7"/>
+          <p:cNvSpPr txBox="1"/>
+          <p:nvPr/>
+        </p:nvSpPr>
+        <p:spPr>
+          <a:xfrm>
+            <a:off x="1371600" y="1481328"/>
+            <a:ext cx="9997135" cy="484632"/>
+          </a:xfrm>
+          <a:prstGeom prst="rect">
+            <a:avLst/>
+          </a:prstGeom>
+          <a:noFill/>
+        </p:spPr>
+        <p:txBody>
+          <a:bodyPr wrap="square" anchor="t" lIns="0" rIns="0" tIns="0" bIns="0">
+            <a:spAutoFit/>
+          </a:bodyPr>
+          <a:lstStyle/>
+          <a:p>
+            <a:pPr algn="l">
+              <a:lnSpc>
+                <a:spcPct val="110000"/>
+              </a:lnSpc>
+            </a:pPr>
+            <a:r>
+              <a:rPr sz="1600" b="1">
+                <a:solidFill>
+                  <a:srgbClr val="1C2A33"/>
+                </a:solidFill>
+                <a:latin typeface="微软雅黑"/>
+                <a:ea typeface="微软雅黑"/>
+                <a:cs typeface="微软雅黑"/>
+              </a:rPr>
+              <a:t>Step 1 导入</a:t>
+            </a:r>
+          </a:p>
+        </p:txBody>
+      </p:sp>
+      <p:sp>
+        <p:nvSpPr>
+          <p:cNvPr id="9" name="Rounded Rectangle 8"/>
+          <p:cNvSpPr/>
+          <p:nvPr/>
+        </p:nvSpPr>
+        <p:spPr>
+          <a:xfrm>
+            <a:off x="640080" y="2194560"/>
+            <a:ext cx="10911535" cy="685800"/>
+          </a:xfrm>
+          <a:prstGeom prst="roundRect">
+            <a:avLst/>
+          </a:prstGeom>
+          <a:solidFill>
+            <a:srgbClr val="FFFFFF"/>
+          </a:solidFill>
+          <a:ln w="22860">
+            <a:solidFill>
+              <a:srgbClr val="2E7D6B"/>
+            </a:solidFill>
+          </a:ln>
+          <a:effectLst/>
+        </p:spPr>
+        <p:style>
+          <a:lnRef idx="1">
+            <a:schemeClr val="accent1"/>
+          </a:lnRef>
+          <a:fillRef idx="3">
+            <a:schemeClr val="accent1"/>
+          </a:fillRef>
+          <a:effectRef idx="2">
+            <a:schemeClr val="accent1"/>
+          </a:effectRef>
+          <a:fontRef idx="minor">
+            <a:schemeClr val="lt1"/>
+          </a:fontRef>
+        </p:style>
+        <p:txBody>
+          <a:bodyPr rtlCol="0" anchor="ctr"/>
+          <a:lstStyle/>
+          <a:p>
+            <a:pPr algn="ctr"/>
+          </a:p>
+        </p:txBody>
+      </p:sp>
+      <p:sp>
+        <p:nvSpPr>
+          <p:cNvPr id="10" name="Oval 9"/>
+          <p:cNvSpPr/>
+          <p:nvPr/>
+        </p:nvSpPr>
+        <p:spPr>
+          <a:xfrm>
+            <a:off x="804672" y="2359152"/>
+            <a:ext cx="457200" cy="457200"/>
+          </a:xfrm>
+          <a:prstGeom prst="ellipse">
+            <a:avLst/>
+          </a:prstGeom>
+          <a:solidFill>
+            <a:srgbClr val="2E7D6B"/>
+          </a:solidFill>
+          <a:ln>
+            <a:noFill/>
+          </a:ln>
+          <a:effectLst/>
+        </p:spPr>
+        <p:style>
+          <a:lnRef idx="1">
+            <a:schemeClr val="accent1"/>
+          </a:lnRef>
+          <a:fillRef idx="3">
+            <a:schemeClr val="accent1"/>
+          </a:fillRef>
+          <a:effectRef idx="2">
+            <a:schemeClr val="accent1"/>
+          </a:effectRef>
+          <a:fontRef idx="minor">
+            <a:schemeClr val="lt1"/>
+          </a:fontRef>
+        </p:style>
+        <p:txBody>
+          <a:bodyPr rtlCol="0" anchor="ctr"/>
+          <a:lstStyle/>
+          <a:p>
+            <a:pPr algn="ctr"/>
+          </a:p>
+        </p:txBody>
+      </p:sp>
+      <p:sp>
+        <p:nvSpPr>
+          <p:cNvPr id="11" name="TextBox 10"/>
+          <p:cNvSpPr txBox="1"/>
+          <p:nvPr/>
+        </p:nvSpPr>
+        <p:spPr>
+          <a:xfrm>
+            <a:off x="804672" y="2414016"/>
+            <a:ext cx="457200" cy="384048"/>
+          </a:xfrm>
+          <a:prstGeom prst="rect">
+            <a:avLst/>
+          </a:prstGeom>
+          <a:noFill/>
+        </p:spPr>
+        <p:txBody>
+          <a:bodyPr wrap="square" anchor="t" lIns="0" rIns="0" tIns="0" bIns="0">
+            <a:spAutoFit/>
+          </a:bodyPr>
+          <a:lstStyle/>
+          <a:p>
+            <a:pPr algn="ctr"/>
+            <a:r>
+              <a:rPr sz="1600" b="1">
                 <a:solidFill>
                   <a:srgbClr val="FFFFFF"/>
                 </a:solidFill>
@@ -6761,14 +5743,14 @@
       </p:sp>
       <p:sp>
         <p:nvSpPr>
-          <p:cNvPr id="14" name="TextBox 13"/>
+          <p:cNvPr id="12" name="TextBox 11"/>
           <p:cNvSpPr txBox="1"/>
           <p:nvPr/>
         </p:nvSpPr>
         <p:spPr>
           <a:xfrm>
-            <a:off x="5313578" y="2450592"/>
-            <a:ext cx="2296058" cy="731520"/>
+            <a:off x="1371600" y="2304288"/>
+            <a:ext cx="9997135" cy="484632"/>
           </a:xfrm>
           <a:prstGeom prst="rect">
             <a:avLst/>
@@ -6783,74 +5765,33 @@
           <a:p>
             <a:pPr algn="l">
               <a:lnSpc>
-                <a:spcPct val="130000"/>
+                <a:spcPct val="110000"/>
               </a:lnSpc>
             </a:pPr>
             <a:r>
-              <a:rPr sz="1650" b="1">
+              <a:rPr sz="1400" b="1">
                 <a:solidFill>
                   <a:srgbClr val="1C2A33"/>
                 </a:solidFill>
-                <a:latin typeface="楷体"/>
-                <a:ea typeface="楷体"/>
-                <a:cs typeface="楷体"/>
+                <a:latin typeface="微软雅黑"/>
+                <a:ea typeface="微软雅黑"/>
+                <a:cs typeface="微软雅黑"/>
               </a:rPr>
-              <a:t>找不到"新闻语态"</a:t>
-            </a:r>
-          </a:p>
-        </p:txBody>
-      </p:sp>
-      <p:sp>
-        <p:nvSpPr>
-          <p:cNvPr id="15" name="TextBox 14"/>
-          <p:cNvSpPr txBox="1"/>
-          <p:nvPr/>
-        </p:nvSpPr>
-        <p:spPr>
-          <a:xfrm>
-            <a:off x="4673498" y="3246120"/>
-            <a:ext cx="2844698" cy="2651760"/>
-          </a:xfrm>
-          <a:prstGeom prst="rect">
-            <a:avLst/>
-          </a:prstGeom>
-          <a:noFill/>
-        </p:spPr>
-        <p:txBody>
-          <a:bodyPr wrap="square" anchor="t" lIns="0" rIns="0" tIns="0" bIns="0">
-            <a:spAutoFit/>
-          </a:bodyPr>
-          <a:lstStyle/>
-          <a:p>
-            <a:pPr algn="l">
-              <a:lnSpc>
-                <a:spcPct val="150000"/>
-              </a:lnSpc>
-            </a:pPr>
-            <a:r>
-              <a:rPr sz="1400" b="0">
-                <a:solidFill>
-                  <a:srgbClr val="1C2A33"/>
-                </a:solidFill>
-                <a:latin typeface="楷体"/>
-                <a:ea typeface="楷体"/>
-                <a:cs typeface="楷体"/>
-              </a:rPr>
-              <a:t>要么太随意（像聊天），要么太夸张（像朗诵）。→ 中间态：客观·简洁·有节奏，看主播示范对比。</a:t>
-            </a:r>
-          </a:p>
-        </p:txBody>
-      </p:sp>
-      <p:sp>
-        <p:nvSpPr>
-          <p:cNvPr id="16" name="Rounded Rectangle 15"/>
+              <a:t>Step 2 访谈问题设计</a:t>
+            </a:r>
+          </a:p>
+        </p:txBody>
+      </p:sp>
+      <p:sp>
+        <p:nvSpPr>
+          <p:cNvPr id="13" name="Rounded Rectangle 12"/>
           <p:cNvSpPr/>
           <p:nvPr/>
         </p:nvSpPr>
         <p:spPr>
           <a:xfrm>
-            <a:off x="8158276" y="2194560"/>
-            <a:ext cx="3393338" cy="3840480"/>
+            <a:off x="640080" y="3017520"/>
+            <a:ext cx="10911535" cy="685800"/>
           </a:xfrm>
           <a:prstGeom prst="roundRect">
             <a:avLst/>
@@ -6858,9 +5799,9 @@
           <a:solidFill>
             <a:srgbClr val="FFFFFF"/>
           </a:solidFill>
-          <a:ln w="20320">
+          <a:ln w="22860">
             <a:solidFill>
-              <a:srgbClr val="C8A86B"/>
+              <a:srgbClr val="2E7D6B"/>
             </a:solidFill>
           </a:ln>
           <a:effectLst/>
@@ -6889,20 +5830,20 @@
       </p:sp>
       <p:sp>
         <p:nvSpPr>
-          <p:cNvPr id="17" name="Oval 16"/>
+          <p:cNvPr id="14" name="Oval 13"/>
           <p:cNvSpPr/>
           <p:nvPr/>
         </p:nvSpPr>
         <p:spPr>
           <a:xfrm>
-            <a:off x="8386876" y="2423160"/>
-            <a:ext cx="548640" cy="548640"/>
+            <a:off x="804672" y="3182112"/>
+            <a:ext cx="457200" cy="457200"/>
           </a:xfrm>
           <a:prstGeom prst="ellipse">
             <a:avLst/>
           </a:prstGeom>
           <a:solidFill>
-            <a:srgbClr val="C8A86B"/>
+            <a:srgbClr val="2E7D6B"/>
           </a:solidFill>
           <a:ln>
             <a:noFill/>
@@ -6933,14 +5874,14 @@
       </p:sp>
       <p:sp>
         <p:nvSpPr>
-          <p:cNvPr id="18" name="TextBox 17"/>
+          <p:cNvPr id="15" name="TextBox 14"/>
           <p:cNvSpPr txBox="1"/>
           <p:nvPr/>
         </p:nvSpPr>
         <p:spPr>
           <a:xfrm>
-            <a:off x="8386876" y="2496312"/>
-            <a:ext cx="548640" cy="411480"/>
+            <a:off x="804672" y="3236976"/>
+            <a:ext cx="457200" cy="384048"/>
           </a:xfrm>
           <a:prstGeom prst="rect">
             <a:avLst/>
@@ -6955,7 +5896,7 @@
           <a:p>
             <a:pPr algn="ctr"/>
             <a:r>
-              <a:rPr sz="2000" b="1">
+              <a:rPr sz="1600" b="1">
                 <a:solidFill>
                   <a:srgbClr val="FFFFFF"/>
                 </a:solidFill>
@@ -6970,14 +5911,14 @@
       </p:sp>
       <p:sp>
         <p:nvSpPr>
-          <p:cNvPr id="19" name="TextBox 18"/>
+          <p:cNvPr id="16" name="TextBox 15"/>
           <p:cNvSpPr txBox="1"/>
           <p:nvPr/>
         </p:nvSpPr>
         <p:spPr>
           <a:xfrm>
-            <a:off x="9072676" y="2450592"/>
-            <a:ext cx="2296058" cy="731520"/>
+            <a:off x="1371600" y="3127248"/>
+            <a:ext cx="9997135" cy="484632"/>
           </a:xfrm>
           <a:prstGeom prst="rect">
             <a:avLst/>
@@ -6992,33 +5933,123 @@
           <a:p>
             <a:pPr algn="l">
               <a:lnSpc>
-                <a:spcPct val="130000"/>
+                <a:spcPct val="110000"/>
               </a:lnSpc>
             </a:pPr>
             <a:r>
-              <a:rPr sz="1650" b="1">
+              <a:rPr sz="1600" b="1">
                 <a:solidFill>
                   <a:srgbClr val="1C2A33"/>
                 </a:solidFill>
-                <a:latin typeface="楷体"/>
-                <a:ea typeface="楷体"/>
-                <a:cs typeface="楷体"/>
+                <a:latin typeface="微软雅黑"/>
+                <a:ea typeface="微软雅黑"/>
+                <a:cs typeface="微软雅黑"/>
               </a:rPr>
-              <a:t>当众开口紧张</a:t>
-            </a:r>
-          </a:p>
-        </p:txBody>
-      </p:sp>
-      <p:sp>
-        <p:nvSpPr>
-          <p:cNvPr id="20" name="TextBox 19"/>
+              <a:t>Step 3 模拟访谈</a:t>
+            </a:r>
+          </a:p>
+        </p:txBody>
+      </p:sp>
+      <p:sp>
+        <p:nvSpPr>
+          <p:cNvPr id="17" name="Rounded Rectangle 16"/>
+          <p:cNvSpPr/>
+          <p:nvPr/>
+        </p:nvSpPr>
+        <p:spPr>
+          <a:xfrm>
+            <a:off x="640080" y="3840480"/>
+            <a:ext cx="10911535" cy="685800"/>
+          </a:xfrm>
+          <a:prstGeom prst="roundRect">
+            <a:avLst/>
+          </a:prstGeom>
+          <a:solidFill>
+            <a:srgbClr val="FFFFFF"/>
+          </a:solidFill>
+          <a:ln w="22860">
+            <a:solidFill>
+              <a:srgbClr val="2E7D6B"/>
+            </a:solidFill>
+          </a:ln>
+          <a:effectLst/>
+        </p:spPr>
+        <p:style>
+          <a:lnRef idx="1">
+            <a:schemeClr val="accent1"/>
+          </a:lnRef>
+          <a:fillRef idx="3">
+            <a:schemeClr val="accent1"/>
+          </a:fillRef>
+          <a:effectRef idx="2">
+            <a:schemeClr val="accent1"/>
+          </a:effectRef>
+          <a:fontRef idx="minor">
+            <a:schemeClr val="lt1"/>
+          </a:fontRef>
+        </p:style>
+        <p:txBody>
+          <a:bodyPr rtlCol="0" anchor="ctr"/>
+          <a:lstStyle/>
+          <a:p>
+            <a:pPr algn="ctr"/>
+          </a:p>
+        </p:txBody>
+      </p:sp>
+      <p:sp>
+        <p:nvSpPr>
+          <p:cNvPr id="18" name="Oval 17"/>
+          <p:cNvSpPr/>
+          <p:nvPr/>
+        </p:nvSpPr>
+        <p:spPr>
+          <a:xfrm>
+            <a:off x="804672" y="4005072"/>
+            <a:ext cx="457200" cy="457200"/>
+          </a:xfrm>
+          <a:prstGeom prst="ellipse">
+            <a:avLst/>
+          </a:prstGeom>
+          <a:solidFill>
+            <a:srgbClr val="2E7D6B"/>
+          </a:solidFill>
+          <a:ln>
+            <a:noFill/>
+          </a:ln>
+          <a:effectLst/>
+        </p:spPr>
+        <p:style>
+          <a:lnRef idx="1">
+            <a:schemeClr val="accent1"/>
+          </a:lnRef>
+          <a:fillRef idx="3">
+            <a:schemeClr val="accent1"/>
+          </a:fillRef>
+          <a:effectRef idx="2">
+            <a:schemeClr val="accent1"/>
+          </a:effectRef>
+          <a:fontRef idx="minor">
+            <a:schemeClr val="lt1"/>
+          </a:fontRef>
+        </p:style>
+        <p:txBody>
+          <a:bodyPr rtlCol="0" anchor="ctr"/>
+          <a:lstStyle/>
+          <a:p>
+            <a:pPr algn="ctr"/>
+          </a:p>
+        </p:txBody>
+      </p:sp>
+      <p:sp>
+        <p:nvSpPr>
+          <p:cNvPr id="19" name="TextBox 18"/>
           <p:cNvSpPr txBox="1"/>
           <p:nvPr/>
         </p:nvSpPr>
         <p:spPr>
           <a:xfrm>
-            <a:off x="8432596" y="3246120"/>
-            <a:ext cx="2844698" cy="2651760"/>
+            <a:off x="804672" y="4059936"/>
+            <a:ext cx="457200" cy="384048"/>
           </a:xfrm>
           <a:prstGeom prst="rect">
             <a:avLst/>
@@ -7031,28 +6062,401 @@
           </a:bodyPr>
           <a:lstStyle/>
           <a:p>
+            <a:pPr algn="ctr"/>
+            <a:r>
+              <a:rPr sz="1600" b="1">
+                <a:solidFill>
+                  <a:srgbClr val="FFFFFF"/>
+                </a:solidFill>
+                <a:latin typeface="微软雅黑"/>
+                <a:ea typeface="微软雅黑"/>
+                <a:cs typeface="微软雅黑"/>
+              </a:rPr>
+              <a:t>4</a:t>
+            </a:r>
+          </a:p>
+        </p:txBody>
+      </p:sp>
+      <p:sp>
+        <p:nvSpPr>
+          <p:cNvPr id="20" name="TextBox 19"/>
+          <p:cNvSpPr txBox="1"/>
+          <p:nvPr/>
+        </p:nvSpPr>
+        <p:spPr>
+          <a:xfrm>
+            <a:off x="1371600" y="3950208"/>
+            <a:ext cx="9997135" cy="484632"/>
+          </a:xfrm>
+          <a:prstGeom prst="rect">
+            <a:avLst/>
+          </a:prstGeom>
+          <a:noFill/>
+        </p:spPr>
+        <p:txBody>
+          <a:bodyPr wrap="square" anchor="t" lIns="0" rIns="0" tIns="0" bIns="0">
+            <a:spAutoFit/>
+          </a:bodyPr>
+          <a:lstStyle/>
+          <a:p>
             <a:pPr algn="l">
               <a:lnSpc>
-                <a:spcPct val="150000"/>
+                <a:spcPct val="110000"/>
               </a:lnSpc>
             </a:pPr>
             <a:r>
-              <a:rPr sz="1400" b="0">
+              <a:rPr sz="1600" b="1">
                 <a:solidFill>
                   <a:srgbClr val="1C2A33"/>
                 </a:solidFill>
-                <a:latin typeface="楷体"/>
-                <a:ea typeface="楷体"/>
-                <a:cs typeface="楷体"/>
+                <a:latin typeface="微软雅黑"/>
+                <a:ea typeface="微软雅黑"/>
+                <a:cs typeface="微软雅黑"/>
               </a:rPr>
-              <a:t>不敢说、低头念稿、忘词。→ 4人小组分工（记者/受访者/记录员/观察员），降低个体压力。</a:t>
-            </a:r>
-          </a:p>
-        </p:txBody>
-      </p:sp>
-      <p:sp>
-        <p:nvSpPr>
-          <p:cNvPr id="21" name="TextBox 20"/>
+              <a:t>Step 4 新闻播报</a:t>
+            </a:r>
+          </a:p>
+        </p:txBody>
+      </p:sp>
+      <p:sp>
+        <p:nvSpPr>
+          <p:cNvPr id="21" name="Rounded Rectangle 20"/>
+          <p:cNvSpPr/>
+          <p:nvPr/>
+        </p:nvSpPr>
+        <p:spPr>
+          <a:xfrm>
+            <a:off x="640080" y="4663440"/>
+            <a:ext cx="10911535" cy="685800"/>
+          </a:xfrm>
+          <a:prstGeom prst="roundRect">
+            <a:avLst/>
+          </a:prstGeom>
+          <a:solidFill>
+            <a:srgbClr val="FFFFFF"/>
+          </a:solidFill>
+          <a:ln w="22860">
+            <a:solidFill>
+              <a:srgbClr val="2E7D6B"/>
+            </a:solidFill>
+          </a:ln>
+          <a:effectLst/>
+        </p:spPr>
+        <p:style>
+          <a:lnRef idx="1">
+            <a:schemeClr val="accent1"/>
+          </a:lnRef>
+          <a:fillRef idx="3">
+            <a:schemeClr val="accent1"/>
+          </a:fillRef>
+          <a:effectRef idx="2">
+            <a:schemeClr val="accent1"/>
+          </a:effectRef>
+          <a:fontRef idx="minor">
+            <a:schemeClr val="lt1"/>
+          </a:fontRef>
+        </p:style>
+        <p:txBody>
+          <a:bodyPr rtlCol="0" anchor="ctr"/>
+          <a:lstStyle/>
+          <a:p>
+            <a:pPr algn="ctr"/>
+          </a:p>
+        </p:txBody>
+      </p:sp>
+      <p:sp>
+        <p:nvSpPr>
+          <p:cNvPr id="22" name="Oval 21"/>
+          <p:cNvSpPr/>
+          <p:nvPr/>
+        </p:nvSpPr>
+        <p:spPr>
+          <a:xfrm>
+            <a:off x="804672" y="4828032"/>
+            <a:ext cx="457200" cy="457200"/>
+          </a:xfrm>
+          <a:prstGeom prst="ellipse">
+            <a:avLst/>
+          </a:prstGeom>
+          <a:solidFill>
+            <a:srgbClr val="2E7D6B"/>
+          </a:solidFill>
+          <a:ln>
+            <a:noFill/>
+          </a:ln>
+          <a:effectLst/>
+        </p:spPr>
+        <p:style>
+          <a:lnRef idx="1">
+            <a:schemeClr val="accent1"/>
+          </a:lnRef>
+          <a:fillRef idx="3">
+            <a:schemeClr val="accent1"/>
+          </a:fillRef>
+          <a:effectRef idx="2">
+            <a:schemeClr val="accent1"/>
+          </a:effectRef>
+          <a:fontRef idx="minor">
+            <a:schemeClr val="lt1"/>
+          </a:fontRef>
+        </p:style>
+        <p:txBody>
+          <a:bodyPr rtlCol="0" anchor="ctr"/>
+          <a:lstStyle/>
+          <a:p>
+            <a:pPr algn="ctr"/>
+          </a:p>
+        </p:txBody>
+      </p:sp>
+      <p:sp>
+        <p:nvSpPr>
+          <p:cNvPr id="23" name="TextBox 22"/>
+          <p:cNvSpPr txBox="1"/>
+          <p:nvPr/>
+        </p:nvSpPr>
+        <p:spPr>
+          <a:xfrm>
+            <a:off x="804672" y="4882896"/>
+            <a:ext cx="457200" cy="384048"/>
+          </a:xfrm>
+          <a:prstGeom prst="rect">
+            <a:avLst/>
+          </a:prstGeom>
+          <a:noFill/>
+        </p:spPr>
+        <p:txBody>
+          <a:bodyPr wrap="square" anchor="t" lIns="0" rIns="0" tIns="0" bIns="0">
+            <a:spAutoFit/>
+          </a:bodyPr>
+          <a:lstStyle/>
+          <a:p>
+            <a:pPr algn="ctr"/>
+            <a:r>
+              <a:rPr sz="1600" b="1">
+                <a:solidFill>
+                  <a:srgbClr val="FFFFFF"/>
+                </a:solidFill>
+                <a:latin typeface="微软雅黑"/>
+                <a:ea typeface="微软雅黑"/>
+                <a:cs typeface="微软雅黑"/>
+              </a:rPr>
+              <a:t>5</a:t>
+            </a:r>
+          </a:p>
+        </p:txBody>
+      </p:sp>
+      <p:sp>
+        <p:nvSpPr>
+          <p:cNvPr id="24" name="TextBox 23"/>
+          <p:cNvSpPr txBox="1"/>
+          <p:nvPr/>
+        </p:nvSpPr>
+        <p:spPr>
+          <a:xfrm>
+            <a:off x="1371600" y="4773168"/>
+            <a:ext cx="9997135" cy="484632"/>
+          </a:xfrm>
+          <a:prstGeom prst="rect">
+            <a:avLst/>
+          </a:prstGeom>
+          <a:noFill/>
+        </p:spPr>
+        <p:txBody>
+          <a:bodyPr wrap="square" anchor="t" lIns="0" rIns="0" tIns="0" bIns="0">
+            <a:spAutoFit/>
+          </a:bodyPr>
+          <a:lstStyle/>
+          <a:p>
+            <a:pPr algn="l">
+              <a:lnSpc>
+                <a:spcPct val="110000"/>
+              </a:lnSpc>
+            </a:pPr>
+            <a:r>
+              <a:rPr sz="1400" b="1">
+                <a:solidFill>
+                  <a:srgbClr val="1C2A33"/>
+                </a:solidFill>
+                <a:latin typeface="微软雅黑"/>
+                <a:ea typeface="微软雅黑"/>
+                <a:cs typeface="微软雅黑"/>
+              </a:rPr>
+              <a:t>Step 5 播报展示+互评</a:t>
+            </a:r>
+          </a:p>
+        </p:txBody>
+      </p:sp>
+      <p:sp>
+        <p:nvSpPr>
+          <p:cNvPr id="25" name="Rounded Rectangle 24"/>
+          <p:cNvSpPr/>
+          <p:nvPr/>
+        </p:nvSpPr>
+        <p:spPr>
+          <a:xfrm>
+            <a:off x="640080" y="5486400"/>
+            <a:ext cx="10911535" cy="685800"/>
+          </a:xfrm>
+          <a:prstGeom prst="roundRect">
+            <a:avLst/>
+          </a:prstGeom>
+          <a:solidFill>
+            <a:srgbClr val="FFFFFF"/>
+          </a:solidFill>
+          <a:ln w="22860">
+            <a:solidFill>
+              <a:srgbClr val="2E7D6B"/>
+            </a:solidFill>
+          </a:ln>
+          <a:effectLst/>
+        </p:spPr>
+        <p:style>
+          <a:lnRef idx="1">
+            <a:schemeClr val="accent1"/>
+          </a:lnRef>
+          <a:fillRef idx="3">
+            <a:schemeClr val="accent1"/>
+          </a:fillRef>
+          <a:effectRef idx="2">
+            <a:schemeClr val="accent1"/>
+          </a:effectRef>
+          <a:fontRef idx="minor">
+            <a:schemeClr val="lt1"/>
+          </a:fontRef>
+        </p:style>
+        <p:txBody>
+          <a:bodyPr rtlCol="0" anchor="ctr"/>
+          <a:lstStyle/>
+          <a:p>
+            <a:pPr algn="ctr"/>
+          </a:p>
+        </p:txBody>
+      </p:sp>
+      <p:sp>
+        <p:nvSpPr>
+          <p:cNvPr id="26" name="Oval 25"/>
+          <p:cNvSpPr/>
+          <p:nvPr/>
+        </p:nvSpPr>
+        <p:spPr>
+          <a:xfrm>
+            <a:off x="804672" y="5650992"/>
+            <a:ext cx="457200" cy="457200"/>
+          </a:xfrm>
+          <a:prstGeom prst="ellipse">
+            <a:avLst/>
+          </a:prstGeom>
+          <a:solidFill>
+            <a:srgbClr val="2E7D6B"/>
+          </a:solidFill>
+          <a:ln>
+            <a:noFill/>
+          </a:ln>
+          <a:effectLst/>
+        </p:spPr>
+        <p:style>
+          <a:lnRef idx="1">
+            <a:schemeClr val="accent1"/>
+          </a:lnRef>
+          <a:fillRef idx="3">
+            <a:schemeClr val="accent1"/>
+          </a:fillRef>
+          <a:effectRef idx="2">
+            <a:schemeClr val="accent1"/>
+          </a:effectRef>
+          <a:fontRef idx="minor">
+            <a:schemeClr val="lt1"/>
+          </a:fontRef>
+        </p:style>
+        <p:txBody>
+          <a:bodyPr rtlCol="0" anchor="ctr"/>
+          <a:lstStyle/>
+          <a:p>
+            <a:pPr algn="ctr"/>
+          </a:p>
+        </p:txBody>
+      </p:sp>
+      <p:sp>
+        <p:nvSpPr>
+          <p:cNvPr id="27" name="TextBox 26"/>
+          <p:cNvSpPr txBox="1"/>
+          <p:nvPr/>
+        </p:nvSpPr>
+        <p:spPr>
+          <a:xfrm>
+            <a:off x="804672" y="5705856"/>
+            <a:ext cx="457200" cy="384048"/>
+          </a:xfrm>
+          <a:prstGeom prst="rect">
+            <a:avLst/>
+          </a:prstGeom>
+          <a:noFill/>
+        </p:spPr>
+        <p:txBody>
+          <a:bodyPr wrap="square" anchor="t" lIns="0" rIns="0" tIns="0" bIns="0">
+            <a:spAutoFit/>
+          </a:bodyPr>
+          <a:lstStyle/>
+          <a:p>
+            <a:pPr algn="ctr"/>
+            <a:r>
+              <a:rPr sz="1600" b="1">
+                <a:solidFill>
+                  <a:srgbClr val="FFFFFF"/>
+                </a:solidFill>
+                <a:latin typeface="微软雅黑"/>
+                <a:ea typeface="微软雅黑"/>
+                <a:cs typeface="微软雅黑"/>
+              </a:rPr>
+              <a:t>6</a:t>
+            </a:r>
+          </a:p>
+        </p:txBody>
+      </p:sp>
+      <p:sp>
+        <p:nvSpPr>
+          <p:cNvPr id="28" name="TextBox 27"/>
+          <p:cNvSpPr txBox="1"/>
+          <p:nvPr/>
+        </p:nvSpPr>
+        <p:spPr>
+          <a:xfrm>
+            <a:off x="1371600" y="5596128"/>
+            <a:ext cx="9997135" cy="484632"/>
+          </a:xfrm>
+          <a:prstGeom prst="rect">
+            <a:avLst/>
+          </a:prstGeom>
+          <a:noFill/>
+        </p:spPr>
+        <p:txBody>
+          <a:bodyPr wrap="square" anchor="t" lIns="0" rIns="0" tIns="0" bIns="0">
+            <a:spAutoFit/>
+          </a:bodyPr>
+          <a:lstStyle/>
+          <a:p>
+            <a:pPr algn="l">
+              <a:lnSpc>
+                <a:spcPct val="110000"/>
+              </a:lnSpc>
+            </a:pPr>
+            <a:r>
+              <a:rPr sz="1600" b="1">
+                <a:solidFill>
+                  <a:srgbClr val="1C2A33"/>
+                </a:solidFill>
+                <a:latin typeface="微软雅黑"/>
+                <a:ea typeface="微软雅黑"/>
+                <a:cs typeface="微软雅黑"/>
+              </a:rPr>
+              <a:t>Step 6 小结+作业</a:t>
+            </a:r>
+          </a:p>
+        </p:txBody>
+      </p:sp>
+      <p:sp>
+        <p:nvSpPr>
+          <p:cNvPr id="29" name="TextBox 28"/>
           <p:cNvSpPr txBox="1"/>
           <p:nvPr/>
         </p:nvSpPr>
@@ -7185,7 +6589,7 @@
                 <a:ea typeface="微软雅黑"/>
                 <a:cs typeface="微软雅黑"/>
               </a:rPr>
-              <a:t>探究 · 招牌招式</a:t>
+              <a:t>易混易错</a:t>
             </a:r>
           </a:p>
         </p:txBody>
@@ -7236,51 +6640,14 @@
       </p:sp>
       <p:sp>
         <p:nvSpPr>
-          <p:cNvPr id="5" name="TextBox 4"/>
-          <p:cNvSpPr txBox="1"/>
-          <p:nvPr/>
-        </p:nvSpPr>
-        <p:spPr>
-          <a:xfrm>
-            <a:off x="640080" y="1280160"/>
-            <a:ext cx="10515600" cy="640080"/>
-          </a:xfrm>
-          <a:prstGeom prst="rect">
-            <a:avLst/>
-          </a:prstGeom>
-          <a:noFill/>
-        </p:spPr>
-        <p:txBody>
-          <a:bodyPr wrap="square" anchor="t" lIns="0" rIns="0" tIns="0" bIns="0">
-            <a:spAutoFit/>
-          </a:bodyPr>
-          <a:lstStyle/>
-          <a:p>
-            <a:pPr algn="l"/>
-            <a:r>
-              <a:rPr sz="2500" b="1">
-                <a:solidFill>
-                  <a:srgbClr val="1C2A33"/>
-                </a:solidFill>
-                <a:latin typeface="楷体"/>
-                <a:ea typeface="楷体"/>
-                <a:cs typeface="楷体"/>
-              </a:rPr>
-              <a:t>角色扮演法 + 示范模仿法</a:t>
-            </a:r>
-          </a:p>
-        </p:txBody>
-      </p:sp>
-      <p:sp>
-        <p:nvSpPr>
-          <p:cNvPr id="6" name="Rounded Rectangle 5"/>
+          <p:cNvPr id="5" name="Rounded Rectangle 4"/>
           <p:cNvSpPr/>
           <p:nvPr/>
         </p:nvSpPr>
         <p:spPr>
           <a:xfrm>
-            <a:off x="640080" y="2057400"/>
-            <a:ext cx="5227167" cy="2057400"/>
+            <a:off x="640080" y="1417320"/>
+            <a:ext cx="5349240" cy="2057400"/>
           </a:xfrm>
           <a:prstGeom prst="roundRect">
             <a:avLst/>
@@ -7319,14 +6686,58 @@
       </p:sp>
       <p:sp>
         <p:nvSpPr>
+          <p:cNvPr id="6" name="Oval 5"/>
+          <p:cNvSpPr/>
+          <p:nvPr/>
+        </p:nvSpPr>
+        <p:spPr>
+          <a:xfrm>
+            <a:off x="804672" y="1581912"/>
+            <a:ext cx="457200" cy="457200"/>
+          </a:xfrm>
+          <a:prstGeom prst="ellipse">
+            <a:avLst/>
+          </a:prstGeom>
+          <a:solidFill>
+            <a:srgbClr val="B23A2A"/>
+          </a:solidFill>
+          <a:ln>
+            <a:noFill/>
+          </a:ln>
+          <a:effectLst/>
+        </p:spPr>
+        <p:style>
+          <a:lnRef idx="1">
+            <a:schemeClr val="accent1"/>
+          </a:lnRef>
+          <a:fillRef idx="3">
+            <a:schemeClr val="accent1"/>
+          </a:fillRef>
+          <a:effectRef idx="2">
+            <a:schemeClr val="accent1"/>
+          </a:effectRef>
+          <a:fontRef idx="minor">
+            <a:schemeClr val="lt1"/>
+          </a:fontRef>
+        </p:style>
+        <p:txBody>
+          <a:bodyPr rtlCol="0" anchor="ctr"/>
+          <a:lstStyle/>
+          <a:p>
+            <a:pPr algn="ctr"/>
+          </a:p>
+        </p:txBody>
+      </p:sp>
+      <p:sp>
+        <p:nvSpPr>
           <p:cNvPr id="7" name="TextBox 6"/>
           <p:cNvSpPr txBox="1"/>
           <p:nvPr/>
         </p:nvSpPr>
         <p:spPr>
           <a:xfrm>
-            <a:off x="914400" y="2212848"/>
-            <a:ext cx="4678527" cy="457200"/>
+            <a:off x="804672" y="1636776"/>
+            <a:ext cx="457200" cy="384048"/>
           </a:xfrm>
           <a:prstGeom prst="rect">
             <a:avLst/>
@@ -7339,93 +6750,113 @@
           </a:bodyPr>
           <a:lstStyle/>
           <a:p>
-            <a:pPr algn="l"/>
+            <a:pPr algn="ctr"/>
             <a:r>
               <a:rPr sz="1600" b="1">
                 <a:solidFill>
-                  <a:srgbClr val="B23A2A"/>
+                  <a:srgbClr val="FFFFFF"/>
+                </a:solidFill>
+                <a:latin typeface="微软雅黑"/>
+                <a:ea typeface="微软雅黑"/>
+                <a:cs typeface="微软雅黑"/>
+              </a:rPr>
+              <a:t>!</a:t>
+            </a:r>
+          </a:p>
+        </p:txBody>
+      </p:sp>
+      <p:sp>
+        <p:nvSpPr>
+          <p:cNvPr id="8" name="TextBox 7"/>
+          <p:cNvSpPr txBox="1"/>
+          <p:nvPr/>
+        </p:nvSpPr>
+        <p:spPr>
+          <a:xfrm>
+            <a:off x="1371600" y="1527048"/>
+            <a:ext cx="4434840" cy="457200"/>
+          </a:xfrm>
+          <a:prstGeom prst="rect">
+            <a:avLst/>
+          </a:prstGeom>
+          <a:noFill/>
+        </p:spPr>
+        <p:txBody>
+          <a:bodyPr wrap="square" anchor="t" lIns="0" rIns="0" tIns="0" bIns="0">
+            <a:spAutoFit/>
+          </a:bodyPr>
+          <a:lstStyle/>
+          <a:p>
+            <a:pPr algn="l">
+              <a:lnSpc>
+                <a:spcPct val="110000"/>
+              </a:lnSpc>
+            </a:pPr>
+            <a:r>
+              <a:rPr sz="1600" b="1">
+                <a:solidFill>
+                  <a:srgbClr val="1C2A33"/>
+                </a:solidFill>
+                <a:latin typeface="微软雅黑"/>
+                <a:ea typeface="微软雅黑"/>
+                <a:cs typeface="微软雅黑"/>
+              </a:rPr>
+              <a:t/>
+            </a:r>
+          </a:p>
+        </p:txBody>
+      </p:sp>
+      <p:sp>
+        <p:nvSpPr>
+          <p:cNvPr id="9" name="TextBox 8"/>
+          <p:cNvSpPr txBox="1"/>
+          <p:nvPr/>
+        </p:nvSpPr>
+        <p:spPr>
+          <a:xfrm>
+            <a:off x="1371600" y="1965960"/>
+            <a:ext cx="4434840" cy="1417320"/>
+          </a:xfrm>
+          <a:prstGeom prst="rect">
+            <a:avLst/>
+          </a:prstGeom>
+          <a:noFill/>
+        </p:spPr>
+        <p:txBody>
+          <a:bodyPr wrap="square" anchor="t" lIns="0" rIns="0" tIns="0" bIns="0">
+            <a:spAutoFit/>
+          </a:bodyPr>
+          <a:lstStyle/>
+          <a:p>
+            <a:pPr algn="l">
+              <a:lnSpc>
+                <a:spcPct val="128000"/>
+              </a:lnSpc>
+            </a:pPr>
+            <a:r>
+              <a:rPr sz="1200" b="0">
+                <a:solidFill>
+                  <a:srgbClr val="1C2A33"/>
                 </a:solidFill>
                 <a:latin typeface="楷体"/>
                 <a:ea typeface="楷体"/>
                 <a:cs typeface="楷体"/>
               </a:rPr>
-              <a:t>① 角色扮演法（4人小组）</a:t>
-            </a:r>
-          </a:p>
-        </p:txBody>
-      </p:sp>
-      <p:sp>
-        <p:nvSpPr>
-          <p:cNvPr id="8" name="TextBox 7"/>
-          <p:cNvSpPr txBox="1"/>
-          <p:nvPr/>
-        </p:nvSpPr>
-        <p:spPr>
-          <a:xfrm>
-            <a:off x="914400" y="2697480"/>
-            <a:ext cx="4678527" cy="1371600"/>
-          </a:xfrm>
-          <a:prstGeom prst="rect">
-            <a:avLst/>
-          </a:prstGeom>
-          <a:noFill/>
-        </p:spPr>
-        <p:txBody>
-          <a:bodyPr wrap="square" anchor="t" lIns="0" rIns="0" tIns="0" bIns="0">
-            <a:spAutoFit/>
-          </a:bodyPr>
-          <a:lstStyle/>
-          <a:p>
-            <a:pPr algn="l">
-              <a:lnSpc>
-                <a:spcPct val="145000"/>
-              </a:lnSpc>
-              <a:spcAft>
-                <a:spcPts val="600"/>
-              </a:spcAft>
-            </a:pPr>
-            <a:r>
-              <a:rPr sz="1350" b="0">
-                <a:solidFill>
-                  <a:srgbClr val="1C2A33"/>
-                </a:solidFill>
-                <a:latin typeface="楷体"/>
-                <a:ea typeface="楷体"/>
-                <a:cs typeface="楷体"/>
-              </a:rPr>
-              <a:t>记者 / 受访者（扮演劳动者同事）/ 记录员 / 观察员，用设计好的问题做 3 分钟模拟访谈。</a:t>
-            </a:r>
-          </a:p>
-          <a:p>
-            <a:pPr algn="l">
-              <a:lnSpc>
-                <a:spcPct val="145000"/>
-              </a:lnSpc>
-            </a:pPr>
-            <a:r>
-              <a:rPr sz="1350" b="0">
-                <a:solidFill>
-                  <a:srgbClr val="6B6258"/>
-                </a:solidFill>
-                <a:latin typeface="楷体"/>
-                <a:ea typeface="楷体"/>
-                <a:cs typeface="楷体"/>
-              </a:rPr>
-              <a:t>受访者须"基于课文回答"，不确定的就说"这点我不确定"——守住真实性。</a:t>
-            </a:r>
-          </a:p>
-        </p:txBody>
-      </p:sp>
-      <p:sp>
-        <p:nvSpPr>
-          <p:cNvPr id="9" name="Rounded Rectangle 8"/>
+              <a:t>① 访谈问题的层次设计。原因：学生习惯只问「是什么」，不会追问「为什么」和「意味着什么」，需给出问题层次框架。</a:t>
+            </a:r>
+          </a:p>
+        </p:txBody>
+      </p:sp>
+      <p:sp>
+        <p:nvSpPr>
+          <p:cNvPr id="10" name="Rounded Rectangle 9"/>
           <p:cNvSpPr/>
           <p:nvPr/>
         </p:nvSpPr>
         <p:spPr>
           <a:xfrm>
-            <a:off x="640080" y="4297680"/>
-            <a:ext cx="5227167" cy="2057400"/>
+            <a:off x="6263640" y="1417320"/>
+            <a:ext cx="5349240" cy="2057400"/>
           </a:xfrm>
           <a:prstGeom prst="roundRect">
             <a:avLst/>
@@ -7435,7 +6866,7 @@
           </a:solidFill>
           <a:ln w="22860">
             <a:solidFill>
-              <a:srgbClr val="2E7D6B"/>
+              <a:srgbClr val="B23A2A"/>
             </a:solidFill>
           </a:ln>
           <a:effectLst/>
@@ -7464,182 +6895,24 @@
       </p:sp>
       <p:sp>
         <p:nvSpPr>
-          <p:cNvPr id="10" name="TextBox 9"/>
-          <p:cNvSpPr txBox="1"/>
-          <p:nvPr/>
-        </p:nvSpPr>
-        <p:spPr>
-          <a:xfrm>
-            <a:off x="914400" y="4453128"/>
-            <a:ext cx="4678527" cy="457200"/>
-          </a:xfrm>
-          <a:prstGeom prst="rect">
-            <a:avLst/>
-          </a:prstGeom>
-          <a:noFill/>
-        </p:spPr>
-        <p:txBody>
-          <a:bodyPr wrap="square" anchor="t" lIns="0" rIns="0" tIns="0" bIns="0">
-            <a:spAutoFit/>
-          </a:bodyPr>
-          <a:lstStyle/>
-          <a:p>
-            <a:pPr algn="l"/>
-            <a:r>
-              <a:rPr sz="1600" b="1">
-                <a:solidFill>
-                  <a:srgbClr val="2E7D6B"/>
-                </a:solidFill>
-                <a:latin typeface="楷体"/>
-                <a:ea typeface="楷体"/>
-                <a:cs typeface="楷体"/>
-              </a:rPr>
-              <a:t>② 示范模仿法（播报语态）</a:t>
-            </a:r>
-          </a:p>
-        </p:txBody>
-      </p:sp>
-      <p:sp>
-        <p:nvSpPr>
-          <p:cNvPr id="11" name="TextBox 10"/>
-          <p:cNvSpPr txBox="1"/>
-          <p:nvPr/>
-        </p:nvSpPr>
-        <p:spPr>
-          <a:xfrm>
-            <a:off x="914400" y="4937760"/>
-            <a:ext cx="4678527" cy="1371600"/>
-          </a:xfrm>
-          <a:prstGeom prst="rect">
-            <a:avLst/>
-          </a:prstGeom>
-          <a:noFill/>
-        </p:spPr>
-        <p:txBody>
-          <a:bodyPr wrap="square" anchor="t" lIns="0" rIns="0" tIns="0" bIns="0">
-            <a:spAutoFit/>
-          </a:bodyPr>
-          <a:lstStyle/>
-          <a:p>
-            <a:pPr algn="l">
-              <a:lnSpc>
-                <a:spcPct val="145000"/>
-              </a:lnSpc>
-              <a:spcAft>
-                <a:spcPts val="600"/>
-              </a:spcAft>
-            </a:pPr>
-            <a:r>
-              <a:rPr sz="1350" b="0">
-                <a:solidFill>
-                  <a:srgbClr val="1C2A33"/>
-                </a:solidFill>
-                <a:latin typeface="楷体"/>
-                <a:ea typeface="楷体"/>
-                <a:cs typeface="楷体"/>
-              </a:rPr>
-              <a:t>先听央视新闻片段，再跟读示范稿："据本台消息，被誉为杂交水稻之父的袁隆平院士……"</a:t>
-            </a:r>
-          </a:p>
-          <a:p>
-            <a:pPr algn="l">
-              <a:lnSpc>
-                <a:spcPct val="145000"/>
-              </a:lnSpc>
-            </a:pPr>
-            <a:r>
-              <a:rPr sz="1350" b="0">
-                <a:solidFill>
-                  <a:srgbClr val="6B6258"/>
-                </a:solidFill>
-                <a:latin typeface="楷体"/>
-                <a:ea typeface="楷体"/>
-                <a:cs typeface="楷体"/>
-              </a:rPr>
-              <a:t>同一内容用三种语态说——讲故事 / 朗诵 / 新闻，自己对比差异最直观。</a:t>
-            </a:r>
-          </a:p>
-        </p:txBody>
-      </p:sp>
-      <p:pic>
-        <p:nvPicPr>
-          <p:cNvPr id="12" name="Picture 11" descr="vintagemic.jpg"/>
-          <p:cNvPicPr>
-            <a:picLocks noChangeAspect="1"/>
-          </p:cNvPicPr>
-          <p:nvPr/>
-        </p:nvPicPr>
-        <p:blipFill>
-          <a:blip r:embed="rId2"/>
-          <a:srcRect t="21742" b="21742"/>
-          <a:stretch>
-            <a:fillRect/>
-          </a:stretch>
-        </p:blipFill>
-        <p:spPr>
-          <a:xfrm>
-            <a:off x="6324447" y="2057400"/>
-            <a:ext cx="5227167" cy="1920240"/>
-          </a:xfrm>
-          <a:prstGeom prst="rect">
-            <a:avLst/>
-          </a:prstGeom>
-        </p:spPr>
-      </p:pic>
-      <p:sp>
-        <p:nvSpPr>
-          <p:cNvPr id="13" name="TextBox 12"/>
-          <p:cNvSpPr txBox="1"/>
-          <p:nvPr/>
-        </p:nvSpPr>
-        <p:spPr>
-          <a:xfrm>
-            <a:off x="6324447" y="4069080"/>
-            <a:ext cx="5227167" cy="365760"/>
-          </a:xfrm>
-          <a:prstGeom prst="rect">
-            <a:avLst/>
-          </a:prstGeom>
-          <a:noFill/>
-        </p:spPr>
-        <p:txBody>
-          <a:bodyPr wrap="square" anchor="t" lIns="0" rIns="0" tIns="0" bIns="0">
-            <a:spAutoFit/>
-          </a:bodyPr>
-          <a:lstStyle/>
-          <a:p>
-            <a:pPr algn="ctr"/>
-            <a:r>
-              <a:rPr sz="1100" b="0">
-                <a:solidFill>
-                  <a:srgbClr val="6B6258"/>
-                </a:solidFill>
-                <a:latin typeface="微软雅黑"/>
-                <a:ea typeface="微软雅黑"/>
-                <a:cs typeface="微软雅黑"/>
-              </a:rPr>
-              <a:t>广播话筒 · 播报传统的实物见证（PD）</a:t>
-            </a:r>
-          </a:p>
-        </p:txBody>
-      </p:sp>
-      <p:sp>
-        <p:nvSpPr>
-          <p:cNvPr id="14" name="Rounded Rectangle 13"/>
+          <p:cNvPr id="11" name="Oval 10"/>
           <p:cNvSpPr/>
           <p:nvPr/>
         </p:nvSpPr>
         <p:spPr>
           <a:xfrm>
-            <a:off x="6324447" y="4434840"/>
-            <a:ext cx="5227167" cy="1920240"/>
-          </a:xfrm>
-          <a:prstGeom prst="roundRect">
+            <a:off x="6428232" y="1581912"/>
+            <a:ext cx="457200" cy="457200"/>
+          </a:xfrm>
+          <a:prstGeom prst="ellipse">
             <a:avLst/>
           </a:prstGeom>
           <a:solidFill>
-            <a:srgbClr val="1C2A33"/>
+            <a:srgbClr val="B23A2A"/>
           </a:solidFill>
+          <a:ln>
+            <a:noFill/>
+          </a:ln>
           <a:effectLst/>
         </p:spPr>
         <p:style>
@@ -7666,14 +6939,14 @@
       </p:sp>
       <p:sp>
         <p:nvSpPr>
-          <p:cNvPr id="15" name="TextBox 14"/>
+          <p:cNvPr id="12" name="TextBox 11"/>
           <p:cNvSpPr txBox="1"/>
           <p:nvPr/>
         </p:nvSpPr>
         <p:spPr>
           <a:xfrm>
-            <a:off x="6598767" y="4572000"/>
-            <a:ext cx="4678527" cy="1737360"/>
+            <a:off x="6428232" y="1636776"/>
+            <a:ext cx="457200" cy="384048"/>
           </a:xfrm>
           <a:prstGeom prst="rect">
             <a:avLst/>
@@ -7686,71 +6959,315 @@
           </a:bodyPr>
           <a:lstStyle/>
           <a:p>
+            <a:pPr algn="ctr"/>
+            <a:r>
+              <a:rPr sz="1600" b="1">
+                <a:solidFill>
+                  <a:srgbClr val="FFFFFF"/>
+                </a:solidFill>
+                <a:latin typeface="微软雅黑"/>
+                <a:ea typeface="微软雅黑"/>
+                <a:cs typeface="微软雅黑"/>
+              </a:rPr>
+              <a:t>!</a:t>
+            </a:r>
+          </a:p>
+        </p:txBody>
+      </p:sp>
+      <p:sp>
+        <p:nvSpPr>
+          <p:cNvPr id="13" name="TextBox 12"/>
+          <p:cNvSpPr txBox="1"/>
+          <p:nvPr/>
+        </p:nvSpPr>
+        <p:spPr>
+          <a:xfrm>
+            <a:off x="6995160" y="1527048"/>
+            <a:ext cx="4434840" cy="457200"/>
+          </a:xfrm>
+          <a:prstGeom prst="rect">
+            <a:avLst/>
+          </a:prstGeom>
+          <a:noFill/>
+        </p:spPr>
+        <p:txBody>
+          <a:bodyPr wrap="square" anchor="t" lIns="0" rIns="0" tIns="0" bIns="0">
+            <a:spAutoFit/>
+          </a:bodyPr>
+          <a:lstStyle/>
+          <a:p>
             <a:pPr algn="l">
               <a:lnSpc>
-                <a:spcPct val="140000"/>
+                <a:spcPct val="110000"/>
               </a:lnSpc>
-              <a:spcAft>
-                <a:spcPts val="600"/>
-              </a:spcAft>
             </a:pPr>
             <a:r>
-              <a:rPr sz="1350" b="1">
-                <a:solidFill>
-                  <a:srgbClr val="C8A86B"/>
+              <a:rPr sz="1600" b="1">
+                <a:solidFill>
+                  <a:srgbClr val="1C2A33"/>
+                </a:solidFill>
+                <a:latin typeface="微软雅黑"/>
+                <a:ea typeface="微软雅黑"/>
+                <a:cs typeface="微软雅黑"/>
+              </a:rPr>
+              <a:t/>
+            </a:r>
+          </a:p>
+        </p:txBody>
+      </p:sp>
+      <p:sp>
+        <p:nvSpPr>
+          <p:cNvPr id="14" name="TextBox 13"/>
+          <p:cNvSpPr txBox="1"/>
+          <p:nvPr/>
+        </p:nvSpPr>
+        <p:spPr>
+          <a:xfrm>
+            <a:off x="6995160" y="1965960"/>
+            <a:ext cx="4434840" cy="1417320"/>
+          </a:xfrm>
+          <a:prstGeom prst="rect">
+            <a:avLst/>
+          </a:prstGeom>
+          <a:noFill/>
+        </p:spPr>
+        <p:txBody>
+          <a:bodyPr wrap="square" anchor="t" lIns="0" rIns="0" tIns="0" bIns="0">
+            <a:spAutoFit/>
+          </a:bodyPr>
+          <a:lstStyle/>
+          <a:p>
+            <a:pPr algn="l">
+              <a:lnSpc>
+                <a:spcPct val="128000"/>
+              </a:lnSpc>
+            </a:pPr>
+            <a:r>
+              <a:rPr sz="1200" b="0">
+                <a:solidFill>
+                  <a:srgbClr val="1C2A33"/>
                 </a:solidFill>
                 <a:latin typeface="楷体"/>
                 <a:ea typeface="楷体"/>
                 <a:cs typeface="楷体"/>
               </a:rPr>
-              <a:t>张颂（播音学奠基人）定义"播报"语言样态：</a:t>
-            </a:r>
-          </a:p>
+              <a:t>② 新闻播报的语态。原因：学生要么用日常口语（太随意），要么用朗诵腔（太夸张），找不到「新闻播报」的中间语态，需示范。</a:t>
+            </a:r>
+          </a:p>
+        </p:txBody>
+      </p:sp>
+      <p:sp>
+        <p:nvSpPr>
+          <p:cNvPr id="15" name="Rounded Rectangle 14"/>
+          <p:cNvSpPr/>
+          <p:nvPr/>
+        </p:nvSpPr>
+        <p:spPr>
+          <a:xfrm>
+            <a:off x="640080" y="3703320"/>
+            <a:ext cx="5349240" cy="2057400"/>
+          </a:xfrm>
+          <a:prstGeom prst="roundRect">
+            <a:avLst/>
+          </a:prstGeom>
+          <a:solidFill>
+            <a:srgbClr val="FFFFFF"/>
+          </a:solidFill>
+          <a:ln w="22860">
+            <a:solidFill>
+              <a:srgbClr val="B23A2A"/>
+            </a:solidFill>
+          </a:ln>
+          <a:effectLst/>
+        </p:spPr>
+        <p:style>
+          <a:lnRef idx="1">
+            <a:schemeClr val="accent1"/>
+          </a:lnRef>
+          <a:fillRef idx="3">
+            <a:schemeClr val="accent1"/>
+          </a:fillRef>
+          <a:effectRef idx="2">
+            <a:schemeClr val="accent1"/>
+          </a:effectRef>
+          <a:fontRef idx="minor">
+            <a:schemeClr val="lt1"/>
+          </a:fontRef>
+        </p:style>
+        <p:txBody>
+          <a:bodyPr rtlCol="0" anchor="ctr"/>
+          <a:lstStyle/>
+          <a:p>
+            <a:pPr algn="ctr"/>
+          </a:p>
+        </p:txBody>
+      </p:sp>
+      <p:sp>
+        <p:nvSpPr>
+          <p:cNvPr id="16" name="Oval 15"/>
+          <p:cNvSpPr/>
+          <p:nvPr/>
+        </p:nvSpPr>
+        <p:spPr>
+          <a:xfrm>
+            <a:off x="804672" y="3867912"/>
+            <a:ext cx="457200" cy="457200"/>
+          </a:xfrm>
+          <a:prstGeom prst="ellipse">
+            <a:avLst/>
+          </a:prstGeom>
+          <a:solidFill>
+            <a:srgbClr val="B23A2A"/>
+          </a:solidFill>
+          <a:ln>
+            <a:noFill/>
+          </a:ln>
+          <a:effectLst/>
+        </p:spPr>
+        <p:style>
+          <a:lnRef idx="1">
+            <a:schemeClr val="accent1"/>
+          </a:lnRef>
+          <a:fillRef idx="3">
+            <a:schemeClr val="accent1"/>
+          </a:fillRef>
+          <a:effectRef idx="2">
+            <a:schemeClr val="accent1"/>
+          </a:effectRef>
+          <a:fontRef idx="minor">
+            <a:schemeClr val="lt1"/>
+          </a:fontRef>
+        </p:style>
+        <p:txBody>
+          <a:bodyPr rtlCol="0" anchor="ctr"/>
+          <a:lstStyle/>
+          <a:p>
+            <a:pPr algn="ctr"/>
+          </a:p>
+        </p:txBody>
+      </p:sp>
+      <p:sp>
+        <p:nvSpPr>
+          <p:cNvPr id="17" name="TextBox 16"/>
+          <p:cNvSpPr txBox="1"/>
+          <p:nvPr/>
+        </p:nvSpPr>
+        <p:spPr>
+          <a:xfrm>
+            <a:off x="804672" y="3922776"/>
+            <a:ext cx="457200" cy="384048"/>
+          </a:xfrm>
+          <a:prstGeom prst="rect">
+            <a:avLst/>
+          </a:prstGeom>
+          <a:noFill/>
+        </p:spPr>
+        <p:txBody>
+          <a:bodyPr wrap="square" anchor="t" lIns="0" rIns="0" tIns="0" bIns="0">
+            <a:spAutoFit/>
+          </a:bodyPr>
+          <a:lstStyle/>
+          <a:p>
+            <a:pPr algn="ctr"/>
+            <a:r>
+              <a:rPr sz="1600" b="1">
+                <a:solidFill>
+                  <a:srgbClr val="FFFFFF"/>
+                </a:solidFill>
+                <a:latin typeface="微软雅黑"/>
+                <a:ea typeface="微软雅黑"/>
+                <a:cs typeface="微软雅黑"/>
+              </a:rPr>
+              <a:t>!</a:t>
+            </a:r>
+          </a:p>
+        </p:txBody>
+      </p:sp>
+      <p:sp>
+        <p:nvSpPr>
+          <p:cNvPr id="18" name="TextBox 17"/>
+          <p:cNvSpPr txBox="1"/>
+          <p:nvPr/>
+        </p:nvSpPr>
+        <p:spPr>
+          <a:xfrm>
+            <a:off x="1371600" y="3813048"/>
+            <a:ext cx="4434840" cy="457200"/>
+          </a:xfrm>
+          <a:prstGeom prst="rect">
+            <a:avLst/>
+          </a:prstGeom>
+          <a:noFill/>
+        </p:spPr>
+        <p:txBody>
+          <a:bodyPr wrap="square" anchor="t" lIns="0" rIns="0" tIns="0" bIns="0">
+            <a:spAutoFit/>
+          </a:bodyPr>
+          <a:lstStyle/>
           <a:p>
             <a:pPr algn="l">
               <a:lnSpc>
-                <a:spcPct val="150000"/>
+                <a:spcPct val="110000"/>
               </a:lnSpc>
-              <a:spcAft>
-                <a:spcPts val="600"/>
-              </a:spcAft>
             </a:pPr>
             <a:r>
+              <a:rPr sz="1600" b="1">
+                <a:solidFill>
+                  <a:srgbClr val="1C2A33"/>
+                </a:solidFill>
+                <a:latin typeface="微软雅黑"/>
+                <a:ea typeface="微软雅黑"/>
+                <a:cs typeface="微软雅黑"/>
+              </a:rPr>
+              <a:t/>
+            </a:r>
+          </a:p>
+        </p:txBody>
+      </p:sp>
+      <p:sp>
+        <p:nvSpPr>
+          <p:cNvPr id="19" name="TextBox 18"/>
+          <p:cNvSpPr txBox="1"/>
+          <p:nvPr/>
+        </p:nvSpPr>
+        <p:spPr>
+          <a:xfrm>
+            <a:off x="1371600" y="4251960"/>
+            <a:ext cx="4434840" cy="1417320"/>
+          </a:xfrm>
+          <a:prstGeom prst="rect">
+            <a:avLst/>
+          </a:prstGeom>
+          <a:noFill/>
+        </p:spPr>
+        <p:txBody>
+          <a:bodyPr wrap="square" anchor="t" lIns="0" rIns="0" tIns="0" bIns="0">
+            <a:spAutoFit/>
+          </a:bodyPr>
+          <a:lstStyle/>
+          <a:p>
+            <a:pPr algn="l">
+              <a:lnSpc>
+                <a:spcPct val="128000"/>
+              </a:lnSpc>
+            </a:pPr>
+            <a:r>
               <a:rPr sz="1400" b="0">
                 <a:solidFill>
-                  <a:srgbClr val="FFFFFF"/>
+                  <a:srgbClr val="1C2A33"/>
                 </a:solidFill>
                 <a:latin typeface="楷体"/>
                 <a:ea typeface="楷体"/>
                 <a:cs typeface="楷体"/>
               </a:rPr>
-              <a:t>感而不入·讲究分寸 → 客观
-节奏明快·语流晓畅 → 有节奏</a:t>
-            </a:r>
-          </a:p>
-          <a:p>
-            <a:pPr algn="l">
-              <a:lnSpc>
-                <a:spcPct val="140000"/>
-              </a:lnSpc>
-            </a:pPr>
-            <a:r>
-              <a:rPr sz="1200" b="0">
-                <a:solidFill>
-                  <a:srgbClr val="E7DFD2"/>
-                </a:solidFill>
-                <a:latin typeface="楷体"/>
-                <a:ea typeface="楷体"/>
-                <a:cs typeface="楷体"/>
-              </a:rPr>
-              <a:t>（字正腔圆·语尾不坠 → 简洁清晰）</a:t>
-            </a:r>
-          </a:p>
-        </p:txBody>
-      </p:sp>
-      <p:sp>
-        <p:nvSpPr>
-          <p:cNvPr id="16" name="TextBox 15"/>
+              <a:t>③ 紧张情绪的克服。原因：B班部分学生不敢当众开口，需用小组模拟降低压力。</a:t>
+            </a:r>
+          </a:p>
+        </p:txBody>
+      </p:sp>
+      <p:sp>
+        <p:nvSpPr>
+          <p:cNvPr id="20" name="TextBox 19"/>
           <p:cNvSpPr txBox="1"/>
           <p:nvPr/>
         </p:nvSpPr>
@@ -7877,13 +7394,13 @@
             <a:r>
               <a:rPr sz="1300" b="1">
                 <a:solidFill>
-                  <a:srgbClr val="B23A2A"/>
+                  <a:srgbClr val="C8A86B"/>
                 </a:solidFill>
                 <a:latin typeface="微软雅黑"/>
                 <a:ea typeface="微软雅黑"/>
                 <a:cs typeface="微软雅黑"/>
               </a:rPr>
-              <a:t>板书 · 访谈与播报</a:t>
+              <a:t>要点板书</a:t>
             </a:r>
           </a:p>
         </p:txBody>
@@ -7903,7 +7420,7 @@
             <a:avLst/>
           </a:prstGeom>
           <a:solidFill>
-            <a:srgbClr val="B23A2A"/>
+            <a:srgbClr val="C8A86B"/>
           </a:solidFill>
           <a:ln>
             <a:noFill/>
@@ -7940,15 +7457,20 @@
         </p:nvSpPr>
         <p:spPr>
           <a:xfrm>
-            <a:off x="640080" y="1737360"/>
-            <a:ext cx="10911535" cy="502920"/>
+            <a:off x="640080" y="1417320"/>
+            <a:ext cx="10911535" cy="5394960"/>
           </a:xfrm>
           <a:prstGeom prst="roundRect">
             <a:avLst/>
           </a:prstGeom>
           <a:solidFill>
-            <a:srgbClr val="1C2A33"/>
+            <a:srgbClr val="FFFFFF"/>
           </a:solidFill>
+          <a:ln w="25400">
+            <a:solidFill>
+              <a:srgbClr val="C8A86B"/>
+            </a:solidFill>
+          </a:ln>
           <a:effectLst/>
         </p:spPr>
         <p:style>
@@ -7981,8 +7503,8 @@
         </p:nvSpPr>
         <p:spPr>
           <a:xfrm>
-            <a:off x="914400" y="1810512"/>
-            <a:ext cx="2743200" cy="365760"/>
+            <a:off x="914400" y="1554480"/>
+            <a:ext cx="10362895" cy="5120640"/>
           </a:xfrm>
           <a:prstGeom prst="rect">
             <a:avLst/>
@@ -7995,17 +7517,44 @@
           </a:bodyPr>
           <a:lstStyle/>
           <a:p>
-            <a:pPr algn="l"/>
-            <a:r>
-              <a:rPr sz="1500" b="1">
-                <a:solidFill>
-                  <a:srgbClr val="FFFFFF"/>
+            <a:pPr algn="l">
+              <a:lnSpc>
+                <a:spcPct val="110000"/>
+              </a:lnSpc>
+              <a:spcAft>
+                <a:spcPts val="100"/>
+              </a:spcAft>
+            </a:pPr>
+            <a:r>
+              <a:rPr sz="1300" b="0">
+                <a:solidFill>
+                  <a:srgbClr val="1C2A33"/>
                 </a:solidFill>
                 <a:latin typeface="微软雅黑"/>
                 <a:ea typeface="微软雅黑"/>
                 <a:cs typeface="微软雅黑"/>
               </a:rPr>
-              <a:t>维度</a:t>
+              <a:t>┌── 口语交流:访谈与播报 ──┐
+│ 目的·条理·得体 │
+│ │
+│ 【访谈问题三层次】 │
+│ 价值层:为什么重要? │
+│ 感受层:怎么想的? │
+│ 事实层:做了什么? │
+│ (金字塔:由浅入深) │
+│ │
+│ 【播报语态】 │
+│ 客观:不带个人评价 │
+│ 简洁:一句一事 │
+│ 节奏:句间微顿 │
+│ ≠朗诵 ≠日常说话 │
+│ │
+│ 【评价量表】 │
+│ 内容|语态|节奏|表达 │
+│ │
+│ 访谈:设计→模拟→整理 │
+│ 播报:选材→组稿→播报 │
+└──────────────────────────┘</a:t>
             </a:r>
           </a:p>
         </p:txBody>
@@ -8013,763 +7562,6 @@
       <p:sp>
         <p:nvSpPr>
           <p:cNvPr id="7" name="TextBox 6"/>
-          <p:cNvSpPr txBox="1"/>
-          <p:nvPr/>
-        </p:nvSpPr>
-        <p:spPr>
-          <a:xfrm>
-            <a:off x="3931920" y="1810512"/>
-            <a:ext cx="8046720" cy="365760"/>
-          </a:xfrm>
-          <a:prstGeom prst="rect">
-            <a:avLst/>
-          </a:prstGeom>
-          <a:noFill/>
-        </p:spPr>
-        <p:txBody>
-          <a:bodyPr wrap="square" anchor="t" lIns="0" rIns="0" tIns="0" bIns="0">
-            <a:spAutoFit/>
-          </a:bodyPr>
-          <a:lstStyle/>
-          <a:p>
-            <a:pPr algn="l"/>
-            <a:r>
-              <a:rPr sz="1500" b="1">
-                <a:solidFill>
-                  <a:srgbClr val="C8A86B"/>
-                </a:solidFill>
-                <a:latin typeface="微软雅黑"/>
-                <a:ea typeface="微软雅黑"/>
-                <a:cs typeface="微软雅黑"/>
-              </a:rPr>
-              <a:t>内容</a:t>
-            </a:r>
-          </a:p>
-        </p:txBody>
-      </p:sp>
-      <p:sp>
-        <p:nvSpPr>
-          <p:cNvPr id="8" name="Rounded Rectangle 7"/>
-          <p:cNvSpPr/>
-          <p:nvPr/>
-        </p:nvSpPr>
-        <p:spPr>
-          <a:xfrm>
-            <a:off x="640080" y="2331720"/>
-            <a:ext cx="10911535" cy="530352"/>
-          </a:xfrm>
-          <a:prstGeom prst="roundRect">
-            <a:avLst/>
-          </a:prstGeom>
-          <a:solidFill>
-            <a:srgbClr val="FFFFFF"/>
-          </a:solidFill>
-          <a:ln w="10160">
-            <a:solidFill>
-              <a:srgbClr val="6B6258"/>
-            </a:solidFill>
-          </a:ln>
-          <a:effectLst/>
-        </p:spPr>
-        <p:style>
-          <a:lnRef idx="1">
-            <a:schemeClr val="accent1"/>
-          </a:lnRef>
-          <a:fillRef idx="3">
-            <a:schemeClr val="accent1"/>
-          </a:fillRef>
-          <a:effectRef idx="2">
-            <a:schemeClr val="accent1"/>
-          </a:effectRef>
-          <a:fontRef idx="minor">
-            <a:schemeClr val="lt1"/>
-          </a:fontRef>
-        </p:style>
-        <p:txBody>
-          <a:bodyPr rtlCol="0" anchor="ctr"/>
-          <a:lstStyle/>
-          <a:p>
-            <a:pPr algn="ctr"/>
-          </a:p>
-        </p:txBody>
-      </p:sp>
-      <p:sp>
-        <p:nvSpPr>
-          <p:cNvPr id="9" name="TextBox 8"/>
-          <p:cNvSpPr txBox="1"/>
-          <p:nvPr/>
-        </p:nvSpPr>
-        <p:spPr>
-          <a:xfrm>
-            <a:off x="914400" y="2423160"/>
-            <a:ext cx="2743200" cy="365760"/>
-          </a:xfrm>
-          <a:prstGeom prst="rect">
-            <a:avLst/>
-          </a:prstGeom>
-          <a:noFill/>
-        </p:spPr>
-        <p:txBody>
-          <a:bodyPr wrap="square" anchor="t" lIns="0" rIns="0" tIns="0" bIns="0">
-            <a:spAutoFit/>
-          </a:bodyPr>
-          <a:lstStyle/>
-          <a:p>
-            <a:pPr algn="l"/>
-            <a:r>
-              <a:rPr sz="1400" b="1">
-                <a:solidFill>
-                  <a:srgbClr val="B23A2A"/>
-                </a:solidFill>
-                <a:latin typeface="微软雅黑"/>
-                <a:ea typeface="微软雅黑"/>
-                <a:cs typeface="微软雅黑"/>
-              </a:rPr>
-              <a:t>口语三原则</a:t>
-            </a:r>
-          </a:p>
-        </p:txBody>
-      </p:sp>
-      <p:sp>
-        <p:nvSpPr>
-          <p:cNvPr id="10" name="TextBox 9"/>
-          <p:cNvSpPr txBox="1"/>
-          <p:nvPr/>
-        </p:nvSpPr>
-        <p:spPr>
-          <a:xfrm>
-            <a:off x="3931920" y="2423160"/>
-            <a:ext cx="8046720" cy="365760"/>
-          </a:xfrm>
-          <a:prstGeom prst="rect">
-            <a:avLst/>
-          </a:prstGeom>
-          <a:noFill/>
-        </p:spPr>
-        <p:txBody>
-          <a:bodyPr wrap="square" anchor="t" lIns="0" rIns="0" tIns="0" bIns="0">
-            <a:spAutoFit/>
-          </a:bodyPr>
-          <a:lstStyle/>
-          <a:p>
-            <a:pPr algn="l"/>
-            <a:r>
-              <a:rPr sz="1350" b="0">
-                <a:solidFill>
-                  <a:srgbClr val="1C2A33"/>
-                </a:solidFill>
-                <a:latin typeface="楷体"/>
-                <a:ea typeface="楷体"/>
-                <a:cs typeface="楷体"/>
-              </a:rPr>
-              <a:t>目的性(为何说) · 条理性(说清楚) · 得体性(对谁说)</a:t>
-            </a:r>
-          </a:p>
-        </p:txBody>
-      </p:sp>
-      <p:sp>
-        <p:nvSpPr>
-          <p:cNvPr id="11" name="Rounded Rectangle 10"/>
-          <p:cNvSpPr/>
-          <p:nvPr/>
-        </p:nvSpPr>
-        <p:spPr>
-          <a:xfrm>
-            <a:off x="640080" y="2916936"/>
-            <a:ext cx="10911535" cy="530352"/>
-          </a:xfrm>
-          <a:prstGeom prst="roundRect">
-            <a:avLst/>
-          </a:prstGeom>
-          <a:solidFill>
-            <a:srgbClr val="E7DFD2"/>
-          </a:solidFill>
-          <a:ln w="10160">
-            <a:solidFill>
-              <a:srgbClr val="6B6258"/>
-            </a:solidFill>
-          </a:ln>
-          <a:effectLst/>
-        </p:spPr>
-        <p:style>
-          <a:lnRef idx="1">
-            <a:schemeClr val="accent1"/>
-          </a:lnRef>
-          <a:fillRef idx="3">
-            <a:schemeClr val="accent1"/>
-          </a:fillRef>
-          <a:effectRef idx="2">
-            <a:schemeClr val="accent1"/>
-          </a:effectRef>
-          <a:fontRef idx="minor">
-            <a:schemeClr val="lt1"/>
-          </a:fontRef>
-        </p:style>
-        <p:txBody>
-          <a:bodyPr rtlCol="0" anchor="ctr"/>
-          <a:lstStyle/>
-          <a:p>
-            <a:pPr algn="ctr"/>
-          </a:p>
-        </p:txBody>
-      </p:sp>
-      <p:sp>
-        <p:nvSpPr>
-          <p:cNvPr id="12" name="TextBox 11"/>
-          <p:cNvSpPr txBox="1"/>
-          <p:nvPr/>
-        </p:nvSpPr>
-        <p:spPr>
-          <a:xfrm>
-            <a:off x="914400" y="3008376"/>
-            <a:ext cx="2743200" cy="365760"/>
-          </a:xfrm>
-          <a:prstGeom prst="rect">
-            <a:avLst/>
-          </a:prstGeom>
-          <a:noFill/>
-        </p:spPr>
-        <p:txBody>
-          <a:bodyPr wrap="square" anchor="t" lIns="0" rIns="0" tIns="0" bIns="0">
-            <a:spAutoFit/>
-          </a:bodyPr>
-          <a:lstStyle/>
-          <a:p>
-            <a:pPr algn="l"/>
-            <a:r>
-              <a:rPr sz="1400" b="1">
-                <a:solidFill>
-                  <a:srgbClr val="2E7D6B"/>
-                </a:solidFill>
-                <a:latin typeface="微软雅黑"/>
-                <a:ea typeface="微软雅黑"/>
-                <a:cs typeface="微软雅黑"/>
-              </a:rPr>
-              <a:t>访谈三层次</a:t>
-            </a:r>
-          </a:p>
-        </p:txBody>
-      </p:sp>
-      <p:sp>
-        <p:nvSpPr>
-          <p:cNvPr id="13" name="TextBox 12"/>
-          <p:cNvSpPr txBox="1"/>
-          <p:nvPr/>
-        </p:nvSpPr>
-        <p:spPr>
-          <a:xfrm>
-            <a:off x="3931920" y="3008376"/>
-            <a:ext cx="8046720" cy="365760"/>
-          </a:xfrm>
-          <a:prstGeom prst="rect">
-            <a:avLst/>
-          </a:prstGeom>
-          <a:noFill/>
-        </p:spPr>
-        <p:txBody>
-          <a:bodyPr wrap="square" anchor="t" lIns="0" rIns="0" tIns="0" bIns="0">
-            <a:spAutoFit/>
-          </a:bodyPr>
-          <a:lstStyle/>
-          <a:p>
-            <a:pPr algn="l"/>
-            <a:r>
-              <a:rPr sz="1350" b="0">
-                <a:solidFill>
-                  <a:srgbClr val="1C2A33"/>
-                </a:solidFill>
-                <a:latin typeface="楷体"/>
-                <a:ea typeface="楷体"/>
-                <a:cs typeface="楷体"/>
-              </a:rPr>
-              <a:t>事实层(做了什么) → 感受层(怎么想) → 价值层(为何重要)</a:t>
-            </a:r>
-          </a:p>
-        </p:txBody>
-      </p:sp>
-      <p:sp>
-        <p:nvSpPr>
-          <p:cNvPr id="14" name="Rounded Rectangle 13"/>
-          <p:cNvSpPr/>
-          <p:nvPr/>
-        </p:nvSpPr>
-        <p:spPr>
-          <a:xfrm>
-            <a:off x="640080" y="3502152"/>
-            <a:ext cx="10911535" cy="530352"/>
-          </a:xfrm>
-          <a:prstGeom prst="roundRect">
-            <a:avLst/>
-          </a:prstGeom>
-          <a:solidFill>
-            <a:srgbClr val="FFFFFF"/>
-          </a:solidFill>
-          <a:ln w="10160">
-            <a:solidFill>
-              <a:srgbClr val="6B6258"/>
-            </a:solidFill>
-          </a:ln>
-          <a:effectLst/>
-        </p:spPr>
-        <p:style>
-          <a:lnRef idx="1">
-            <a:schemeClr val="accent1"/>
-          </a:lnRef>
-          <a:fillRef idx="3">
-            <a:schemeClr val="accent1"/>
-          </a:fillRef>
-          <a:effectRef idx="2">
-            <a:schemeClr val="accent1"/>
-          </a:effectRef>
-          <a:fontRef idx="minor">
-            <a:schemeClr val="lt1"/>
-          </a:fontRef>
-        </p:style>
-        <p:txBody>
-          <a:bodyPr rtlCol="0" anchor="ctr"/>
-          <a:lstStyle/>
-          <a:p>
-            <a:pPr algn="ctr"/>
-          </a:p>
-        </p:txBody>
-      </p:sp>
-      <p:sp>
-        <p:nvSpPr>
-          <p:cNvPr id="15" name="TextBox 14"/>
-          <p:cNvSpPr txBox="1"/>
-          <p:nvPr/>
-        </p:nvSpPr>
-        <p:spPr>
-          <a:xfrm>
-            <a:off x="914400" y="3593592"/>
-            <a:ext cx="2743200" cy="365760"/>
-          </a:xfrm>
-          <a:prstGeom prst="rect">
-            <a:avLst/>
-          </a:prstGeom>
-          <a:noFill/>
-        </p:spPr>
-        <p:txBody>
-          <a:bodyPr wrap="square" anchor="t" lIns="0" rIns="0" tIns="0" bIns="0">
-            <a:spAutoFit/>
-          </a:bodyPr>
-          <a:lstStyle/>
-          <a:p>
-            <a:pPr algn="l"/>
-            <a:r>
-              <a:rPr sz="1400" b="1">
-                <a:solidFill>
-                  <a:srgbClr val="C8A86B"/>
-                </a:solidFill>
-                <a:latin typeface="微软雅黑"/>
-                <a:ea typeface="微软雅黑"/>
-                <a:cs typeface="微软雅黑"/>
-              </a:rPr>
-              <a:t>播报语态</a:t>
-            </a:r>
-          </a:p>
-        </p:txBody>
-      </p:sp>
-      <p:sp>
-        <p:nvSpPr>
-          <p:cNvPr id="16" name="TextBox 15"/>
-          <p:cNvSpPr txBox="1"/>
-          <p:nvPr/>
-        </p:nvSpPr>
-        <p:spPr>
-          <a:xfrm>
-            <a:off x="3931920" y="3593592"/>
-            <a:ext cx="8046720" cy="365760"/>
-          </a:xfrm>
-          <a:prstGeom prst="rect">
-            <a:avLst/>
-          </a:prstGeom>
-          <a:noFill/>
-        </p:spPr>
-        <p:txBody>
-          <a:bodyPr wrap="square" anchor="t" lIns="0" rIns="0" tIns="0" bIns="0">
-            <a:spAutoFit/>
-          </a:bodyPr>
-          <a:lstStyle/>
-          <a:p>
-            <a:pPr algn="l"/>
-            <a:r>
-              <a:rPr sz="1350" b="0">
-                <a:solidFill>
-                  <a:srgbClr val="1C2A33"/>
-                </a:solidFill>
-                <a:latin typeface="楷体"/>
-                <a:ea typeface="楷体"/>
-                <a:cs typeface="楷体"/>
-              </a:rPr>
-              <a:t>客观(不评价) · 简洁(一句一事) · 节奏(句间微顿) ≠朗诵 ≠日常</a:t>
-            </a:r>
-          </a:p>
-        </p:txBody>
-      </p:sp>
-      <p:sp>
-        <p:nvSpPr>
-          <p:cNvPr id="17" name="Rounded Rectangle 16"/>
-          <p:cNvSpPr/>
-          <p:nvPr/>
-        </p:nvSpPr>
-        <p:spPr>
-          <a:xfrm>
-            <a:off x="640080" y="4087368"/>
-            <a:ext cx="10911535" cy="530352"/>
-          </a:xfrm>
-          <a:prstGeom prst="roundRect">
-            <a:avLst/>
-          </a:prstGeom>
-          <a:solidFill>
-            <a:srgbClr val="E7DFD2"/>
-          </a:solidFill>
-          <a:ln w="10160">
-            <a:solidFill>
-              <a:srgbClr val="6B6258"/>
-            </a:solidFill>
-          </a:ln>
-          <a:effectLst/>
-        </p:spPr>
-        <p:style>
-          <a:lnRef idx="1">
-            <a:schemeClr val="accent1"/>
-          </a:lnRef>
-          <a:fillRef idx="3">
-            <a:schemeClr val="accent1"/>
-          </a:fillRef>
-          <a:effectRef idx="2">
-            <a:schemeClr val="accent1"/>
-          </a:effectRef>
-          <a:fontRef idx="minor">
-            <a:schemeClr val="lt1"/>
-          </a:fontRef>
-        </p:style>
-        <p:txBody>
-          <a:bodyPr rtlCol="0" anchor="ctr"/>
-          <a:lstStyle/>
-          <a:p>
-            <a:pPr algn="ctr"/>
-          </a:p>
-        </p:txBody>
-      </p:sp>
-      <p:sp>
-        <p:nvSpPr>
-          <p:cNvPr id="18" name="TextBox 17"/>
-          <p:cNvSpPr txBox="1"/>
-          <p:nvPr/>
-        </p:nvSpPr>
-        <p:spPr>
-          <a:xfrm>
-            <a:off x="914400" y="4178808"/>
-            <a:ext cx="2743200" cy="365760"/>
-          </a:xfrm>
-          <a:prstGeom prst="rect">
-            <a:avLst/>
-          </a:prstGeom>
-          <a:noFill/>
-        </p:spPr>
-        <p:txBody>
-          <a:bodyPr wrap="square" anchor="t" lIns="0" rIns="0" tIns="0" bIns="0">
-            <a:spAutoFit/>
-          </a:bodyPr>
-          <a:lstStyle/>
-          <a:p>
-            <a:pPr algn="l"/>
-            <a:r>
-              <a:rPr sz="1400" b="1">
-                <a:solidFill>
-                  <a:srgbClr val="B23A2A"/>
-                </a:solidFill>
-                <a:latin typeface="微软雅黑"/>
-                <a:ea typeface="微软雅黑"/>
-                <a:cs typeface="微软雅黑"/>
-              </a:rPr>
-              <a:t>评价量表</a:t>
-            </a:r>
-          </a:p>
-        </p:txBody>
-      </p:sp>
-      <p:sp>
-        <p:nvSpPr>
-          <p:cNvPr id="19" name="TextBox 18"/>
-          <p:cNvSpPr txBox="1"/>
-          <p:nvPr/>
-        </p:nvSpPr>
-        <p:spPr>
-          <a:xfrm>
-            <a:off x="3931920" y="4178808"/>
-            <a:ext cx="8046720" cy="365760"/>
-          </a:xfrm>
-          <a:prstGeom prst="rect">
-            <a:avLst/>
-          </a:prstGeom>
-          <a:noFill/>
-        </p:spPr>
-        <p:txBody>
-          <a:bodyPr wrap="square" anchor="t" lIns="0" rIns="0" tIns="0" bIns="0">
-            <a:spAutoFit/>
-          </a:bodyPr>
-          <a:lstStyle/>
-          <a:p>
-            <a:pPr algn="l"/>
-            <a:r>
-              <a:rPr sz="1350" b="0">
-                <a:solidFill>
-                  <a:srgbClr val="1C2A33"/>
-                </a:solidFill>
-                <a:latin typeface="楷体"/>
-                <a:ea typeface="楷体"/>
-                <a:cs typeface="楷体"/>
-              </a:rPr>
-              <a:t>内容(准不准) · 语态(像不像) · 节奏(停不好) · 表达(清不清)</a:t>
-            </a:r>
-          </a:p>
-        </p:txBody>
-      </p:sp>
-      <p:sp>
-        <p:nvSpPr>
-          <p:cNvPr id="20" name="Rounded Rectangle 19"/>
-          <p:cNvSpPr/>
-          <p:nvPr/>
-        </p:nvSpPr>
-        <p:spPr>
-          <a:xfrm>
-            <a:off x="640080" y="4672584"/>
-            <a:ext cx="10911535" cy="530352"/>
-          </a:xfrm>
-          <a:prstGeom prst="roundRect">
-            <a:avLst/>
-          </a:prstGeom>
-          <a:solidFill>
-            <a:srgbClr val="FFFFFF"/>
-          </a:solidFill>
-          <a:ln w="10160">
-            <a:solidFill>
-              <a:srgbClr val="6B6258"/>
-            </a:solidFill>
-          </a:ln>
-          <a:effectLst/>
-        </p:spPr>
-        <p:style>
-          <a:lnRef idx="1">
-            <a:schemeClr val="accent1"/>
-          </a:lnRef>
-          <a:fillRef idx="3">
-            <a:schemeClr val="accent1"/>
-          </a:fillRef>
-          <a:effectRef idx="2">
-            <a:schemeClr val="accent1"/>
-          </a:effectRef>
-          <a:fontRef idx="minor">
-            <a:schemeClr val="lt1"/>
-          </a:fontRef>
-        </p:style>
-        <p:txBody>
-          <a:bodyPr rtlCol="0" anchor="ctr"/>
-          <a:lstStyle/>
-          <a:p>
-            <a:pPr algn="ctr"/>
-          </a:p>
-        </p:txBody>
-      </p:sp>
-      <p:sp>
-        <p:nvSpPr>
-          <p:cNvPr id="21" name="TextBox 20"/>
-          <p:cNvSpPr txBox="1"/>
-          <p:nvPr/>
-        </p:nvSpPr>
-        <p:spPr>
-          <a:xfrm>
-            <a:off x="914400" y="4764024"/>
-            <a:ext cx="2743200" cy="365760"/>
-          </a:xfrm>
-          <a:prstGeom prst="rect">
-            <a:avLst/>
-          </a:prstGeom>
-          <a:noFill/>
-        </p:spPr>
-        <p:txBody>
-          <a:bodyPr wrap="square" anchor="t" lIns="0" rIns="0" tIns="0" bIns="0">
-            <a:spAutoFit/>
-          </a:bodyPr>
-          <a:lstStyle/>
-          <a:p>
-            <a:pPr algn="l"/>
-            <a:r>
-              <a:rPr sz="1400" b="1">
-                <a:solidFill>
-                  <a:srgbClr val="2E7D6B"/>
-                </a:solidFill>
-                <a:latin typeface="微软雅黑"/>
-                <a:ea typeface="微软雅黑"/>
-                <a:cs typeface="微软雅黑"/>
-              </a:rPr>
-              <a:t>访谈三步</a:t>
-            </a:r>
-          </a:p>
-        </p:txBody>
-      </p:sp>
-      <p:sp>
-        <p:nvSpPr>
-          <p:cNvPr id="22" name="TextBox 21"/>
-          <p:cNvSpPr txBox="1"/>
-          <p:nvPr/>
-        </p:nvSpPr>
-        <p:spPr>
-          <a:xfrm>
-            <a:off x="3931920" y="4764024"/>
-            <a:ext cx="8046720" cy="365760"/>
-          </a:xfrm>
-          <a:prstGeom prst="rect">
-            <a:avLst/>
-          </a:prstGeom>
-          <a:noFill/>
-        </p:spPr>
-        <p:txBody>
-          <a:bodyPr wrap="square" anchor="t" lIns="0" rIns="0" tIns="0" bIns="0">
-            <a:spAutoFit/>
-          </a:bodyPr>
-          <a:lstStyle/>
-          <a:p>
-            <a:pPr algn="l"/>
-            <a:r>
-              <a:rPr sz="1350" b="0">
-                <a:solidFill>
-                  <a:srgbClr val="1C2A33"/>
-                </a:solidFill>
-                <a:latin typeface="楷体"/>
-                <a:ea typeface="楷体"/>
-                <a:cs typeface="楷体"/>
-              </a:rPr>
-              <a:t>设计问题 → 模拟访谈 → 整理记录</a:t>
-            </a:r>
-          </a:p>
-        </p:txBody>
-      </p:sp>
-      <p:sp>
-        <p:nvSpPr>
-          <p:cNvPr id="23" name="Rounded Rectangle 22"/>
-          <p:cNvSpPr/>
-          <p:nvPr/>
-        </p:nvSpPr>
-        <p:spPr>
-          <a:xfrm>
-            <a:off x="640080" y="5257800"/>
-            <a:ext cx="10911535" cy="530352"/>
-          </a:xfrm>
-          <a:prstGeom prst="roundRect">
-            <a:avLst/>
-          </a:prstGeom>
-          <a:solidFill>
-            <a:srgbClr val="E7DFD2"/>
-          </a:solidFill>
-          <a:ln w="10160">
-            <a:solidFill>
-              <a:srgbClr val="6B6258"/>
-            </a:solidFill>
-          </a:ln>
-          <a:effectLst/>
-        </p:spPr>
-        <p:style>
-          <a:lnRef idx="1">
-            <a:schemeClr val="accent1"/>
-          </a:lnRef>
-          <a:fillRef idx="3">
-            <a:schemeClr val="accent1"/>
-          </a:fillRef>
-          <a:effectRef idx="2">
-            <a:schemeClr val="accent1"/>
-          </a:effectRef>
-          <a:fontRef idx="minor">
-            <a:schemeClr val="lt1"/>
-          </a:fontRef>
-        </p:style>
-        <p:txBody>
-          <a:bodyPr rtlCol="0" anchor="ctr"/>
-          <a:lstStyle/>
-          <a:p>
-            <a:pPr algn="ctr"/>
-          </a:p>
-        </p:txBody>
-      </p:sp>
-      <p:sp>
-        <p:nvSpPr>
-          <p:cNvPr id="24" name="TextBox 23"/>
-          <p:cNvSpPr txBox="1"/>
-          <p:nvPr/>
-        </p:nvSpPr>
-        <p:spPr>
-          <a:xfrm>
-            <a:off x="914400" y="5349240"/>
-            <a:ext cx="2743200" cy="365760"/>
-          </a:xfrm>
-          <a:prstGeom prst="rect">
-            <a:avLst/>
-          </a:prstGeom>
-          <a:noFill/>
-        </p:spPr>
-        <p:txBody>
-          <a:bodyPr wrap="square" anchor="t" lIns="0" rIns="0" tIns="0" bIns="0">
-            <a:spAutoFit/>
-          </a:bodyPr>
-          <a:lstStyle/>
-          <a:p>
-            <a:pPr algn="l"/>
-            <a:r>
-              <a:rPr sz="1400" b="1">
-                <a:solidFill>
-                  <a:srgbClr val="C8A86B"/>
-                </a:solidFill>
-                <a:latin typeface="微软雅黑"/>
-                <a:ea typeface="微软雅黑"/>
-                <a:cs typeface="微软雅黑"/>
-              </a:rPr>
-              <a:t>播报三步</a:t>
-            </a:r>
-          </a:p>
-        </p:txBody>
-      </p:sp>
-      <p:sp>
-        <p:nvSpPr>
-          <p:cNvPr id="25" name="TextBox 24"/>
-          <p:cNvSpPr txBox="1"/>
-          <p:nvPr/>
-        </p:nvSpPr>
-        <p:spPr>
-          <a:xfrm>
-            <a:off x="3931920" y="5349240"/>
-            <a:ext cx="8046720" cy="365760"/>
-          </a:xfrm>
-          <a:prstGeom prst="rect">
-            <a:avLst/>
-          </a:prstGeom>
-          <a:noFill/>
-        </p:spPr>
-        <p:txBody>
-          <a:bodyPr wrap="square" anchor="t" lIns="0" rIns="0" tIns="0" bIns="0">
-            <a:spAutoFit/>
-          </a:bodyPr>
-          <a:lstStyle/>
-          <a:p>
-            <a:pPr algn="l"/>
-            <a:r>
-              <a:rPr sz="1350" b="0">
-                <a:solidFill>
-                  <a:srgbClr val="1C2A33"/>
-                </a:solidFill>
-                <a:latin typeface="楷体"/>
-                <a:ea typeface="楷体"/>
-                <a:cs typeface="楷体"/>
-              </a:rPr>
-              <a:t>选材 → 组稿 → 播报</a:t>
-            </a:r>
-          </a:p>
-        </p:txBody>
-      </p:sp>
-      <p:sp>
-        <p:nvSpPr>
-          <p:cNvPr id="26" name="TextBox 25"/>
           <p:cNvSpPr txBox="1"/>
           <p:nvPr/>
         </p:nvSpPr>
@@ -8896,13 +7688,13 @@
             <a:r>
               <a:rPr sz="1300" b="1">
                 <a:solidFill>
-                  <a:srgbClr val="B23A2A"/>
+                  <a:srgbClr val="2E7D6B"/>
                 </a:solidFill>
                 <a:latin typeface="微软雅黑"/>
                 <a:ea typeface="微软雅黑"/>
                 <a:cs typeface="微软雅黑"/>
               </a:rPr>
-              <a:t>作业 · 分层</a:t>
+              <a:t>分层作业</a:t>
             </a:r>
           </a:p>
         </p:txBody>
@@ -8917,301 +7709,6 @@
           <a:xfrm>
             <a:off x="640080" y="1097280"/>
             <a:ext cx="822960" cy="30480"/>
-          </a:xfrm>
-          <a:prstGeom prst="rect">
-            <a:avLst/>
-          </a:prstGeom>
-          <a:solidFill>
-            <a:srgbClr val="B23A2A"/>
-          </a:solidFill>
-          <a:ln>
-            <a:noFill/>
-          </a:ln>
-          <a:effectLst/>
-        </p:spPr>
-        <p:style>
-          <a:lnRef idx="1">
-            <a:schemeClr val="accent1"/>
-          </a:lnRef>
-          <a:fillRef idx="3">
-            <a:schemeClr val="accent1"/>
-          </a:fillRef>
-          <a:effectRef idx="2">
-            <a:schemeClr val="accent1"/>
-          </a:effectRef>
-          <a:fontRef idx="minor">
-            <a:schemeClr val="lt1"/>
-          </a:fontRef>
-        </p:style>
-        <p:txBody>
-          <a:bodyPr rtlCol="0" anchor="ctr"/>
-          <a:lstStyle/>
-          <a:p>
-            <a:pPr algn="ctr"/>
-          </a:p>
-        </p:txBody>
-      </p:sp>
-      <p:sp>
-        <p:nvSpPr>
-          <p:cNvPr id="5" name="TextBox 4"/>
-          <p:cNvSpPr txBox="1"/>
-          <p:nvPr/>
-        </p:nvSpPr>
-        <p:spPr>
-          <a:xfrm>
-            <a:off x="640080" y="1325880"/>
-            <a:ext cx="10058400" cy="548640"/>
-          </a:xfrm>
-          <a:prstGeom prst="rect">
-            <a:avLst/>
-          </a:prstGeom>
-          <a:noFill/>
-        </p:spPr>
-        <p:txBody>
-          <a:bodyPr wrap="square" anchor="t" lIns="0" rIns="0" tIns="0" bIns="0">
-            <a:spAutoFit/>
-          </a:bodyPr>
-          <a:lstStyle/>
-          <a:p>
-            <a:pPr algn="l"/>
-            <a:r>
-              <a:rPr sz="2600" b="1">
-                <a:solidFill>
-                  <a:srgbClr val="1C2A33"/>
-                </a:solidFill>
-                <a:latin typeface="楷体"/>
-                <a:ea typeface="楷体"/>
-                <a:cs typeface="楷体"/>
-              </a:rPr>
-              <a:t>基础 · 提升 · 拓展</a:t>
-            </a:r>
-          </a:p>
-        </p:txBody>
-      </p:sp>
-      <p:sp>
-        <p:nvSpPr>
-          <p:cNvPr id="6" name="Rounded Rectangle 5"/>
-          <p:cNvSpPr/>
-          <p:nvPr/>
-        </p:nvSpPr>
-        <p:spPr>
-          <a:xfrm>
-            <a:off x="640080" y="2194560"/>
-            <a:ext cx="3393338" cy="3840480"/>
-          </a:xfrm>
-          <a:prstGeom prst="roundRect">
-            <a:avLst/>
-          </a:prstGeom>
-          <a:solidFill>
-            <a:srgbClr val="FFFFFF"/>
-          </a:solidFill>
-          <a:ln w="20320">
-            <a:solidFill>
-              <a:srgbClr val="B23A2A"/>
-            </a:solidFill>
-          </a:ln>
-          <a:effectLst/>
-        </p:spPr>
-        <p:style>
-          <a:lnRef idx="1">
-            <a:schemeClr val="accent1"/>
-          </a:lnRef>
-          <a:fillRef idx="3">
-            <a:schemeClr val="accent1"/>
-          </a:fillRef>
-          <a:effectRef idx="2">
-            <a:schemeClr val="accent1"/>
-          </a:effectRef>
-          <a:fontRef idx="minor">
-            <a:schemeClr val="lt1"/>
-          </a:fontRef>
-        </p:style>
-        <p:txBody>
-          <a:bodyPr rtlCol="0" anchor="ctr"/>
-          <a:lstStyle/>
-          <a:p>
-            <a:pPr algn="ctr"/>
-          </a:p>
-        </p:txBody>
-      </p:sp>
-      <p:sp>
-        <p:nvSpPr>
-          <p:cNvPr id="7" name="Rectangle 6"/>
-          <p:cNvSpPr/>
-          <p:nvPr/>
-        </p:nvSpPr>
-        <p:spPr>
-          <a:xfrm>
-            <a:off x="640080" y="2194560"/>
-            <a:ext cx="3393338" cy="548640"/>
-          </a:xfrm>
-          <a:prstGeom prst="rect">
-            <a:avLst/>
-          </a:prstGeom>
-          <a:solidFill>
-            <a:srgbClr val="B23A2A"/>
-          </a:solidFill>
-          <a:ln>
-            <a:noFill/>
-          </a:ln>
-          <a:effectLst/>
-        </p:spPr>
-        <p:style>
-          <a:lnRef idx="1">
-            <a:schemeClr val="accent1"/>
-          </a:lnRef>
-          <a:fillRef idx="3">
-            <a:schemeClr val="accent1"/>
-          </a:fillRef>
-          <a:effectRef idx="2">
-            <a:schemeClr val="accent1"/>
-          </a:effectRef>
-          <a:fontRef idx="minor">
-            <a:schemeClr val="lt1"/>
-          </a:fontRef>
-        </p:style>
-        <p:txBody>
-          <a:bodyPr rtlCol="0" anchor="ctr"/>
-          <a:lstStyle/>
-          <a:p>
-            <a:pPr algn="ctr"/>
-          </a:p>
-        </p:txBody>
-      </p:sp>
-      <p:sp>
-        <p:nvSpPr>
-          <p:cNvPr id="8" name="TextBox 7"/>
-          <p:cNvSpPr txBox="1"/>
-          <p:nvPr/>
-        </p:nvSpPr>
-        <p:spPr>
-          <a:xfrm>
-            <a:off x="640080" y="2304288"/>
-            <a:ext cx="3393338" cy="365760"/>
-          </a:xfrm>
-          <a:prstGeom prst="rect">
-            <a:avLst/>
-          </a:prstGeom>
-          <a:noFill/>
-        </p:spPr>
-        <p:txBody>
-          <a:bodyPr wrap="square" anchor="t" lIns="0" rIns="0" tIns="0" bIns="0">
-            <a:spAutoFit/>
-          </a:bodyPr>
-          <a:lstStyle/>
-          <a:p>
-            <a:pPr algn="ctr"/>
-            <a:r>
-              <a:rPr sz="1600" b="1">
-                <a:solidFill>
-                  <a:srgbClr val="FFFFFF"/>
-                </a:solidFill>
-                <a:latin typeface="微软雅黑"/>
-                <a:ea typeface="微软雅黑"/>
-                <a:cs typeface="微软雅黑"/>
-              </a:rPr>
-              <a:t>基础 · 必做</a:t>
-            </a:r>
-          </a:p>
-        </p:txBody>
-      </p:sp>
-      <p:sp>
-        <p:nvSpPr>
-          <p:cNvPr id="9" name="TextBox 8"/>
-          <p:cNvSpPr txBox="1"/>
-          <p:nvPr/>
-        </p:nvSpPr>
-        <p:spPr>
-          <a:xfrm>
-            <a:off x="914400" y="2971800"/>
-            <a:ext cx="2844698" cy="2926080"/>
-          </a:xfrm>
-          <a:prstGeom prst="rect">
-            <a:avLst/>
-          </a:prstGeom>
-          <a:noFill/>
-        </p:spPr>
-        <p:txBody>
-          <a:bodyPr wrap="square" anchor="t" lIns="0" rIns="0" tIns="0" bIns="0">
-            <a:spAutoFit/>
-          </a:bodyPr>
-          <a:lstStyle/>
-          <a:p>
-            <a:pPr algn="l">
-              <a:lnSpc>
-                <a:spcPct val="160000"/>
-              </a:lnSpc>
-            </a:pPr>
-            <a:r>
-              <a:rPr sz="1400" b="0">
-                <a:solidFill>
-                  <a:srgbClr val="1C2A33"/>
-                </a:solidFill>
-                <a:latin typeface="楷体"/>
-                <a:ea typeface="楷体"/>
-                <a:cs typeface="楷体"/>
-              </a:rPr>
-              <a:t>① 完善访谈问题：三层次各 2 个，且"具体可答"；② 整理模拟访谈记录 3 条关键信息；③ 修改播报稿（5句内），标停顿"/"，录1分钟音频。</a:t>
-            </a:r>
-          </a:p>
-        </p:txBody>
-      </p:sp>
-      <p:sp>
-        <p:nvSpPr>
-          <p:cNvPr id="10" name="Rounded Rectangle 9"/>
-          <p:cNvSpPr/>
-          <p:nvPr/>
-        </p:nvSpPr>
-        <p:spPr>
-          <a:xfrm>
-            <a:off x="4399178" y="2194560"/>
-            <a:ext cx="3393338" cy="3840480"/>
-          </a:xfrm>
-          <a:prstGeom prst="roundRect">
-            <a:avLst/>
-          </a:prstGeom>
-          <a:solidFill>
-            <a:srgbClr val="FFFFFF"/>
-          </a:solidFill>
-          <a:ln w="20320">
-            <a:solidFill>
-              <a:srgbClr val="2E7D6B"/>
-            </a:solidFill>
-          </a:ln>
-          <a:effectLst/>
-        </p:spPr>
-        <p:style>
-          <a:lnRef idx="1">
-            <a:schemeClr val="accent1"/>
-          </a:lnRef>
-          <a:fillRef idx="3">
-            <a:schemeClr val="accent1"/>
-          </a:fillRef>
-          <a:effectRef idx="2">
-            <a:schemeClr val="accent1"/>
-          </a:effectRef>
-          <a:fontRef idx="minor">
-            <a:schemeClr val="lt1"/>
-          </a:fontRef>
-        </p:style>
-        <p:txBody>
-          <a:bodyPr rtlCol="0" anchor="ctr"/>
-          <a:lstStyle/>
-          <a:p>
-            <a:pPr algn="ctr"/>
-          </a:p>
-        </p:txBody>
-      </p:sp>
-      <p:sp>
-        <p:nvSpPr>
-          <p:cNvPr id="11" name="Rectangle 10"/>
-          <p:cNvSpPr/>
-          <p:nvPr/>
-        </p:nvSpPr>
-        <p:spPr>
-          <a:xfrm>
-            <a:off x="4399178" y="2194560"/>
-            <a:ext cx="3393338" cy="548640"/>
           </a:xfrm>
           <a:prstGeom prst="rect">
             <a:avLst/>
@@ -9248,92 +7745,14 @@
       </p:sp>
       <p:sp>
         <p:nvSpPr>
-          <p:cNvPr id="12" name="TextBox 11"/>
-          <p:cNvSpPr txBox="1"/>
-          <p:nvPr/>
-        </p:nvSpPr>
-        <p:spPr>
-          <a:xfrm>
-            <a:off x="4399178" y="2304288"/>
-            <a:ext cx="3393338" cy="365760"/>
-          </a:xfrm>
-          <a:prstGeom prst="rect">
-            <a:avLst/>
-          </a:prstGeom>
-          <a:noFill/>
-        </p:spPr>
-        <p:txBody>
-          <a:bodyPr wrap="square" anchor="t" lIns="0" rIns="0" tIns="0" bIns="0">
-            <a:spAutoFit/>
-          </a:bodyPr>
-          <a:lstStyle/>
-          <a:p>
-            <a:pPr algn="ctr"/>
-            <a:r>
-              <a:rPr sz="1600" b="1">
-                <a:solidFill>
-                  <a:srgbClr val="FFFFFF"/>
-                </a:solidFill>
-                <a:latin typeface="微软雅黑"/>
-                <a:ea typeface="微软雅黑"/>
-                <a:cs typeface="微软雅黑"/>
-              </a:rPr>
-              <a:t>提升 · 选做</a:t>
-            </a:r>
-          </a:p>
-        </p:txBody>
-      </p:sp>
-      <p:sp>
-        <p:nvSpPr>
-          <p:cNvPr id="13" name="TextBox 12"/>
-          <p:cNvSpPr txBox="1"/>
-          <p:nvPr/>
-        </p:nvSpPr>
-        <p:spPr>
-          <a:xfrm>
-            <a:off x="4673498" y="2971800"/>
-            <a:ext cx="2844698" cy="2926080"/>
-          </a:xfrm>
-          <a:prstGeom prst="rect">
-            <a:avLst/>
-          </a:prstGeom>
-          <a:noFill/>
-        </p:spPr>
-        <p:txBody>
-          <a:bodyPr wrap="square" anchor="t" lIns="0" rIns="0" tIns="0" bIns="0">
-            <a:spAutoFit/>
-          </a:bodyPr>
-          <a:lstStyle/>
-          <a:p>
-            <a:pPr algn="l">
-              <a:lnSpc>
-                <a:spcPct val="160000"/>
-              </a:lnSpc>
-            </a:pPr>
-            <a:r>
-              <a:rPr sz="1400" b="0">
-                <a:solidFill>
-                  <a:srgbClr val="1C2A33"/>
-                </a:solidFill>
-                <a:latin typeface="楷体"/>
-                <a:ea typeface="楷体"/>
-                <a:cs typeface="楷体"/>
-              </a:rPr>
-              <a:t>采访一位身边的劳动者（家长 / 校工 / 身边爱岗敬业的普通人）：写访谈目的 + 5个三层次问题 + 预设回答 + 播报稿。</a:t>
-            </a:r>
-          </a:p>
-        </p:txBody>
-      </p:sp>
-      <p:sp>
-        <p:nvSpPr>
-          <p:cNvPr id="14" name="Rounded Rectangle 13"/>
+          <p:cNvPr id="5" name="Rounded Rectangle 4"/>
           <p:cNvSpPr/>
           <p:nvPr/>
         </p:nvSpPr>
         <p:spPr>
           <a:xfrm>
-            <a:off x="8158276" y="2194560"/>
-            <a:ext cx="3393338" cy="3840480"/>
+            <a:off x="640080" y="1417320"/>
+            <a:ext cx="10911535" cy="1417320"/>
           </a:xfrm>
           <a:prstGeom prst="roundRect">
             <a:avLst/>
@@ -9341,9 +7760,9 @@
           <a:solidFill>
             <a:srgbClr val="FFFFFF"/>
           </a:solidFill>
-          <a:ln w="20320">
+          <a:ln w="22860">
             <a:solidFill>
-              <a:srgbClr val="C8A86B"/>
+              <a:srgbClr val="2E7D6B"/>
             </a:solidFill>
           </a:ln>
           <a:effectLst/>
@@ -9372,23 +7791,107 @@
       </p:sp>
       <p:sp>
         <p:nvSpPr>
-          <p:cNvPr id="15" name="Rectangle 14"/>
+          <p:cNvPr id="6" name="TextBox 5"/>
+          <p:cNvSpPr txBox="1"/>
+          <p:nvPr/>
+        </p:nvSpPr>
+        <p:spPr>
+          <a:xfrm>
+            <a:off x="1371600" y="1527048"/>
+            <a:ext cx="9997135" cy="457200"/>
+          </a:xfrm>
+          <a:prstGeom prst="rect">
+            <a:avLst/>
+          </a:prstGeom>
+          <a:noFill/>
+        </p:spPr>
+        <p:txBody>
+          <a:bodyPr wrap="square" anchor="t" lIns="0" rIns="0" tIns="0" bIns="0">
+            <a:spAutoFit/>
+          </a:bodyPr>
+          <a:lstStyle/>
+          <a:p>
+            <a:pPr algn="l">
+              <a:lnSpc>
+                <a:spcPct val="110000"/>
+              </a:lnSpc>
+            </a:pPr>
+            <a:r>
+              <a:rPr sz="1600" b="1">
+                <a:solidFill>
+                  <a:srgbClr val="1C2A33"/>
+                </a:solidFill>
+                <a:latin typeface="微软雅黑"/>
+                <a:ea typeface="微软雅黑"/>
+                <a:cs typeface="微软雅黑"/>
+              </a:rPr>
+              <a:t/>
+            </a:r>
+          </a:p>
+        </p:txBody>
+      </p:sp>
+      <p:sp>
+        <p:nvSpPr>
+          <p:cNvPr id="7" name="TextBox 6"/>
+          <p:cNvSpPr txBox="1"/>
+          <p:nvPr/>
+        </p:nvSpPr>
+        <p:spPr>
+          <a:xfrm>
+            <a:off x="1371600" y="1965960"/>
+            <a:ext cx="9997135" cy="777240"/>
+          </a:xfrm>
+          <a:prstGeom prst="rect">
+            <a:avLst/>
+          </a:prstGeom>
+          <a:noFill/>
+        </p:spPr>
+        <p:txBody>
+          <a:bodyPr wrap="square" anchor="t" lIns="0" rIns="0" tIns="0" bIns="0">
+            <a:spAutoFit/>
+          </a:bodyPr>
+          <a:lstStyle/>
+          <a:p>
+            <a:pPr algn="l">
+              <a:lnSpc>
+                <a:spcPct val="128000"/>
+              </a:lnSpc>
+            </a:pPr>
+            <a:r>
+              <a:rPr sz="1100" b="0">
+                <a:solidFill>
+                  <a:srgbClr val="1C2A33"/>
+                </a:solidFill>
+                <a:latin typeface="楷体"/>
+                <a:ea typeface="楷体"/>
+                <a:cs typeface="楷体"/>
+              </a:rPr>
+              <a:t>【基础作业】1. 完善你的访谈问题（三层次各2个问题），并整理模拟访谈记录（3条关键信息）。2. 修改播报稿（5句话以内），标注停顿符号（/），录制1分钟播报音频。</a:t>
+            </a:r>
+          </a:p>
+        </p:txBody>
+      </p:sp>
+      <p:sp>
+        <p:nvSpPr>
+          <p:cNvPr id="8" name="Rounded Rectangle 7"/>
           <p:cNvSpPr/>
           <p:nvPr/>
         </p:nvSpPr>
         <p:spPr>
           <a:xfrm>
-            <a:off x="8158276" y="2194560"/>
-            <a:ext cx="3393338" cy="548640"/>
-          </a:xfrm>
-          <a:prstGeom prst="rect">
+            <a:off x="640080" y="2971800"/>
+            <a:ext cx="10911535" cy="1417320"/>
+          </a:xfrm>
+          <a:prstGeom prst="roundRect">
             <a:avLst/>
           </a:prstGeom>
           <a:solidFill>
-            <a:srgbClr val="C8A86B"/>
+            <a:srgbClr val="FFFFFF"/>
           </a:solidFill>
-          <a:ln>
-            <a:noFill/>
+          <a:ln w="22860">
+            <a:solidFill>
+              <a:srgbClr val="2E7D6B"/>
+            </a:solidFill>
           </a:ln>
           <a:effectLst/>
         </p:spPr>
@@ -9416,14 +7919,14 @@
       </p:sp>
       <p:sp>
         <p:nvSpPr>
-          <p:cNvPr id="16" name="TextBox 15"/>
+          <p:cNvPr id="9" name="TextBox 8"/>
           <p:cNvSpPr txBox="1"/>
           <p:nvPr/>
         </p:nvSpPr>
         <p:spPr>
           <a:xfrm>
-            <a:off x="8158276" y="2304288"/>
-            <a:ext cx="3393338" cy="365760"/>
+            <a:off x="1371600" y="3081528"/>
+            <a:ext cx="9997135" cy="457200"/>
           </a:xfrm>
           <a:prstGeom prst="rect">
             <a:avLst/>
@@ -9436,31 +7939,35 @@
           </a:bodyPr>
           <a:lstStyle/>
           <a:p>
-            <a:pPr algn="ctr"/>
+            <a:pPr algn="l">
+              <a:lnSpc>
+                <a:spcPct val="110000"/>
+              </a:lnSpc>
+            </a:pPr>
             <a:r>
               <a:rPr sz="1600" b="1">
                 <a:solidFill>
-                  <a:srgbClr val="FFFFFF"/>
+                  <a:srgbClr val="1C2A33"/>
                 </a:solidFill>
                 <a:latin typeface="微软雅黑"/>
                 <a:ea typeface="微软雅黑"/>
                 <a:cs typeface="微软雅黑"/>
               </a:rPr>
-              <a:t>拓展 · 衔接</a:t>
-            </a:r>
-          </a:p>
-        </p:txBody>
-      </p:sp>
-      <p:sp>
-        <p:nvSpPr>
-          <p:cNvPr id="17" name="TextBox 16"/>
+              <a:t/>
+            </a:r>
+          </a:p>
+        </p:txBody>
+      </p:sp>
+      <p:sp>
+        <p:nvSpPr>
+          <p:cNvPr id="10" name="TextBox 9"/>
           <p:cNvSpPr txBox="1"/>
           <p:nvPr/>
         </p:nvSpPr>
         <p:spPr>
           <a:xfrm>
-            <a:off x="8432596" y="2971800"/>
-            <a:ext cx="2844698" cy="2926080"/>
+            <a:off x="1371600" y="3520440"/>
+            <a:ext cx="9997135" cy="777240"/>
           </a:xfrm>
           <a:prstGeom prst="rect">
             <a:avLst/>
@@ -9475,11 +7982,11 @@
           <a:p>
             <a:pPr algn="l">
               <a:lnSpc>
-                <a:spcPct val="160000"/>
+                <a:spcPct val="128000"/>
               </a:lnSpc>
             </a:pPr>
             <a:r>
-              <a:rPr sz="1400" b="0">
+              <a:rPr sz="1100" b="0">
                 <a:solidFill>
                   <a:srgbClr val="1C2A33"/>
                 </a:solidFill>
@@ -9487,14 +7994,14 @@
                 <a:ea typeface="楷体"/>
                 <a:cs typeface="楷体"/>
               </a:rPr>
-              <a:t>访谈记录与播报稿，直接作为下节课"学写人物通讯"的素材——口语素材转化为书面写作。</a:t>
-            </a:r>
-          </a:p>
-        </p:txBody>
-      </p:sp>
-      <p:sp>
-        <p:nvSpPr>
-          <p:cNvPr id="18" name="TextBox 17"/>
+              <a:t>【提高作业】选择一位身边的劳动者（家长//学校工作人员），设计一份完整的访谈方案：①访谈目的；②5个三层次问题；③；④访谈后的播报稿。</a:t>
+            </a:r>
+          </a:p>
+        </p:txBody>
+      </p:sp>
+      <p:sp>
+        <p:nvSpPr>
+          <p:cNvPr id="11" name="TextBox 10"/>
           <p:cNvSpPr txBox="1"/>
           <p:nvPr/>
         </p:nvSpPr>
@@ -9621,13 +8128,13 @@
             <a:r>
               <a:rPr sz="1300" b="1">
                 <a:solidFill>
-                  <a:srgbClr val="B23A2A"/>
+                  <a:srgbClr val="C8A86B"/>
                 </a:solidFill>
                 <a:latin typeface="微软雅黑"/>
                 <a:ea typeface="微软雅黑"/>
                 <a:cs typeface="微软雅黑"/>
               </a:rPr>
-              <a:t>总结 · 两种口语方法</a:t>
+              <a:t>本课小结</a:t>
             </a:r>
           </a:p>
         </p:txBody>
@@ -9642,500 +8149,6 @@
           <a:xfrm>
             <a:off x="640080" y="1097280"/>
             <a:ext cx="822960" cy="30480"/>
-          </a:xfrm>
-          <a:prstGeom prst="rect">
-            <a:avLst/>
-          </a:prstGeom>
-          <a:solidFill>
-            <a:srgbClr val="B23A2A"/>
-          </a:solidFill>
-          <a:ln>
-            <a:noFill/>
-          </a:ln>
-          <a:effectLst/>
-        </p:spPr>
-        <p:style>
-          <a:lnRef idx="1">
-            <a:schemeClr val="accent1"/>
-          </a:lnRef>
-          <a:fillRef idx="3">
-            <a:schemeClr val="accent1"/>
-          </a:fillRef>
-          <a:effectRef idx="2">
-            <a:schemeClr val="accent1"/>
-          </a:effectRef>
-          <a:fontRef idx="minor">
-            <a:schemeClr val="lt1"/>
-          </a:fontRef>
-        </p:style>
-        <p:txBody>
-          <a:bodyPr rtlCol="0" anchor="ctr"/>
-          <a:lstStyle/>
-          <a:p>
-            <a:pPr algn="ctr"/>
-          </a:p>
-        </p:txBody>
-      </p:sp>
-      <p:sp>
-        <p:nvSpPr>
-          <p:cNvPr id="5" name="TextBox 4"/>
-          <p:cNvSpPr txBox="1"/>
-          <p:nvPr/>
-        </p:nvSpPr>
-        <p:spPr>
-          <a:xfrm>
-            <a:off x="640080" y="1325880"/>
-            <a:ext cx="10515600" cy="640080"/>
-          </a:xfrm>
-          <a:prstGeom prst="rect">
-            <a:avLst/>
-          </a:prstGeom>
-          <a:noFill/>
-        </p:spPr>
-        <p:txBody>
-          <a:bodyPr wrap="square" anchor="t" lIns="0" rIns="0" tIns="0" bIns="0">
-            <a:spAutoFit/>
-          </a:bodyPr>
-          <a:lstStyle/>
-          <a:p>
-            <a:pPr algn="l"/>
-            <a:r>
-              <a:rPr sz="3000" b="1">
-                <a:solidFill>
-                  <a:srgbClr val="1C2A33"/>
-                </a:solidFill>
-                <a:latin typeface="楷体"/>
-                <a:ea typeface="楷体"/>
-                <a:cs typeface="楷体"/>
-              </a:rPr>
-              <a:t>访谈三步 · 播报三步</a:t>
-            </a:r>
-          </a:p>
-        </p:txBody>
-      </p:sp>
-      <p:sp>
-        <p:nvSpPr>
-          <p:cNvPr id="6" name="Rounded Rectangle 5"/>
-          <p:cNvSpPr/>
-          <p:nvPr/>
-        </p:nvSpPr>
-        <p:spPr>
-          <a:xfrm>
-            <a:off x="640080" y="2286000"/>
-            <a:ext cx="3393338" cy="2103120"/>
-          </a:xfrm>
-          <a:prstGeom prst="roundRect">
-            <a:avLst/>
-          </a:prstGeom>
-          <a:solidFill>
-            <a:srgbClr val="FFFFFF"/>
-          </a:solidFill>
-          <a:ln w="22860">
-            <a:solidFill>
-              <a:srgbClr val="B23A2A"/>
-            </a:solidFill>
-          </a:ln>
-          <a:effectLst/>
-        </p:spPr>
-        <p:style>
-          <a:lnRef idx="1">
-            <a:schemeClr val="accent1"/>
-          </a:lnRef>
-          <a:fillRef idx="3">
-            <a:schemeClr val="accent1"/>
-          </a:fillRef>
-          <a:effectRef idx="2">
-            <a:schemeClr val="accent1"/>
-          </a:effectRef>
-          <a:fontRef idx="minor">
-            <a:schemeClr val="lt1"/>
-          </a:fontRef>
-        </p:style>
-        <p:txBody>
-          <a:bodyPr rtlCol="0" anchor="ctr"/>
-          <a:lstStyle/>
-          <a:p>
-            <a:pPr algn="ctr"/>
-          </a:p>
-        </p:txBody>
-      </p:sp>
-      <p:sp>
-        <p:nvSpPr>
-          <p:cNvPr id="7" name="TextBox 6"/>
-          <p:cNvSpPr txBox="1"/>
-          <p:nvPr/>
-        </p:nvSpPr>
-        <p:spPr>
-          <a:xfrm>
-            <a:off x="868680" y="2514600"/>
-            <a:ext cx="2936138" cy="548640"/>
-          </a:xfrm>
-          <a:prstGeom prst="rect">
-            <a:avLst/>
-          </a:prstGeom>
-          <a:noFill/>
-        </p:spPr>
-        <p:txBody>
-          <a:bodyPr wrap="square" anchor="t" lIns="0" rIns="0" tIns="0" bIns="0">
-            <a:spAutoFit/>
-          </a:bodyPr>
-          <a:lstStyle/>
-          <a:p>
-            <a:pPr algn="ctr"/>
-            <a:r>
-              <a:rPr sz="2100" b="1">
-                <a:solidFill>
-                  <a:srgbClr val="B23A2A"/>
-                </a:solidFill>
-                <a:latin typeface="楷体"/>
-                <a:ea typeface="楷体"/>
-                <a:cs typeface="楷体"/>
-              </a:rPr>
-              <a:t>访谈三步法</a:t>
-            </a:r>
-          </a:p>
-        </p:txBody>
-      </p:sp>
-      <p:sp>
-        <p:nvSpPr>
-          <p:cNvPr id="8" name="TextBox 7"/>
-          <p:cNvSpPr txBox="1"/>
-          <p:nvPr/>
-        </p:nvSpPr>
-        <p:spPr>
-          <a:xfrm>
-            <a:off x="914400" y="3154680"/>
-            <a:ext cx="2844698" cy="1097280"/>
-          </a:xfrm>
-          <a:prstGeom prst="rect">
-            <a:avLst/>
-          </a:prstGeom>
-          <a:noFill/>
-        </p:spPr>
-        <p:txBody>
-          <a:bodyPr wrap="square" anchor="t" lIns="0" rIns="0" tIns="0" bIns="0">
-            <a:spAutoFit/>
-          </a:bodyPr>
-          <a:lstStyle/>
-          <a:p>
-            <a:pPr algn="ctr">
-              <a:lnSpc>
-                <a:spcPct val="150000"/>
-              </a:lnSpc>
-            </a:pPr>
-            <a:r>
-              <a:rPr sz="1350" b="0">
-                <a:solidFill>
-                  <a:srgbClr val="1C2A33"/>
-                </a:solidFill>
-                <a:latin typeface="楷体"/>
-                <a:ea typeface="楷体"/>
-                <a:cs typeface="楷体"/>
-              </a:rPr>
-              <a:t>设计问题 → 模拟访谈 → 整理记录。问题要"具体可答"，由事实到价值层层追问。</a:t>
-            </a:r>
-          </a:p>
-        </p:txBody>
-      </p:sp>
-      <p:sp>
-        <p:nvSpPr>
-          <p:cNvPr id="9" name="Rounded Rectangle 8"/>
-          <p:cNvSpPr/>
-          <p:nvPr/>
-        </p:nvSpPr>
-        <p:spPr>
-          <a:xfrm>
-            <a:off x="4399178" y="2286000"/>
-            <a:ext cx="3393338" cy="2103120"/>
-          </a:xfrm>
-          <a:prstGeom prst="roundRect">
-            <a:avLst/>
-          </a:prstGeom>
-          <a:solidFill>
-            <a:srgbClr val="FFFFFF"/>
-          </a:solidFill>
-          <a:ln w="22860">
-            <a:solidFill>
-              <a:srgbClr val="2E7D6B"/>
-            </a:solidFill>
-          </a:ln>
-          <a:effectLst/>
-        </p:spPr>
-        <p:style>
-          <a:lnRef idx="1">
-            <a:schemeClr val="accent1"/>
-          </a:lnRef>
-          <a:fillRef idx="3">
-            <a:schemeClr val="accent1"/>
-          </a:fillRef>
-          <a:effectRef idx="2">
-            <a:schemeClr val="accent1"/>
-          </a:effectRef>
-          <a:fontRef idx="minor">
-            <a:schemeClr val="lt1"/>
-          </a:fontRef>
-        </p:style>
-        <p:txBody>
-          <a:bodyPr rtlCol="0" anchor="ctr"/>
-          <a:lstStyle/>
-          <a:p>
-            <a:pPr algn="ctr"/>
-          </a:p>
-        </p:txBody>
-      </p:sp>
-      <p:sp>
-        <p:nvSpPr>
-          <p:cNvPr id="10" name="TextBox 9"/>
-          <p:cNvSpPr txBox="1"/>
-          <p:nvPr/>
-        </p:nvSpPr>
-        <p:spPr>
-          <a:xfrm>
-            <a:off x="4627778" y="2514600"/>
-            <a:ext cx="2936138" cy="548640"/>
-          </a:xfrm>
-          <a:prstGeom prst="rect">
-            <a:avLst/>
-          </a:prstGeom>
-          <a:noFill/>
-        </p:spPr>
-        <p:txBody>
-          <a:bodyPr wrap="square" anchor="t" lIns="0" rIns="0" tIns="0" bIns="0">
-            <a:spAutoFit/>
-          </a:bodyPr>
-          <a:lstStyle/>
-          <a:p>
-            <a:pPr algn="ctr"/>
-            <a:r>
-              <a:rPr sz="2100" b="1">
-                <a:solidFill>
-                  <a:srgbClr val="2E7D6B"/>
-                </a:solidFill>
-                <a:latin typeface="楷体"/>
-                <a:ea typeface="楷体"/>
-                <a:cs typeface="楷体"/>
-              </a:rPr>
-              <a:t>播报三步法</a:t>
-            </a:r>
-          </a:p>
-        </p:txBody>
-      </p:sp>
-      <p:sp>
-        <p:nvSpPr>
-          <p:cNvPr id="11" name="TextBox 10"/>
-          <p:cNvSpPr txBox="1"/>
-          <p:nvPr/>
-        </p:nvSpPr>
-        <p:spPr>
-          <a:xfrm>
-            <a:off x="4673498" y="3154680"/>
-            <a:ext cx="2844698" cy="1097280"/>
-          </a:xfrm>
-          <a:prstGeom prst="rect">
-            <a:avLst/>
-          </a:prstGeom>
-          <a:noFill/>
-        </p:spPr>
-        <p:txBody>
-          <a:bodyPr wrap="square" anchor="t" lIns="0" rIns="0" tIns="0" bIns="0">
-            <a:spAutoFit/>
-          </a:bodyPr>
-          <a:lstStyle/>
-          <a:p>
-            <a:pPr algn="ctr">
-              <a:lnSpc>
-                <a:spcPct val="150000"/>
-              </a:lnSpc>
-            </a:pPr>
-            <a:r>
-              <a:rPr sz="1350" b="0">
-                <a:solidFill>
-                  <a:srgbClr val="1C2A33"/>
-                </a:solidFill>
-                <a:latin typeface="楷体"/>
-                <a:ea typeface="楷体"/>
-                <a:cs typeface="楷体"/>
-              </a:rPr>
-              <a:t>选材 → 组稿 → 播报。语态要客观·简洁·有节奏，抬头看"观众"像主播。</a:t>
-            </a:r>
-          </a:p>
-        </p:txBody>
-      </p:sp>
-      <p:sp>
-        <p:nvSpPr>
-          <p:cNvPr id="12" name="Rounded Rectangle 11"/>
-          <p:cNvSpPr/>
-          <p:nvPr/>
-        </p:nvSpPr>
-        <p:spPr>
-          <a:xfrm>
-            <a:off x="8158276" y="2286000"/>
-            <a:ext cx="3393338" cy="2103120"/>
-          </a:xfrm>
-          <a:prstGeom prst="roundRect">
-            <a:avLst/>
-          </a:prstGeom>
-          <a:solidFill>
-            <a:srgbClr val="FFFFFF"/>
-          </a:solidFill>
-          <a:ln w="22860">
-            <a:solidFill>
-              <a:srgbClr val="C8A86B"/>
-            </a:solidFill>
-          </a:ln>
-          <a:effectLst/>
-        </p:spPr>
-        <p:style>
-          <a:lnRef idx="1">
-            <a:schemeClr val="accent1"/>
-          </a:lnRef>
-          <a:fillRef idx="3">
-            <a:schemeClr val="accent1"/>
-          </a:fillRef>
-          <a:effectRef idx="2">
-            <a:schemeClr val="accent1"/>
-          </a:effectRef>
-          <a:fontRef idx="minor">
-            <a:schemeClr val="lt1"/>
-          </a:fontRef>
-        </p:style>
-        <p:txBody>
-          <a:bodyPr rtlCol="0" anchor="ctr"/>
-          <a:lstStyle/>
-          <a:p>
-            <a:pPr algn="ctr"/>
-          </a:p>
-        </p:txBody>
-      </p:sp>
-      <p:sp>
-        <p:nvSpPr>
-          <p:cNvPr id="13" name="TextBox 12"/>
-          <p:cNvSpPr txBox="1"/>
-          <p:nvPr/>
-        </p:nvSpPr>
-        <p:spPr>
-          <a:xfrm>
-            <a:off x="8386876" y="2514600"/>
-            <a:ext cx="2936138" cy="548640"/>
-          </a:xfrm>
-          <a:prstGeom prst="rect">
-            <a:avLst/>
-          </a:prstGeom>
-          <a:noFill/>
-        </p:spPr>
-        <p:txBody>
-          <a:bodyPr wrap="square" anchor="t" lIns="0" rIns="0" tIns="0" bIns="0">
-            <a:spAutoFit/>
-          </a:bodyPr>
-          <a:lstStyle/>
-          <a:p>
-            <a:pPr algn="ctr"/>
-            <a:r>
-              <a:rPr sz="2100" b="1">
-                <a:solidFill>
-                  <a:srgbClr val="C8A86B"/>
-                </a:solidFill>
-                <a:latin typeface="楷体"/>
-                <a:ea typeface="楷体"/>
-                <a:cs typeface="楷体"/>
-              </a:rPr>
-              <a:t>核心一句</a:t>
-            </a:r>
-          </a:p>
-        </p:txBody>
-      </p:sp>
-      <p:sp>
-        <p:nvSpPr>
-          <p:cNvPr id="14" name="TextBox 13"/>
-          <p:cNvSpPr txBox="1"/>
-          <p:nvPr/>
-        </p:nvSpPr>
-        <p:spPr>
-          <a:xfrm>
-            <a:off x="8432596" y="3154680"/>
-            <a:ext cx="2844698" cy="1097280"/>
-          </a:xfrm>
-          <a:prstGeom prst="rect">
-            <a:avLst/>
-          </a:prstGeom>
-          <a:noFill/>
-        </p:spPr>
-        <p:txBody>
-          <a:bodyPr wrap="square" anchor="t" lIns="0" rIns="0" tIns="0" bIns="0">
-            <a:spAutoFit/>
-          </a:bodyPr>
-          <a:lstStyle/>
-          <a:p>
-            <a:pPr algn="ctr">
-              <a:lnSpc>
-                <a:spcPct val="150000"/>
-              </a:lnSpc>
-            </a:pPr>
-            <a:r>
-              <a:rPr sz="1350" b="0">
-                <a:solidFill>
-                  <a:srgbClr val="1C2A33"/>
-                </a:solidFill>
-                <a:latin typeface="楷体"/>
-                <a:ea typeface="楷体"/>
-                <a:cs typeface="楷体"/>
-              </a:rPr>
-              <a:t>读到的劳动故事，用口语"说出来"——这就是实用性表达。</a:t>
-            </a:r>
-          </a:p>
-        </p:txBody>
-      </p:sp>
-      <p:sp>
-        <p:nvSpPr>
-          <p:cNvPr id="15" name="Rounded Rectangle 14"/>
-          <p:cNvSpPr/>
-          <p:nvPr/>
-        </p:nvSpPr>
-        <p:spPr>
-          <a:xfrm>
-            <a:off x="640080" y="4572000"/>
-            <a:ext cx="10911535" cy="1920240"/>
-          </a:xfrm>
-          <a:prstGeom prst="roundRect">
-            <a:avLst/>
-          </a:prstGeom>
-          <a:solidFill>
-            <a:srgbClr val="1C2A33"/>
-          </a:solidFill>
-          <a:effectLst/>
-        </p:spPr>
-        <p:style>
-          <a:lnRef idx="1">
-            <a:schemeClr val="accent1"/>
-          </a:lnRef>
-          <a:fillRef idx="3">
-            <a:schemeClr val="accent1"/>
-          </a:fillRef>
-          <a:effectRef idx="2">
-            <a:schemeClr val="accent1"/>
-          </a:effectRef>
-          <a:fontRef idx="minor">
-            <a:schemeClr val="lt1"/>
-          </a:fontRef>
-        </p:style>
-        <p:txBody>
-          <a:bodyPr rtlCol="0" anchor="ctr"/>
-          <a:lstStyle/>
-          <a:p>
-            <a:pPr algn="ctr"/>
-          </a:p>
-        </p:txBody>
-      </p:sp>
-      <p:sp>
-        <p:nvSpPr>
-          <p:cNvPr id="16" name="Rectangle 15"/>
-          <p:cNvSpPr/>
-          <p:nvPr/>
-        </p:nvSpPr>
-        <p:spPr>
-          <a:xfrm>
-            <a:off x="914400" y="4800600"/>
-            <a:ext cx="54864" cy="381000"/>
           </a:xfrm>
           <a:prstGeom prst="rect">
             <a:avLst/>
@@ -10172,14 +8185,58 @@
       </p:sp>
       <p:sp>
         <p:nvSpPr>
-          <p:cNvPr id="17" name="TextBox 16"/>
+          <p:cNvPr id="5" name="Rectangle 4"/>
+          <p:cNvSpPr/>
+          <p:nvPr/>
+        </p:nvSpPr>
+        <p:spPr>
+          <a:xfrm>
+            <a:off x="640080" y="1737360"/>
+            <a:ext cx="54864" cy="431800"/>
+          </a:xfrm>
+          <a:prstGeom prst="rect">
+            <a:avLst/>
+          </a:prstGeom>
+          <a:solidFill>
+            <a:srgbClr val="C8A86B"/>
+          </a:solidFill>
+          <a:ln>
+            <a:noFill/>
+          </a:ln>
+          <a:effectLst/>
+        </p:spPr>
+        <p:style>
+          <a:lnRef idx="1">
+            <a:schemeClr val="accent1"/>
+          </a:lnRef>
+          <a:fillRef idx="3">
+            <a:schemeClr val="accent1"/>
+          </a:fillRef>
+          <a:effectRef idx="2">
+            <a:schemeClr val="accent1"/>
+          </a:effectRef>
+          <a:fontRef idx="minor">
+            <a:schemeClr val="lt1"/>
+          </a:fontRef>
+        </p:style>
+        <p:txBody>
+          <a:bodyPr rtlCol="0" anchor="ctr"/>
+          <a:lstStyle/>
+          <a:p>
+            <a:pPr algn="ctr"/>
+          </a:p>
+        </p:txBody>
+      </p:sp>
+      <p:sp>
+        <p:nvSpPr>
+          <p:cNvPr id="6" name="TextBox 5"/>
           <p:cNvSpPr txBox="1"/>
           <p:nvPr/>
         </p:nvSpPr>
         <p:spPr>
           <a:xfrm>
-            <a:off x="1143000" y="4709160"/>
-            <a:ext cx="10180015" cy="1737360"/>
+            <a:off x="868680" y="1645920"/>
+            <a:ext cx="10682935" cy="2194560"/>
           </a:xfrm>
           <a:prstGeom prst="rect">
             <a:avLst/>
@@ -10194,49 +8251,43 @@
           <a:p>
             <a:pPr algn="l">
               <a:lnSpc>
-                <a:spcPct val="140000"/>
+                <a:spcPct val="150000"/>
               </a:lnSpc>
               <a:spcAft>
-                <a:spcPts val="800"/>
+                <a:spcPts val="1000"/>
               </a:spcAft>
             </a:pPr>
             <a:r>
-              <a:rPr sz="1900" b="1">
-                <a:solidFill>
-                  <a:srgbClr val="C8A86B"/>
+              <a:rPr sz="2200" b="0">
+                <a:solidFill>
+                  <a:srgbClr val="1C2A33"/>
                 </a:solidFill>
                 <a:latin typeface="楷体"/>
                 <a:ea typeface="楷体"/>
                 <a:cs typeface="楷体"/>
               </a:rPr>
-              <a:t>口语交流，贵在"得体"</a:t>
-            </a:r>
-          </a:p>
-          <a:p>
-            <a:pPr algn="l">
-              <a:lnSpc>
-                <a:spcPct val="145000"/>
-              </a:lnSpc>
-            </a:pPr>
-            <a:r>
-              <a:rPr sz="1400" b="0">
-                <a:solidFill>
-                  <a:srgbClr val="FFFFFF"/>
-                </a:solidFill>
-                <a:latin typeface="楷体"/>
-                <a:ea typeface="楷体"/>
-                <a:cs typeface="楷体"/>
+              <a:t>本单元主题：劳动光荣。把今天学到的方法带进下一篇——自己读、自己想、自己写。</a:t>
+            </a:r>
+          </a:p>
+          <a:p>
+            <a:pPr algn="l"/>
+            <a:r>
+              <a:rPr sz="1600" b="1">
+                <a:solidFill>
+                  <a:srgbClr val="B23A2A"/>
+                </a:solidFill>
+                <a:latin typeface="微软雅黑"/>
+                <a:ea typeface="微软雅黑"/>
+                <a:cs typeface="微软雅黑"/>
               </a:rPr>
-              <a:t>访谈练"会问"——问题有层次，才挖得出真故事。
-播报练"会说"——语态客观简洁，信息才传得准。
-下节课：把口语素材写成人物通讯，口头表达落地为书面写作。</a:t>
-            </a:r>
-          </a:p>
-        </p:txBody>
-      </p:sp>
-      <p:sp>
-        <p:nvSpPr>
-          <p:cNvPr id="18" name="TextBox 17"/>
+              <a:t>方法迁移：圈关键信息 → 理事件脉络 → 析人物精神</a:t>
+            </a:r>
+          </a:p>
+        </p:txBody>
+      </p:sp>
+      <p:sp>
+        <p:nvSpPr>
+          <p:cNvPr id="7" name="TextBox 6"/>
           <p:cNvSpPr txBox="1"/>
           <p:nvPr/>
         </p:nvSpPr>
